--- a/deck/CIAA_Overview.pptx
+++ b/deck/CIAA_Overview.pptx
@@ -23,9 +23,11 @@
     <p:sldId id="271" r:id="rId17"/>
     <p:sldId id="272" r:id="rId18"/>
     <p:sldId id="273" r:id="rId19"/>
+    <p:sldId id="274" r:id="rId20"/>
+    <p:sldId id="275" r:id="rId21"/>
   </p:sldIdLst>
   <p:notesMasterIdLst>
-    <p:notesMasterId r:id="rId20"/>
+    <p:notesMasterId r:id="rId22"/>
   </p:notesMasterIdLst>
   <p:sldSz cx="12191695" cy="6858000"/>
   <p:notesSz cx="6858000" cy="12191695"/>
@@ -1353,6 +1355,94 @@
 </p:notes>
 </file>
 
+<file path=ppt/notesSlides/notesSlide19.xml><?xml version="1.0" encoding="utf-8"?>
+<p:notes xmlns:a="http://schemas.openxmlformats.org/drawingml/2006/main" xmlns:r="http://schemas.openxmlformats.org/officeDocument/2006/relationships" xmlns:p="http://schemas.openxmlformats.org/presentationml/2006/main">
+  <p:cSld>
+    <p:spTree>
+      <p:nvGrpSpPr>
+        <p:cNvPr id="1" name=""/>
+        <p:cNvGrpSpPr/>
+        <p:nvPr/>
+      </p:nvGrpSpPr>
+      <p:grpSpPr>
+        <a:xfrm>
+          <a:off x="0" y="0"/>
+          <a:ext cx="0" cy="0"/>
+          <a:chOff x="0" y="0"/>
+          <a:chExt cx="0" cy="0"/>
+        </a:xfrm>
+      </p:grpSpPr>
+      <p:sp>
+        <p:nvSpPr>
+          <p:cNvPr id="2" name="Slide Image Placeholder 1"/>
+          <p:cNvSpPr>
+            <a:spLocks noGrp="1" noRot="1" noChangeAspect="1"/>
+          </p:cNvSpPr>
+          <p:nvPr>
+            <p:ph type="sldImg"/>
+          </p:nvPr>
+        </p:nvSpPr>
+        <p:spPr/>
+      </p:sp>
+      <p:sp>
+        <p:nvSpPr>
+          <p:cNvPr id="3" name="Notes Placeholder 2"/>
+          <p:cNvSpPr>
+            <a:spLocks noGrp="1"/>
+          </p:cNvSpPr>
+          <p:nvPr>
+            <p:ph type="body" idx="1"/>
+          </p:nvPr>
+        </p:nvSpPr>
+        <p:spPr/>
+        <p:txBody>
+          <a:bodyPr/>
+          <a:lstStyle/>
+          <a:p>
+            <a:r>
+              <a:rPr lang="en-US" dirty="0"/>
+              <a:t/>
+            </a:r>
+            <a:endParaRPr lang="en-US" dirty="0"/>
+          </a:p>
+        </p:txBody>
+      </p:sp>
+      <p:sp>
+        <p:nvSpPr>
+          <p:cNvPr id="4" name="Slide Number Placeholder 3"/>
+          <p:cNvSpPr>
+            <a:spLocks noGrp="1"/>
+          </p:cNvSpPr>
+          <p:nvPr>
+            <p:ph type="sldNum" sz="quarter" idx="10"/>
+          </p:nvPr>
+        </p:nvSpPr>
+        <p:spPr/>
+        <p:txBody>
+          <a:bodyPr/>
+          <a:lstStyle/>
+          <a:p>
+            <a:fld id="{F7021451-1387-4CA6-816F-3879F97B5CBC}" type="slidenum">
+              <a:rPr lang="en-US"/>
+              <a:t>19</a:t>
+            </a:fld>
+            <a:endParaRPr lang="en-US"/>
+          </a:p>
+        </p:txBody>
+      </p:sp>
+    </p:spTree>
+    <p:extLst>
+      <p:ext uri="{BB962C8B-B14F-4D97-AF65-F5344CB8AC3E}">
+        <p14:creationId xmlns:p14="http://schemas.microsoft.com/office/powerpoint/2010/main" val="1024086991"/>
+      </p:ext>
+    </p:extLst>
+  </p:cSld>
+  <p:clrMapOvr>
+    <a:masterClrMapping/>
+  </p:clrMapOvr>
+</p:notes>
+</file>
+
 <file path=ppt/notesSlides/notesSlide2.xml><?xml version="1.0" encoding="utf-8"?>
 <p:notes xmlns:a="http://schemas.openxmlformats.org/drawingml/2006/main" xmlns:r="http://schemas.openxmlformats.org/officeDocument/2006/relationships" xmlns:p="http://schemas.openxmlformats.org/presentationml/2006/main">
   <p:cSld>
@@ -1423,6 +1513,94 @@
             <a:fld id="{F7021451-1387-4CA6-816F-3879F97B5CBC}" type="slidenum">
               <a:rPr lang="en-US"/>
               <a:t>2</a:t>
+            </a:fld>
+            <a:endParaRPr lang="en-US"/>
+          </a:p>
+        </p:txBody>
+      </p:sp>
+    </p:spTree>
+    <p:extLst>
+      <p:ext uri="{BB962C8B-B14F-4D97-AF65-F5344CB8AC3E}">
+        <p14:creationId xmlns:p14="http://schemas.microsoft.com/office/powerpoint/2010/main" val="1024086991"/>
+      </p:ext>
+    </p:extLst>
+  </p:cSld>
+  <p:clrMapOvr>
+    <a:masterClrMapping/>
+  </p:clrMapOvr>
+</p:notes>
+</file>
+
+<file path=ppt/notesSlides/notesSlide20.xml><?xml version="1.0" encoding="utf-8"?>
+<p:notes xmlns:a="http://schemas.openxmlformats.org/drawingml/2006/main" xmlns:r="http://schemas.openxmlformats.org/officeDocument/2006/relationships" xmlns:p="http://schemas.openxmlformats.org/presentationml/2006/main">
+  <p:cSld>
+    <p:spTree>
+      <p:nvGrpSpPr>
+        <p:cNvPr id="1" name=""/>
+        <p:cNvGrpSpPr/>
+        <p:nvPr/>
+      </p:nvGrpSpPr>
+      <p:grpSpPr>
+        <a:xfrm>
+          <a:off x="0" y="0"/>
+          <a:ext cx="0" cy="0"/>
+          <a:chOff x="0" y="0"/>
+          <a:chExt cx="0" cy="0"/>
+        </a:xfrm>
+      </p:grpSpPr>
+      <p:sp>
+        <p:nvSpPr>
+          <p:cNvPr id="2" name="Slide Image Placeholder 1"/>
+          <p:cNvSpPr>
+            <a:spLocks noGrp="1" noRot="1" noChangeAspect="1"/>
+          </p:cNvSpPr>
+          <p:nvPr>
+            <p:ph type="sldImg"/>
+          </p:nvPr>
+        </p:nvSpPr>
+        <p:spPr/>
+      </p:sp>
+      <p:sp>
+        <p:nvSpPr>
+          <p:cNvPr id="3" name="Notes Placeholder 2"/>
+          <p:cNvSpPr>
+            <a:spLocks noGrp="1"/>
+          </p:cNvSpPr>
+          <p:nvPr>
+            <p:ph type="body" idx="1"/>
+          </p:nvPr>
+        </p:nvSpPr>
+        <p:spPr/>
+        <p:txBody>
+          <a:bodyPr/>
+          <a:lstStyle/>
+          <a:p>
+            <a:r>
+              <a:rPr lang="en-US" dirty="0"/>
+              <a:t/>
+            </a:r>
+            <a:endParaRPr lang="en-US" dirty="0"/>
+          </a:p>
+        </p:txBody>
+      </p:sp>
+      <p:sp>
+        <p:nvSpPr>
+          <p:cNvPr id="4" name="Slide Number Placeholder 3"/>
+          <p:cNvSpPr>
+            <a:spLocks noGrp="1"/>
+          </p:cNvSpPr>
+          <p:nvPr>
+            <p:ph type="sldNum" sz="quarter" idx="10"/>
+          </p:nvPr>
+        </p:nvSpPr>
+        <p:spPr/>
+        <p:txBody>
+          <a:bodyPr/>
+          <a:lstStyle/>
+          <a:p>
+            <a:fld id="{F7021451-1387-4CA6-816F-3879F97B5CBC}" type="slidenum">
+              <a:rPr lang="en-US"/>
+              <a:t>20</a:t>
             </a:fld>
             <a:endParaRPr lang="en-US"/>
           </a:p>
@@ -10647,7 +10825,7 @@
                 <a:ea typeface="Georgia" pitchFamily="34" charset="-122"/>
                 <a:cs typeface="Georgia" pitchFamily="34" charset="-120"/>
               </a:rPr>
-              <a:t>519</a:t>
+              <a:t>538</a:t>
             </a:r>
             <a:endParaRPr lang="en-US" sz="3400" dirty="0"/>
           </a:p>
@@ -11396,7 +11574,7 @@
                 <a:ea typeface="Calibri" pitchFamily="34" charset="-122"/>
                 <a:cs typeface="Calibri" pitchFamily="34" charset="-120"/>
               </a:rPr>
-              <a:t>Built-in LLM-as-judge panel scores every agent's output for completeness &amp; precision.</a:t>
+              <a:t>LLM-as-judge panel scores every agent; a golden-case quality gate fails CI on any detection regression.</a:t>
             </a:r>
             <a:endParaRPr lang="en-US" sz="1200" dirty="0"/>
           </a:p>
@@ -12615,7 +12793,7 @@
                 <a:ea typeface="Calibri" pitchFamily="34" charset="-122"/>
                 <a:cs typeface="Calibri" pitchFamily="34" charset="-120"/>
               </a:rPr>
-              <a:t>AST · taint · entropy scanners  </a:t>
+              <a:t>tree-sitter AST · taint · entropy  </a:t>
             </a:r>
             <a:pPr indent="0" marL="0">
               <a:lnSpc>
@@ -12635,7 +12813,7 @@
                 <a:ea typeface="Calibri" pitchFamily="34" charset="-122"/>
                 <a:cs typeface="Calibri" pitchFamily="34" charset="-120"/>
               </a:rPr>
-              <a:t>— code, injection &amp; secret detection</a:t>
+              <a:t>— precise 6-language parsing &amp; detection</a:t>
             </a:r>
             <a:endParaRPr lang="en-US" sz="1050" dirty="0"/>
           </a:p>
@@ -13197,7 +13375,7 @@
                 <a:ea typeface="Calibri" pitchFamily="34" charset="-122"/>
                 <a:cs typeface="Calibri" pitchFamily="34" charset="-120"/>
               </a:rPr>
-              <a:t>— containers · deploy · 519 tests</a:t>
+              <a:t>— containers · deploy · 538 tests</a:t>
             </a:r>
             <a:endParaRPr lang="en-US" sz="1050" dirty="0"/>
           </a:p>
@@ -13265,7 +13443,7 @@
     <p:bg>
       <p:bgPr>
         <a:solidFill>
-          <a:srgbClr val="0E1A33"/>
+          <a:srgbClr val="FFFFFF"/>
         </a:solidFill>
       </p:bgPr>
     </p:bg>
@@ -13285,14 +13463,892 @@
       </p:grpSpPr>
       <p:sp>
         <p:nvSpPr>
-          <p:cNvPr id="2" name="Shape 0"/>
-          <p:cNvSpPr/>
-          <p:nvPr/>
-        </p:nvSpPr>
-        <p:spPr>
-          <a:xfrm>
-            <a:off x="0" y="0"/>
-            <a:ext cx="12191695" cy="164592"/>
+          <p:cNvPr id="2" name="Text 0"/>
+          <p:cNvSpPr/>
+          <p:nvPr/>
+        </p:nvSpPr>
+        <p:spPr>
+          <a:xfrm>
+            <a:off x="594360" y="365760"/>
+            <a:ext cx="5486400" cy="274320"/>
+          </a:xfrm>
+          <a:prstGeom prst="rect">
+            <a:avLst/>
+          </a:prstGeom>
+          <a:noFill/>
+          <a:ln/>
+        </p:spPr>
+        <p:txBody>
+          <a:bodyPr wrap="square" lIns="0" tIns="0" rIns="0" bIns="0" rtlCol="0" anchor="ctr"/>
+          <a:lstStyle/>
+          <a:p>
+            <a:pPr indent="0" marL="0">
+              <a:buNone/>
+            </a:pPr>
+            <a:r>
+              <a:rPr lang="en-US" sz="1200" b="1" spc="300" kern="0" dirty="0">
+                <a:solidFill>
+                  <a:srgbClr val="2DD4BF"/>
+                </a:solidFill>
+                <a:latin typeface="Calibri" pitchFamily="34" charset="0"/>
+                <a:ea typeface="Calibri" pitchFamily="34" charset="-122"/>
+                <a:cs typeface="Calibri" pitchFamily="34" charset="-120"/>
+              </a:rPr>
+              <a:t>ROADMAP</a:t>
+            </a:r>
+            <a:endParaRPr lang="en-US" sz="1200" dirty="0"/>
+          </a:p>
+        </p:txBody>
+      </p:sp>
+      <p:sp>
+        <p:nvSpPr>
+          <p:cNvPr id="3" name="Text 1"/>
+          <p:cNvSpPr/>
+          <p:nvPr/>
+        </p:nvSpPr>
+        <p:spPr>
+          <a:xfrm>
+            <a:off x="594360" y="566928"/>
+            <a:ext cx="11002975" cy="731520"/>
+          </a:xfrm>
+          <a:prstGeom prst="rect">
+            <a:avLst/>
+          </a:prstGeom>
+          <a:noFill/>
+          <a:ln/>
+        </p:spPr>
+        <p:txBody>
+          <a:bodyPr wrap="square" lIns="0" tIns="0" rIns="0" bIns="0" rtlCol="0" anchor="ctr"/>
+          <a:lstStyle/>
+          <a:p>
+            <a:pPr indent="0" marL="0">
+              <a:buNone/>
+            </a:pPr>
+            <a:r>
+              <a:rPr lang="en-US" sz="3000" b="1" dirty="0">
+                <a:solidFill>
+                  <a:srgbClr val="1E293B"/>
+                </a:solidFill>
+                <a:latin typeface="Georgia" pitchFamily="34" charset="0"/>
+                <a:ea typeface="Georgia" pitchFamily="34" charset="-122"/>
+                <a:cs typeface="Georgia" pitchFamily="34" charset="-120"/>
+              </a:rPr>
+              <a:t>Where CIAA goes next</a:t>
+            </a:r>
+            <a:endParaRPr lang="en-US" sz="3000" dirty="0"/>
+          </a:p>
+        </p:txBody>
+      </p:sp>
+      <p:sp>
+        <p:nvSpPr>
+          <p:cNvPr id="4" name="Text 2"/>
+          <p:cNvSpPr/>
+          <p:nvPr/>
+        </p:nvSpPr>
+        <p:spPr>
+          <a:xfrm>
+            <a:off x="594360" y="1261872"/>
+            <a:ext cx="11002975" cy="365760"/>
+          </a:xfrm>
+          <a:prstGeom prst="rect">
+            <a:avLst/>
+          </a:prstGeom>
+          <a:noFill/>
+          <a:ln/>
+        </p:spPr>
+        <p:txBody>
+          <a:bodyPr wrap="square" lIns="0" tIns="0" rIns="0" bIns="0" rtlCol="0" anchor="ctr"/>
+          <a:lstStyle/>
+          <a:p>
+            <a:pPr indent="0" marL="0">
+              <a:buNone/>
+            </a:pPr>
+            <a:r>
+              <a:rPr lang="en-US" sz="1300" dirty="0">
+                <a:solidFill>
+                  <a:srgbClr val="64748B"/>
+                </a:solidFill>
+                <a:latin typeface="Calibri" pitchFamily="34" charset="0"/>
+                <a:ea typeface="Calibri" pitchFamily="34" charset="-122"/>
+                <a:cs typeface="Calibri" pitchFamily="34" charset="-120"/>
+              </a:rPr>
+              <a:t>Detection quality is production-grade today — the roadmap scales it to an organisation-wide platform.</a:t>
+            </a:r>
+            <a:endParaRPr lang="en-US" sz="1300" dirty="0"/>
+          </a:p>
+        </p:txBody>
+      </p:sp>
+      <p:sp>
+        <p:nvSpPr>
+          <p:cNvPr id="5" name="Shape 3"/>
+          <p:cNvSpPr/>
+          <p:nvPr/>
+        </p:nvSpPr>
+        <p:spPr>
+          <a:xfrm>
+            <a:off x="594360" y="1828800"/>
+            <a:ext cx="2510714" cy="3977640"/>
+          </a:xfrm>
+          <a:prstGeom prst="roundRect">
+            <a:avLst>
+              <a:gd name="adj" fmla="val 3278"/>
+            </a:avLst>
+          </a:prstGeom>
+          <a:solidFill>
+            <a:srgbClr val="F6F8FB"/>
+          </a:solidFill>
+          <a:ln w="12700">
+            <a:solidFill>
+              <a:srgbClr val="E2E8F0"/>
+            </a:solidFill>
+            <a:prstDash val="solid"/>
+          </a:ln>
+        </p:spPr>
+      </p:sp>
+      <p:sp>
+        <p:nvSpPr>
+          <p:cNvPr id="6" name="Shape 4"/>
+          <p:cNvSpPr/>
+          <p:nvPr/>
+        </p:nvSpPr>
+        <p:spPr>
+          <a:xfrm>
+            <a:off x="594360" y="1828800"/>
+            <a:ext cx="2510714" cy="91440"/>
+          </a:xfrm>
+          <a:prstGeom prst="rect">
+            <a:avLst/>
+          </a:prstGeom>
+          <a:solidFill>
+            <a:srgbClr val="38BDF8"/>
+          </a:solidFill>
+          <a:ln/>
+        </p:spPr>
+      </p:sp>
+      <p:sp>
+        <p:nvSpPr>
+          <p:cNvPr id="7" name="Shape 5"/>
+          <p:cNvSpPr/>
+          <p:nvPr/>
+        </p:nvSpPr>
+        <p:spPr>
+          <a:xfrm>
+            <a:off x="813816" y="2103120"/>
+            <a:ext cx="512064" cy="512064"/>
+          </a:xfrm>
+          <a:prstGeom prst="ellipse">
+            <a:avLst/>
+          </a:prstGeom>
+          <a:solidFill>
+            <a:srgbClr val="38BDF8"/>
+          </a:solidFill>
+          <a:ln/>
+        </p:spPr>
+      </p:sp>
+      <p:pic>
+        <p:nvPicPr>
+          <p:cNvPr id="8" name="Image 0" descr="preencoded.png">    </p:cNvPr>
+          <p:cNvPicPr>
+            <a:picLocks noChangeAspect="1"/>
+          </p:cNvPicPr>
+          <p:nvPr/>
+        </p:nvPicPr>
+        <p:blipFill>
+          <a:blip r:embed="rId1"/>
+          <a:stretch>
+            <a:fillRect/>
+          </a:stretch>
+        </p:blipFill>
+        <p:spPr>
+          <a:xfrm>
+            <a:off x="952073" y="2241377"/>
+            <a:ext cx="235549" cy="235549"/>
+          </a:xfrm>
+          <a:prstGeom prst="rect">
+            <a:avLst/>
+          </a:prstGeom>
+        </p:spPr>
+      </p:pic>
+      <p:sp>
+        <p:nvSpPr>
+          <p:cNvPr id="9" name="Text 6"/>
+          <p:cNvSpPr/>
+          <p:nvPr/>
+        </p:nvSpPr>
+        <p:spPr>
+          <a:xfrm>
+            <a:off x="1463040" y="2103120"/>
+            <a:ext cx="1504874" cy="237744"/>
+          </a:xfrm>
+          <a:prstGeom prst="rect">
+            <a:avLst/>
+          </a:prstGeom>
+          <a:noFill/>
+          <a:ln/>
+        </p:spPr>
+        <p:txBody>
+          <a:bodyPr wrap="square" lIns="0" tIns="0" rIns="0" bIns="0" rtlCol="0" anchor="ctr"/>
+          <a:lstStyle/>
+          <a:p>
+            <a:pPr indent="0" marL="0">
+              <a:buNone/>
+            </a:pPr>
+            <a:r>
+              <a:rPr lang="en-US" sz="950" b="1" spc="200" kern="0" dirty="0">
+                <a:solidFill>
+                  <a:srgbClr val="38BDF8"/>
+                </a:solidFill>
+                <a:latin typeface="Calibri" pitchFamily="34" charset="0"/>
+                <a:ea typeface="Calibri" pitchFamily="34" charset="-122"/>
+                <a:cs typeface="Calibri" pitchFamily="34" charset="-120"/>
+              </a:rPr>
+              <a:t>PHASE 1</a:t>
+            </a:r>
+            <a:endParaRPr lang="en-US" sz="950" dirty="0"/>
+          </a:p>
+        </p:txBody>
+      </p:sp>
+      <p:sp>
+        <p:nvSpPr>
+          <p:cNvPr id="10" name="Text 7"/>
+          <p:cNvSpPr/>
+          <p:nvPr/>
+        </p:nvSpPr>
+        <p:spPr>
+          <a:xfrm>
+            <a:off x="1463040" y="2331720"/>
+            <a:ext cx="1504874" cy="329184"/>
+          </a:xfrm>
+          <a:prstGeom prst="rect">
+            <a:avLst/>
+          </a:prstGeom>
+          <a:noFill/>
+          <a:ln/>
+        </p:spPr>
+        <p:txBody>
+          <a:bodyPr wrap="square" lIns="0" tIns="0" rIns="0" bIns="0" rtlCol="0" anchor="ctr"/>
+          <a:lstStyle/>
+          <a:p>
+            <a:pPr indent="0" marL="0">
+              <a:buNone/>
+            </a:pPr>
+            <a:r>
+              <a:rPr lang="en-US" sz="1500" b="1" dirty="0">
+                <a:solidFill>
+                  <a:srgbClr val="1E293B"/>
+                </a:solidFill>
+                <a:latin typeface="Georgia" pitchFamily="34" charset="0"/>
+                <a:ea typeface="Georgia" pitchFamily="34" charset="-122"/>
+                <a:cs typeface="Georgia" pitchFamily="34" charset="-120"/>
+              </a:rPr>
+              <a:t>Scale-out</a:t>
+            </a:r>
+            <a:endParaRPr lang="en-US" sz="1500" dirty="0"/>
+          </a:p>
+        </p:txBody>
+      </p:sp>
+      <p:sp>
+        <p:nvSpPr>
+          <p:cNvPr id="11" name="Text 8"/>
+          <p:cNvSpPr/>
+          <p:nvPr/>
+        </p:nvSpPr>
+        <p:spPr>
+          <a:xfrm>
+            <a:off x="832104" y="2852928"/>
+            <a:ext cx="2053514" cy="2240280"/>
+          </a:xfrm>
+          <a:prstGeom prst="rect">
+            <a:avLst/>
+          </a:prstGeom>
+          <a:noFill/>
+          <a:ln/>
+        </p:spPr>
+        <p:txBody>
+          <a:bodyPr wrap="square" lIns="0" tIns="0" rIns="0" bIns="0" rtlCol="0" anchor="ctr"/>
+          <a:lstStyle/>
+          <a:p>
+            <a:pPr marL="127000" indent="-127000">
+              <a:lnSpc>
+                <a:spcPct val="104000"/>
+              </a:lnSpc>
+              <a:spcAft>
+                <a:spcPts val="700"/>
+              </a:spcAft>
+              <a:buSzPct val="100000"/>
+              <a:buChar char="•"/>
+            </a:pPr>
+            <a:r>
+              <a:rPr lang="en-US" sz="1050" dirty="0">
+                <a:solidFill>
+                  <a:srgbClr val="1E293B"/>
+                </a:solidFill>
+                <a:latin typeface="Calibri" pitchFamily="34" charset="0"/>
+                <a:ea typeface="Calibri" pitchFamily="34" charset="-122"/>
+                <a:cs typeface="Calibri" pitchFamily="34" charset="-120"/>
+              </a:rPr>
+              <a:t>Redis-backed job queue + autoscaling analysis workers</a:t>
+            </a:r>
+            <a:endParaRPr lang="en-US" sz="1050" dirty="0"/>
+          </a:p>
+          <a:p>
+            <a:pPr marL="127000" indent="-127000">
+              <a:lnSpc>
+                <a:spcPct val="104000"/>
+              </a:lnSpc>
+              <a:spcAft>
+                <a:spcPts val="700"/>
+              </a:spcAft>
+              <a:buSzPct val="100000"/>
+              <a:buChar char="•"/>
+            </a:pPr>
+            <a:r>
+              <a:rPr lang="en-US" sz="1050" dirty="0">
+                <a:solidFill>
+                  <a:srgbClr val="1E293B"/>
+                </a:solidFill>
+                <a:latin typeface="Calibri" pitchFamily="34" charset="0"/>
+                <a:ea typeface="Calibri" pitchFamily="34" charset="-122"/>
+                <a:cs typeface="Calibri" pitchFamily="34" charset="-120"/>
+              </a:rPr>
+              <a:t>PostgreSQL report store (replaces SQLite)</a:t>
+            </a:r>
+            <a:endParaRPr lang="en-US" sz="1050" dirty="0"/>
+          </a:p>
+          <a:p>
+            <a:pPr marL="127000" indent="-127000">
+              <a:lnSpc>
+                <a:spcPct val="104000"/>
+              </a:lnSpc>
+              <a:spcAft>
+                <a:spcPts val="700"/>
+              </a:spcAft>
+              <a:buSzPct val="100000"/>
+              <a:buChar char="•"/>
+            </a:pPr>
+            <a:r>
+              <a:rPr lang="en-US" sz="1050" dirty="0">
+                <a:solidFill>
+                  <a:srgbClr val="1E293B"/>
+                </a:solidFill>
+                <a:latin typeface="Calibri" pitchFamily="34" charset="0"/>
+                <a:ea typeface="Calibri" pitchFamily="34" charset="-122"/>
+                <a:cs typeface="Calibri" pitchFamily="34" charset="-120"/>
+              </a:rPr>
+              <a:t>Cluster-wide rate &amp; LLM concurrency limits</a:t>
+            </a:r>
+            <a:endParaRPr lang="en-US" sz="1050" dirty="0"/>
+          </a:p>
+        </p:txBody>
+      </p:sp>
+      <p:sp>
+        <p:nvSpPr>
+          <p:cNvPr id="12" name="Shape 9"/>
+          <p:cNvSpPr/>
+          <p:nvPr/>
+        </p:nvSpPr>
+        <p:spPr>
+          <a:xfrm>
+            <a:off x="832104" y="5093208"/>
+            <a:ext cx="2035226" cy="0"/>
+          </a:xfrm>
+          <a:prstGeom prst="line">
+            <a:avLst/>
+          </a:prstGeom>
+          <a:noFill/>
+          <a:ln w="12700">
+            <a:solidFill>
+              <a:srgbClr val="E2E8F0"/>
+            </a:solidFill>
+            <a:prstDash val="solid"/>
+          </a:ln>
+        </p:spPr>
+      </p:sp>
+      <p:sp>
+        <p:nvSpPr>
+          <p:cNvPr id="13" name="Text 10"/>
+          <p:cNvSpPr/>
+          <p:nvPr/>
+        </p:nvSpPr>
+        <p:spPr>
+          <a:xfrm>
+            <a:off x="832104" y="5184648"/>
+            <a:ext cx="2053514" cy="512064"/>
+          </a:xfrm>
+          <a:prstGeom prst="rect">
+            <a:avLst/>
+          </a:prstGeom>
+          <a:noFill/>
+          <a:ln/>
+        </p:spPr>
+        <p:txBody>
+          <a:bodyPr wrap="square" lIns="0" tIns="0" rIns="0" bIns="0" rtlCol="0" anchor="ctr"/>
+          <a:lstStyle/>
+          <a:p>
+            <a:pPr indent="0" marL="0">
+              <a:lnSpc>
+                <a:spcPct val="100000"/>
+              </a:lnSpc>
+              <a:buNone/>
+            </a:pPr>
+            <a:r>
+              <a:rPr lang="en-US" sz="950" i="1" dirty="0">
+                <a:solidFill>
+                  <a:srgbClr val="38BDF8"/>
+                </a:solidFill>
+                <a:latin typeface="Calibri" pitchFamily="34" charset="0"/>
+                <a:ea typeface="Calibri" pitchFamily="34" charset="-122"/>
+                <a:cs typeface="Calibri" pitchFamily="34" charset="-120"/>
+              </a:rPr>
+              <a:t>Many teams, many PRs, zero queue contention</a:t>
+            </a:r>
+            <a:endParaRPr lang="en-US" sz="950" dirty="0"/>
+          </a:p>
+        </p:txBody>
+      </p:sp>
+      <p:sp>
+        <p:nvSpPr>
+          <p:cNvPr id="14" name="Text 11"/>
+          <p:cNvSpPr/>
+          <p:nvPr/>
+        </p:nvSpPr>
+        <p:spPr>
+          <a:xfrm>
+            <a:off x="3086786" y="3543300"/>
+            <a:ext cx="365760" cy="548640"/>
+          </a:xfrm>
+          <a:prstGeom prst="rect">
+            <a:avLst/>
+          </a:prstGeom>
+          <a:noFill/>
+          <a:ln/>
+        </p:spPr>
+        <p:txBody>
+          <a:bodyPr wrap="square" lIns="0" tIns="0" rIns="0" bIns="0" rtlCol="0" anchor="ctr"/>
+          <a:lstStyle/>
+          <a:p>
+            <a:pPr algn="ctr" indent="0" marL="0">
+              <a:buNone/>
+            </a:pPr>
+            <a:r>
+              <a:rPr lang="en-US" sz="2200" b="1" dirty="0">
+                <a:solidFill>
+                  <a:srgbClr val="C9D4E8"/>
+                </a:solidFill>
+                <a:latin typeface="Georgia" pitchFamily="34" charset="0"/>
+                <a:ea typeface="Georgia" pitchFamily="34" charset="-122"/>
+                <a:cs typeface="Georgia" pitchFamily="34" charset="-120"/>
+              </a:rPr>
+              <a:t>›</a:t>
+            </a:r>
+            <a:endParaRPr lang="en-US" sz="2200" dirty="0"/>
+          </a:p>
+        </p:txBody>
+      </p:sp>
+      <p:sp>
+        <p:nvSpPr>
+          <p:cNvPr id="15" name="Shape 12"/>
+          <p:cNvSpPr/>
+          <p:nvPr/>
+        </p:nvSpPr>
+        <p:spPr>
+          <a:xfrm>
+            <a:off x="3425114" y="1828800"/>
+            <a:ext cx="2510714" cy="3977640"/>
+          </a:xfrm>
+          <a:prstGeom prst="roundRect">
+            <a:avLst>
+              <a:gd name="adj" fmla="val 3278"/>
+            </a:avLst>
+          </a:prstGeom>
+          <a:solidFill>
+            <a:srgbClr val="F6F8FB"/>
+          </a:solidFill>
+          <a:ln w="12700">
+            <a:solidFill>
+              <a:srgbClr val="E2E8F0"/>
+            </a:solidFill>
+            <a:prstDash val="solid"/>
+          </a:ln>
+        </p:spPr>
+      </p:sp>
+      <p:sp>
+        <p:nvSpPr>
+          <p:cNvPr id="16" name="Shape 13"/>
+          <p:cNvSpPr/>
+          <p:nvPr/>
+        </p:nvSpPr>
+        <p:spPr>
+          <a:xfrm>
+            <a:off x="3425114" y="1828800"/>
+            <a:ext cx="2510714" cy="91440"/>
+          </a:xfrm>
+          <a:prstGeom prst="rect">
+            <a:avLst/>
+          </a:prstGeom>
+          <a:solidFill>
+            <a:srgbClr val="6366F1"/>
+          </a:solidFill>
+          <a:ln/>
+        </p:spPr>
+      </p:sp>
+      <p:sp>
+        <p:nvSpPr>
+          <p:cNvPr id="17" name="Shape 14"/>
+          <p:cNvSpPr/>
+          <p:nvPr/>
+        </p:nvSpPr>
+        <p:spPr>
+          <a:xfrm>
+            <a:off x="3644570" y="2103120"/>
+            <a:ext cx="512064" cy="512064"/>
+          </a:xfrm>
+          <a:prstGeom prst="ellipse">
+            <a:avLst/>
+          </a:prstGeom>
+          <a:solidFill>
+            <a:srgbClr val="6366F1"/>
+          </a:solidFill>
+          <a:ln/>
+        </p:spPr>
+      </p:sp>
+      <p:pic>
+        <p:nvPicPr>
+          <p:cNvPr id="18" name="Image 1" descr="preencoded.png">    </p:cNvPr>
+          <p:cNvPicPr>
+            <a:picLocks noChangeAspect="1"/>
+          </p:cNvPicPr>
+          <p:nvPr/>
+        </p:nvPicPr>
+        <p:blipFill>
+          <a:blip r:embed="rId2"/>
+          <a:stretch>
+            <a:fillRect/>
+          </a:stretch>
+        </p:blipFill>
+        <p:spPr>
+          <a:xfrm>
+            <a:off x="3782827" y="2241377"/>
+            <a:ext cx="235549" cy="235549"/>
+          </a:xfrm>
+          <a:prstGeom prst="rect">
+            <a:avLst/>
+          </a:prstGeom>
+        </p:spPr>
+      </p:pic>
+      <p:sp>
+        <p:nvSpPr>
+          <p:cNvPr id="19" name="Text 15"/>
+          <p:cNvSpPr/>
+          <p:nvPr/>
+        </p:nvSpPr>
+        <p:spPr>
+          <a:xfrm>
+            <a:off x="4293794" y="2103120"/>
+            <a:ext cx="1504874" cy="237744"/>
+          </a:xfrm>
+          <a:prstGeom prst="rect">
+            <a:avLst/>
+          </a:prstGeom>
+          <a:noFill/>
+          <a:ln/>
+        </p:spPr>
+        <p:txBody>
+          <a:bodyPr wrap="square" lIns="0" tIns="0" rIns="0" bIns="0" rtlCol="0" anchor="ctr"/>
+          <a:lstStyle/>
+          <a:p>
+            <a:pPr indent="0" marL="0">
+              <a:buNone/>
+            </a:pPr>
+            <a:r>
+              <a:rPr lang="en-US" sz="950" b="1" spc="200" kern="0" dirty="0">
+                <a:solidFill>
+                  <a:srgbClr val="6366F1"/>
+                </a:solidFill>
+                <a:latin typeface="Calibri" pitchFamily="34" charset="0"/>
+                <a:ea typeface="Calibri" pitchFamily="34" charset="-122"/>
+                <a:cs typeface="Calibri" pitchFamily="34" charset="-120"/>
+              </a:rPr>
+              <a:t>PHASE 2</a:t>
+            </a:r>
+            <a:endParaRPr lang="en-US" sz="950" dirty="0"/>
+          </a:p>
+        </p:txBody>
+      </p:sp>
+      <p:sp>
+        <p:nvSpPr>
+          <p:cNvPr id="20" name="Text 16"/>
+          <p:cNvSpPr/>
+          <p:nvPr/>
+        </p:nvSpPr>
+        <p:spPr>
+          <a:xfrm>
+            <a:off x="4293794" y="2331720"/>
+            <a:ext cx="1504874" cy="329184"/>
+          </a:xfrm>
+          <a:prstGeom prst="rect">
+            <a:avLst/>
+          </a:prstGeom>
+          <a:noFill/>
+          <a:ln/>
+        </p:spPr>
+        <p:txBody>
+          <a:bodyPr wrap="square" lIns="0" tIns="0" rIns="0" bIns="0" rtlCol="0" anchor="ctr"/>
+          <a:lstStyle/>
+          <a:p>
+            <a:pPr indent="0" marL="0">
+              <a:buNone/>
+            </a:pPr>
+            <a:r>
+              <a:rPr lang="en-US" sz="1500" b="1" dirty="0">
+                <a:solidFill>
+                  <a:srgbClr val="1E293B"/>
+                </a:solidFill>
+                <a:latin typeface="Georgia" pitchFamily="34" charset="0"/>
+                <a:ea typeface="Georgia" pitchFamily="34" charset="-122"/>
+                <a:cs typeface="Georgia" pitchFamily="34" charset="-120"/>
+              </a:rPr>
+              <a:t>Enterprise access</a:t>
+            </a:r>
+            <a:endParaRPr lang="en-US" sz="1500" dirty="0"/>
+          </a:p>
+        </p:txBody>
+      </p:sp>
+      <p:sp>
+        <p:nvSpPr>
+          <p:cNvPr id="21" name="Text 17"/>
+          <p:cNvSpPr/>
+          <p:nvPr/>
+        </p:nvSpPr>
+        <p:spPr>
+          <a:xfrm>
+            <a:off x="3662858" y="2852928"/>
+            <a:ext cx="2053514" cy="2240280"/>
+          </a:xfrm>
+          <a:prstGeom prst="rect">
+            <a:avLst/>
+          </a:prstGeom>
+          <a:noFill/>
+          <a:ln/>
+        </p:spPr>
+        <p:txBody>
+          <a:bodyPr wrap="square" lIns="0" tIns="0" rIns="0" bIns="0" rtlCol="0" anchor="ctr"/>
+          <a:lstStyle/>
+          <a:p>
+            <a:pPr marL="127000" indent="-127000">
+              <a:lnSpc>
+                <a:spcPct val="104000"/>
+              </a:lnSpc>
+              <a:spcAft>
+                <a:spcPts val="700"/>
+              </a:spcAft>
+              <a:buSzPct val="100000"/>
+              <a:buChar char="•"/>
+            </a:pPr>
+            <a:r>
+              <a:rPr lang="en-US" sz="1050" dirty="0">
+                <a:solidFill>
+                  <a:srgbClr val="1E293B"/>
+                </a:solidFill>
+                <a:latin typeface="Calibri" pitchFamily="34" charset="0"/>
+                <a:ea typeface="Calibri" pitchFamily="34" charset="-122"/>
+                <a:cs typeface="Calibri" pitchFamily="34" charset="-120"/>
+              </a:rPr>
+              <a:t>SSO / OIDC login with team-scoped RBAC</a:t>
+            </a:r>
+            <a:endParaRPr lang="en-US" sz="1050" dirty="0"/>
+          </a:p>
+          <a:p>
+            <a:pPr marL="127000" indent="-127000">
+              <a:lnSpc>
+                <a:spcPct val="104000"/>
+              </a:lnSpc>
+              <a:spcAft>
+                <a:spcPts val="700"/>
+              </a:spcAft>
+              <a:buSzPct val="100000"/>
+              <a:buChar char="•"/>
+            </a:pPr>
+            <a:r>
+              <a:rPr lang="en-US" sz="1050" dirty="0">
+                <a:solidFill>
+                  <a:srgbClr val="1E293B"/>
+                </a:solidFill>
+                <a:latin typeface="Calibri" pitchFamily="34" charset="0"/>
+                <a:ea typeface="Calibri" pitchFamily="34" charset="-122"/>
+                <a:cs typeface="Calibri" pitchFamily="34" charset="-120"/>
+              </a:rPr>
+              <a:t>Vault / KMS secret management</a:t>
+            </a:r>
+            <a:endParaRPr lang="en-US" sz="1050" dirty="0"/>
+          </a:p>
+          <a:p>
+            <a:pPr marL="127000" indent="-127000">
+              <a:lnSpc>
+                <a:spcPct val="104000"/>
+              </a:lnSpc>
+              <a:spcAft>
+                <a:spcPts val="700"/>
+              </a:spcAft>
+              <a:buSzPct val="100000"/>
+              <a:buChar char="•"/>
+            </a:pPr>
+            <a:r>
+              <a:rPr lang="en-US" sz="1050" dirty="0">
+                <a:solidFill>
+                  <a:srgbClr val="1E293B"/>
+                </a:solidFill>
+                <a:latin typeface="Calibri" pitchFamily="34" charset="0"/>
+                <a:ea typeface="Calibri" pitchFamily="34" charset="-122"/>
+                <a:cs typeface="Calibri" pitchFamily="34" charset="-120"/>
+              </a:rPr>
+              <a:t>SARIF export + required PR status checks</a:t>
+            </a:r>
+            <a:endParaRPr lang="en-US" sz="1050" dirty="0"/>
+          </a:p>
+        </p:txBody>
+      </p:sp>
+      <p:sp>
+        <p:nvSpPr>
+          <p:cNvPr id="22" name="Shape 18"/>
+          <p:cNvSpPr/>
+          <p:nvPr/>
+        </p:nvSpPr>
+        <p:spPr>
+          <a:xfrm>
+            <a:off x="3662858" y="5093208"/>
+            <a:ext cx="2035226" cy="0"/>
+          </a:xfrm>
+          <a:prstGeom prst="line">
+            <a:avLst/>
+          </a:prstGeom>
+          <a:noFill/>
+          <a:ln w="12700">
+            <a:solidFill>
+              <a:srgbClr val="E2E8F0"/>
+            </a:solidFill>
+            <a:prstDash val="solid"/>
+          </a:ln>
+        </p:spPr>
+      </p:sp>
+      <p:sp>
+        <p:nvSpPr>
+          <p:cNvPr id="23" name="Text 19"/>
+          <p:cNvSpPr/>
+          <p:nvPr/>
+        </p:nvSpPr>
+        <p:spPr>
+          <a:xfrm>
+            <a:off x="3662858" y="5184648"/>
+            <a:ext cx="2053514" cy="512064"/>
+          </a:xfrm>
+          <a:prstGeom prst="rect">
+            <a:avLst/>
+          </a:prstGeom>
+          <a:noFill/>
+          <a:ln/>
+        </p:spPr>
+        <p:txBody>
+          <a:bodyPr wrap="square" lIns="0" tIns="0" rIns="0" bIns="0" rtlCol="0" anchor="ctr"/>
+          <a:lstStyle/>
+          <a:p>
+            <a:pPr indent="0" marL="0">
+              <a:lnSpc>
+                <a:spcPct val="100000"/>
+              </a:lnSpc>
+              <a:buNone/>
+            </a:pPr>
+            <a:r>
+              <a:rPr lang="en-US" sz="950" i="1" dirty="0">
+                <a:solidFill>
+                  <a:srgbClr val="6366F1"/>
+                </a:solidFill>
+                <a:latin typeface="Calibri" pitchFamily="34" charset="0"/>
+                <a:ea typeface="Calibri" pitchFamily="34" charset="-122"/>
+                <a:cs typeface="Calibri" pitchFamily="34" charset="-120"/>
+              </a:rPr>
+              <a:t>Enforced merge gate, org-grade security</a:t>
+            </a:r>
+            <a:endParaRPr lang="en-US" sz="950" dirty="0"/>
+          </a:p>
+        </p:txBody>
+      </p:sp>
+      <p:sp>
+        <p:nvSpPr>
+          <p:cNvPr id="24" name="Text 20"/>
+          <p:cNvSpPr/>
+          <p:nvPr/>
+        </p:nvSpPr>
+        <p:spPr>
+          <a:xfrm>
+            <a:off x="5917540" y="3543300"/>
+            <a:ext cx="365760" cy="548640"/>
+          </a:xfrm>
+          <a:prstGeom prst="rect">
+            <a:avLst/>
+          </a:prstGeom>
+          <a:noFill/>
+          <a:ln/>
+        </p:spPr>
+        <p:txBody>
+          <a:bodyPr wrap="square" lIns="0" tIns="0" rIns="0" bIns="0" rtlCol="0" anchor="ctr"/>
+          <a:lstStyle/>
+          <a:p>
+            <a:pPr algn="ctr" indent="0" marL="0">
+              <a:buNone/>
+            </a:pPr>
+            <a:r>
+              <a:rPr lang="en-US" sz="2200" b="1" dirty="0">
+                <a:solidFill>
+                  <a:srgbClr val="C9D4E8"/>
+                </a:solidFill>
+                <a:latin typeface="Georgia" pitchFamily="34" charset="0"/>
+                <a:ea typeface="Georgia" pitchFamily="34" charset="-122"/>
+                <a:cs typeface="Georgia" pitchFamily="34" charset="-120"/>
+              </a:rPr>
+              <a:t>›</a:t>
+            </a:r>
+            <a:endParaRPr lang="en-US" sz="2200" dirty="0"/>
+          </a:p>
+        </p:txBody>
+      </p:sp>
+      <p:sp>
+        <p:nvSpPr>
+          <p:cNvPr id="25" name="Shape 21"/>
+          <p:cNvSpPr/>
+          <p:nvPr/>
+        </p:nvSpPr>
+        <p:spPr>
+          <a:xfrm>
+            <a:off x="6255868" y="1828800"/>
+            <a:ext cx="2510714" cy="3977640"/>
+          </a:xfrm>
+          <a:prstGeom prst="roundRect">
+            <a:avLst>
+              <a:gd name="adj" fmla="val 3278"/>
+            </a:avLst>
+          </a:prstGeom>
+          <a:solidFill>
+            <a:srgbClr val="F6F8FB"/>
+          </a:solidFill>
+          <a:ln w="12700">
+            <a:solidFill>
+              <a:srgbClr val="E2E8F0"/>
+            </a:solidFill>
+            <a:prstDash val="solid"/>
+          </a:ln>
+        </p:spPr>
+      </p:sp>
+      <p:sp>
+        <p:nvSpPr>
+          <p:cNvPr id="26" name="Shape 22"/>
+          <p:cNvSpPr/>
+          <p:nvPr/>
+        </p:nvSpPr>
+        <p:spPr>
+          <a:xfrm>
+            <a:off x="6255868" y="1828800"/>
+            <a:ext cx="2510714" cy="91440"/>
           </a:xfrm>
           <a:prstGeom prst="rect">
             <a:avLst/>
@@ -13305,14 +14361,58 @@
       </p:sp>
       <p:sp>
         <p:nvSpPr>
-          <p:cNvPr id="3" name="Text 1"/>
-          <p:cNvSpPr/>
-          <p:nvPr/>
-        </p:nvSpPr>
-        <p:spPr>
-          <a:xfrm>
-            <a:off x="594360" y="2057400"/>
-            <a:ext cx="11002975" cy="1005840"/>
+          <p:cNvPr id="27" name="Shape 23"/>
+          <p:cNvSpPr/>
+          <p:nvPr/>
+        </p:nvSpPr>
+        <p:spPr>
+          <a:xfrm>
+            <a:off x="6475324" y="2103120"/>
+            <a:ext cx="512064" cy="512064"/>
+          </a:xfrm>
+          <a:prstGeom prst="ellipse">
+            <a:avLst/>
+          </a:prstGeom>
+          <a:solidFill>
+            <a:srgbClr val="2DD4BF"/>
+          </a:solidFill>
+          <a:ln/>
+        </p:spPr>
+      </p:sp>
+      <p:pic>
+        <p:nvPicPr>
+          <p:cNvPr id="28" name="Image 2" descr="preencoded.png">    </p:cNvPr>
+          <p:cNvPicPr>
+            <a:picLocks noChangeAspect="1"/>
+          </p:cNvPicPr>
+          <p:nvPr/>
+        </p:nvPicPr>
+        <p:blipFill>
+          <a:blip r:embed="rId3"/>
+          <a:stretch>
+            <a:fillRect/>
+          </a:stretch>
+        </p:blipFill>
+        <p:spPr>
+          <a:xfrm>
+            <a:off x="6613581" y="2241377"/>
+            <a:ext cx="235549" cy="235549"/>
+          </a:xfrm>
+          <a:prstGeom prst="rect">
+            <a:avLst/>
+          </a:prstGeom>
+        </p:spPr>
+      </p:pic>
+      <p:sp>
+        <p:nvSpPr>
+          <p:cNvPr id="29" name="Text 24"/>
+          <p:cNvSpPr/>
+          <p:nvPr/>
+        </p:nvSpPr>
+        <p:spPr>
+          <a:xfrm>
+            <a:off x="7124548" y="2103120"/>
+            <a:ext cx="1504874" cy="237744"/>
           </a:xfrm>
           <a:prstGeom prst="rect">
             <a:avLst/>
@@ -13324,34 +14424,73 @@
           <a:bodyPr wrap="square" lIns="0" tIns="0" rIns="0" bIns="0" rtlCol="0" anchor="ctr"/>
           <a:lstStyle/>
           <a:p>
-            <a:pPr algn="ctr" indent="0" marL="0">
-              <a:buNone/>
-            </a:pPr>
-            <a:r>
-              <a:rPr lang="en-US" sz="3600" b="1" dirty="0">
-                <a:solidFill>
-                  <a:srgbClr val="FFFFFF"/>
+            <a:pPr indent="0" marL="0">
+              <a:buNone/>
+            </a:pPr>
+            <a:r>
+              <a:rPr lang="en-US" sz="950" b="1" spc="200" kern="0" dirty="0">
+                <a:solidFill>
+                  <a:srgbClr val="2DD4BF"/>
+                </a:solidFill>
+                <a:latin typeface="Calibri" pitchFamily="34" charset="0"/>
+                <a:ea typeface="Calibri" pitchFamily="34" charset="-122"/>
+                <a:cs typeface="Calibri" pitchFamily="34" charset="-120"/>
+              </a:rPr>
+              <a:t>PHASE 3</a:t>
+            </a:r>
+            <a:endParaRPr lang="en-US" sz="950" dirty="0"/>
+          </a:p>
+        </p:txBody>
+      </p:sp>
+      <p:sp>
+        <p:nvSpPr>
+          <p:cNvPr id="30" name="Text 25"/>
+          <p:cNvSpPr/>
+          <p:nvPr/>
+        </p:nvSpPr>
+        <p:spPr>
+          <a:xfrm>
+            <a:off x="7124548" y="2331720"/>
+            <a:ext cx="1504874" cy="329184"/>
+          </a:xfrm>
+          <a:prstGeom prst="rect">
+            <a:avLst/>
+          </a:prstGeom>
+          <a:noFill/>
+          <a:ln/>
+        </p:spPr>
+        <p:txBody>
+          <a:bodyPr wrap="square" lIns="0" tIns="0" rIns="0" bIns="0" rtlCol="0" anchor="ctr"/>
+          <a:lstStyle/>
+          <a:p>
+            <a:pPr indent="0" marL="0">
+              <a:buNone/>
+            </a:pPr>
+            <a:r>
+              <a:rPr lang="en-US" sz="1500" b="1" dirty="0">
+                <a:solidFill>
+                  <a:srgbClr val="1E293B"/>
                 </a:solidFill>
                 <a:latin typeface="Georgia" pitchFamily="34" charset="0"/>
                 <a:ea typeface="Georgia" pitchFamily="34" charset="-122"/>
                 <a:cs typeface="Georgia" pitchFamily="34" charset="-120"/>
               </a:rPr>
-              <a:t>Catch production issues before they merge</a:t>
-            </a:r>
-            <a:endParaRPr lang="en-US" sz="3600" dirty="0"/>
-          </a:p>
-        </p:txBody>
-      </p:sp>
-      <p:sp>
-        <p:nvSpPr>
-          <p:cNvPr id="4" name="Text 2"/>
-          <p:cNvSpPr/>
-          <p:nvPr/>
-        </p:nvSpPr>
-        <p:spPr>
-          <a:xfrm>
-            <a:off x="1371600" y="3246120"/>
-            <a:ext cx="9448495" cy="914400"/>
+              <a:t>Deeper detection</a:t>
+            </a:r>
+            <a:endParaRPr lang="en-US" sz="1500" dirty="0"/>
+          </a:p>
+        </p:txBody>
+      </p:sp>
+      <p:sp>
+        <p:nvSpPr>
+          <p:cNvPr id="31" name="Text 26"/>
+          <p:cNvSpPr/>
+          <p:nvPr/>
+        </p:nvSpPr>
+        <p:spPr>
+          <a:xfrm>
+            <a:off x="6493612" y="2852928"/>
+            <a:ext cx="2053514" cy="2240280"/>
           </a:xfrm>
           <a:prstGeom prst="rect">
             <a:avLst/>
@@ -13363,69 +14502,205 @@
           <a:bodyPr wrap="square" lIns="0" tIns="0" rIns="0" bIns="0" rtlCol="0" anchor="ctr"/>
           <a:lstStyle/>
           <a:p>
-            <a:pPr algn="ctr" indent="0" marL="0">
+            <a:pPr marL="127000" indent="-127000">
               <a:lnSpc>
-                <a:spcPct val="115000"/>
+                <a:spcPct val="104000"/>
               </a:lnSpc>
-              <a:buNone/>
-            </a:pPr>
-            <a:r>
-              <a:rPr lang="en-US" sz="1500" dirty="0">
-                <a:solidFill>
-                  <a:srgbClr val="CADCFC"/>
+              <a:spcAft>
+                <a:spcPts val="700"/>
+              </a:spcAft>
+              <a:buSzPct val="100000"/>
+              <a:buChar char="•"/>
+            </a:pPr>
+            <a:r>
+              <a:rPr lang="en-US" sz="1050" dirty="0">
+                <a:solidFill>
+                  <a:srgbClr val="1E293B"/>
                 </a:solidFill>
                 <a:latin typeface="Calibri" pitchFamily="34" charset="0"/>
                 <a:ea typeface="Calibri" pitchFamily="34" charset="-122"/>
                 <a:cs typeface="Calibri" pitchFamily="34" charset="-120"/>
               </a:rPr>
-              <a:t>CIAA turns every Pull Request into a deep, consistent, evidence-backed review —</a:t>
-            </a:r>
-            <a:endParaRPr lang="en-US" sz="1500" dirty="0"/>
-          </a:p>
-          <a:p>
-            <a:pPr algn="ctr" indent="0" marL="0">
+              <a:t>Transitive SCA (full dependency tree CVEs)</a:t>
+            </a:r>
+            <a:endParaRPr lang="en-US" sz="1050" dirty="0"/>
+          </a:p>
+          <a:p>
+            <a:pPr marL="127000" indent="-127000">
               <a:lnSpc>
-                <a:spcPct val="115000"/>
+                <a:spcPct val="104000"/>
               </a:lnSpc>
-              <a:buNone/>
-            </a:pPr>
-            <a:r>
-              <a:rPr lang="en-US" sz="1500" dirty="0">
-                <a:solidFill>
-                  <a:srgbClr val="CADCFC"/>
+              <a:spcAft>
+                <a:spcPts val="700"/>
+              </a:spcAft>
+              <a:buSzPct val="100000"/>
+              <a:buChar char="•"/>
+            </a:pPr>
+            <a:r>
+              <a:rPr lang="en-US" sz="1050" dirty="0">
+                <a:solidFill>
+                  <a:srgbClr val="1E293B"/>
                 </a:solidFill>
                 <a:latin typeface="Calibri" pitchFamily="34" charset="0"/>
                 <a:ea typeface="Calibri" pitchFamily="34" charset="-122"/>
                 <a:cs typeface="Calibri" pitchFamily="34" charset="-120"/>
               </a:rPr>
-              <a:t>combining real impact analysis with a deterministic merge gate, at PR scale.</a:t>
-            </a:r>
-            <a:endParaRPr lang="en-US" sz="1500" dirty="0"/>
-          </a:p>
-        </p:txBody>
-      </p:sp>
-      <p:sp>
-        <p:nvSpPr>
-          <p:cNvPr id="5" name="Shape 3"/>
-          <p:cNvSpPr/>
-          <p:nvPr/>
-        </p:nvSpPr>
-        <p:spPr>
-          <a:xfrm>
-            <a:off x="2264512" y="4526280"/>
-            <a:ext cx="1865376" cy="457200"/>
+              <a:t>Compiler-index (LSIF/SCIP) cross-repo references</a:t>
+            </a:r>
+            <a:endParaRPr lang="en-US" sz="1050" dirty="0"/>
+          </a:p>
+          <a:p>
+            <a:pPr marL="127000" indent="-127000">
+              <a:lnSpc>
+                <a:spcPct val="104000"/>
+              </a:lnSpc>
+              <a:spcAft>
+                <a:spcPts val="700"/>
+              </a:spcAft>
+              <a:buSzPct val="100000"/>
+              <a:buChar char="•"/>
+            </a:pPr>
+            <a:r>
+              <a:rPr lang="en-US" sz="1050" dirty="0">
+                <a:solidFill>
+                  <a:srgbClr val="1E293B"/>
+                </a:solidFill>
+                <a:latin typeface="Calibri" pitchFamily="34" charset="0"/>
+                <a:ea typeface="Calibri" pitchFamily="34" charset="-122"/>
+                <a:cs typeface="Calibri" pitchFamily="34" charset="-120"/>
+              </a:rPr>
+              <a:t>Golden corpus grown from real reviewed PRs</a:t>
+            </a:r>
+            <a:endParaRPr lang="en-US" sz="1050" dirty="0"/>
+          </a:p>
+        </p:txBody>
+      </p:sp>
+      <p:sp>
+        <p:nvSpPr>
+          <p:cNvPr id="32" name="Shape 27"/>
+          <p:cNvSpPr/>
+          <p:nvPr/>
+        </p:nvSpPr>
+        <p:spPr>
+          <a:xfrm>
+            <a:off x="6493612" y="5093208"/>
+            <a:ext cx="2035226" cy="0"/>
+          </a:xfrm>
+          <a:prstGeom prst="line">
+            <a:avLst/>
+          </a:prstGeom>
+          <a:noFill/>
+          <a:ln w="12700">
+            <a:solidFill>
+              <a:srgbClr val="E2E8F0"/>
+            </a:solidFill>
+            <a:prstDash val="solid"/>
+          </a:ln>
+        </p:spPr>
+      </p:sp>
+      <p:sp>
+        <p:nvSpPr>
+          <p:cNvPr id="33" name="Text 28"/>
+          <p:cNvSpPr/>
+          <p:nvPr/>
+        </p:nvSpPr>
+        <p:spPr>
+          <a:xfrm>
+            <a:off x="6493612" y="5184648"/>
+            <a:ext cx="2053514" cy="512064"/>
+          </a:xfrm>
+          <a:prstGeom prst="rect">
+            <a:avLst/>
+          </a:prstGeom>
+          <a:noFill/>
+          <a:ln/>
+        </p:spPr>
+        <p:txBody>
+          <a:bodyPr wrap="square" lIns="0" tIns="0" rIns="0" bIns="0" rtlCol="0" anchor="ctr"/>
+          <a:lstStyle/>
+          <a:p>
+            <a:pPr indent="0" marL="0">
+              <a:lnSpc>
+                <a:spcPct val="100000"/>
+              </a:lnSpc>
+              <a:buNone/>
+            </a:pPr>
+            <a:r>
+              <a:rPr lang="en-US" sz="950" i="1" dirty="0">
+                <a:solidFill>
+                  <a:srgbClr val="2DD4BF"/>
+                </a:solidFill>
+                <a:latin typeface="Calibri" pitchFamily="34" charset="0"/>
+                <a:ea typeface="Calibri" pitchFamily="34" charset="-122"/>
+                <a:cs typeface="Calibri" pitchFamily="34" charset="-120"/>
+              </a:rPr>
+              <a:t>Higher recall with measured precision</a:t>
+            </a:r>
+            <a:endParaRPr lang="en-US" sz="950" dirty="0"/>
+          </a:p>
+        </p:txBody>
+      </p:sp>
+      <p:sp>
+        <p:nvSpPr>
+          <p:cNvPr id="34" name="Text 29"/>
+          <p:cNvSpPr/>
+          <p:nvPr/>
+        </p:nvSpPr>
+        <p:spPr>
+          <a:xfrm>
+            <a:off x="8748293" y="3543300"/>
+            <a:ext cx="365760" cy="548640"/>
+          </a:xfrm>
+          <a:prstGeom prst="rect">
+            <a:avLst/>
+          </a:prstGeom>
+          <a:noFill/>
+          <a:ln/>
+        </p:spPr>
+        <p:txBody>
+          <a:bodyPr wrap="square" lIns="0" tIns="0" rIns="0" bIns="0" rtlCol="0" anchor="ctr"/>
+          <a:lstStyle/>
+          <a:p>
+            <a:pPr algn="ctr" indent="0" marL="0">
+              <a:buNone/>
+            </a:pPr>
+            <a:r>
+              <a:rPr lang="en-US" sz="2200" b="1" dirty="0">
+                <a:solidFill>
+                  <a:srgbClr val="C9D4E8"/>
+                </a:solidFill>
+                <a:latin typeface="Georgia" pitchFamily="34" charset="0"/>
+                <a:ea typeface="Georgia" pitchFamily="34" charset="-122"/>
+                <a:cs typeface="Georgia" pitchFamily="34" charset="-120"/>
+              </a:rPr>
+              <a:t>›</a:t>
+            </a:r>
+            <a:endParaRPr lang="en-US" sz="2200" dirty="0"/>
+          </a:p>
+        </p:txBody>
+      </p:sp>
+      <p:sp>
+        <p:nvSpPr>
+          <p:cNvPr id="35" name="Shape 30"/>
+          <p:cNvSpPr/>
+          <p:nvPr/>
+        </p:nvSpPr>
+        <p:spPr>
+          <a:xfrm>
+            <a:off x="9086621" y="1828800"/>
+            <a:ext cx="2510714" cy="3977640"/>
           </a:xfrm>
           <a:prstGeom prst="roundRect">
             <a:avLst>
-              <a:gd name="adj" fmla="val 50000"/>
+              <a:gd name="adj" fmla="val 3278"/>
             </a:avLst>
           </a:prstGeom>
           <a:solidFill>
-            <a:srgbClr val="16243F"/>
+            <a:srgbClr val="F6F8FB"/>
           </a:solidFill>
           <a:ln w="12700">
             <a:solidFill>
-              <a:srgbClr val="2DD4BF"/>
+              <a:srgbClr val="E2E8F0"/>
             </a:solidFill>
             <a:prstDash val="solid"/>
           </a:ln>
@@ -13433,14 +14708,78 @@
       </p:sp>
       <p:sp>
         <p:nvSpPr>
-          <p:cNvPr id="6" name="Text 4"/>
-          <p:cNvSpPr/>
-          <p:nvPr/>
-        </p:nvSpPr>
-        <p:spPr>
-          <a:xfrm>
-            <a:off x="2264512" y="4526280"/>
-            <a:ext cx="1865376" cy="457200"/>
+          <p:cNvPr id="36" name="Shape 31"/>
+          <p:cNvSpPr/>
+          <p:nvPr/>
+        </p:nvSpPr>
+        <p:spPr>
+          <a:xfrm>
+            <a:off x="9086621" y="1828800"/>
+            <a:ext cx="2510714" cy="91440"/>
+          </a:xfrm>
+          <a:prstGeom prst="rect">
+            <a:avLst/>
+          </a:prstGeom>
+          <a:solidFill>
+            <a:srgbClr val="16A34A"/>
+          </a:solidFill>
+          <a:ln/>
+        </p:spPr>
+      </p:sp>
+      <p:sp>
+        <p:nvSpPr>
+          <p:cNvPr id="37" name="Shape 32"/>
+          <p:cNvSpPr/>
+          <p:nvPr/>
+        </p:nvSpPr>
+        <p:spPr>
+          <a:xfrm>
+            <a:off x="9306077" y="2103120"/>
+            <a:ext cx="512064" cy="512064"/>
+          </a:xfrm>
+          <a:prstGeom prst="ellipse">
+            <a:avLst/>
+          </a:prstGeom>
+          <a:solidFill>
+            <a:srgbClr val="16A34A"/>
+          </a:solidFill>
+          <a:ln/>
+        </p:spPr>
+      </p:sp>
+      <p:pic>
+        <p:nvPicPr>
+          <p:cNvPr id="38" name="Image 3" descr="preencoded.png">    </p:cNvPr>
+          <p:cNvPicPr>
+            <a:picLocks noChangeAspect="1"/>
+          </p:cNvPicPr>
+          <p:nvPr/>
+        </p:nvPicPr>
+        <p:blipFill>
+          <a:blip r:embed="rId4"/>
+          <a:stretch>
+            <a:fillRect/>
+          </a:stretch>
+        </p:blipFill>
+        <p:spPr>
+          <a:xfrm>
+            <a:off x="9444335" y="2241377"/>
+            <a:ext cx="235549" cy="235549"/>
+          </a:xfrm>
+          <a:prstGeom prst="rect">
+            <a:avLst/>
+          </a:prstGeom>
+        </p:spPr>
+      </p:pic>
+      <p:sp>
+        <p:nvSpPr>
+          <p:cNvPr id="39" name="Text 33"/>
+          <p:cNvSpPr/>
+          <p:nvPr/>
+        </p:nvSpPr>
+        <p:spPr>
+          <a:xfrm>
+            <a:off x="9955301" y="2103120"/>
+            <a:ext cx="1504874" cy="237744"/>
           </a:xfrm>
           <a:prstGeom prst="rect">
             <a:avLst/>
@@ -13452,46 +14791,175 @@
           <a:bodyPr wrap="square" lIns="0" tIns="0" rIns="0" bIns="0" rtlCol="0" anchor="ctr"/>
           <a:lstStyle/>
           <a:p>
-            <a:pPr algn="ctr" indent="0" marL="0">
-              <a:buNone/>
-            </a:pPr>
-            <a:r>
-              <a:rPr lang="en-US" sz="1250" b="1" dirty="0">
-                <a:solidFill>
-                  <a:srgbClr val="2DD4BF"/>
+            <a:pPr indent="0" marL="0">
+              <a:buNone/>
+            </a:pPr>
+            <a:r>
+              <a:rPr lang="en-US" sz="950" b="1" spc="200" kern="0" dirty="0">
+                <a:solidFill>
+                  <a:srgbClr val="16A34A"/>
                 </a:solidFill>
                 <a:latin typeface="Calibri" pitchFamily="34" charset="0"/>
                 <a:ea typeface="Calibri" pitchFamily="34" charset="-122"/>
                 <a:cs typeface="Calibri" pitchFamily="34" charset="-120"/>
               </a:rPr>
-              <a:t>Deep PR Review</a:t>
-            </a:r>
-            <a:endParaRPr lang="en-US" sz="1250" dirty="0"/>
-          </a:p>
-        </p:txBody>
-      </p:sp>
-      <p:sp>
-        <p:nvSpPr>
-          <p:cNvPr id="7" name="Shape 5"/>
-          <p:cNvSpPr/>
-          <p:nvPr/>
-        </p:nvSpPr>
-        <p:spPr>
-          <a:xfrm>
-            <a:off x="4358488" y="4526280"/>
-            <a:ext cx="2468880" cy="457200"/>
-          </a:xfrm>
-          <a:prstGeom prst="roundRect">
-            <a:avLst>
-              <a:gd name="adj" fmla="val 50000"/>
-            </a:avLst>
-          </a:prstGeom>
-          <a:solidFill>
-            <a:srgbClr val="16243F"/>
-          </a:solidFill>
+              <a:t>PHASE 4</a:t>
+            </a:r>
+            <a:endParaRPr lang="en-US" sz="950" dirty="0"/>
+          </a:p>
+        </p:txBody>
+      </p:sp>
+      <p:sp>
+        <p:nvSpPr>
+          <p:cNvPr id="40" name="Text 34"/>
+          <p:cNvSpPr/>
+          <p:nvPr/>
+        </p:nvSpPr>
+        <p:spPr>
+          <a:xfrm>
+            <a:off x="9955301" y="2331720"/>
+            <a:ext cx="1504874" cy="329184"/>
+          </a:xfrm>
+          <a:prstGeom prst="rect">
+            <a:avLst/>
+          </a:prstGeom>
+          <a:noFill/>
+          <a:ln/>
+        </p:spPr>
+        <p:txBody>
+          <a:bodyPr wrap="square" lIns="0" tIns="0" rIns="0" bIns="0" rtlCol="0" anchor="ctr"/>
+          <a:lstStyle/>
+          <a:p>
+            <a:pPr indent="0" marL="0">
+              <a:buNone/>
+            </a:pPr>
+            <a:r>
+              <a:rPr lang="en-US" sz="1500" b="1" dirty="0">
+                <a:solidFill>
+                  <a:srgbClr val="1E293B"/>
+                </a:solidFill>
+                <a:latin typeface="Georgia" pitchFamily="34" charset="0"/>
+                <a:ea typeface="Georgia" pitchFamily="34" charset="-122"/>
+                <a:cs typeface="Georgia" pitchFamily="34" charset="-120"/>
+              </a:rPr>
+              <a:t>Operate at scale</a:t>
+            </a:r>
+            <a:endParaRPr lang="en-US" sz="1500" dirty="0"/>
+          </a:p>
+        </p:txBody>
+      </p:sp>
+      <p:sp>
+        <p:nvSpPr>
+          <p:cNvPr id="41" name="Text 35"/>
+          <p:cNvSpPr/>
+          <p:nvPr/>
+        </p:nvSpPr>
+        <p:spPr>
+          <a:xfrm>
+            <a:off x="9324365" y="2852928"/>
+            <a:ext cx="2053514" cy="2240280"/>
+          </a:xfrm>
+          <a:prstGeom prst="rect">
+            <a:avLst/>
+          </a:prstGeom>
+          <a:noFill/>
+          <a:ln/>
+        </p:spPr>
+        <p:txBody>
+          <a:bodyPr wrap="square" lIns="0" tIns="0" rIns="0" bIns="0" rtlCol="0" anchor="ctr"/>
+          <a:lstStyle/>
+          <a:p>
+            <a:pPr marL="127000" indent="-127000">
+              <a:lnSpc>
+                <a:spcPct val="104000"/>
+              </a:lnSpc>
+              <a:spcAft>
+                <a:spcPts val="700"/>
+              </a:spcAft>
+              <a:buSzPct val="100000"/>
+              <a:buChar char="•"/>
+            </a:pPr>
+            <a:r>
+              <a:rPr lang="en-US" sz="1050" dirty="0">
+                <a:solidFill>
+                  <a:srgbClr val="1E293B"/>
+                </a:solidFill>
+                <a:latin typeface="Calibri" pitchFamily="34" charset="0"/>
+                <a:ea typeface="Calibri" pitchFamily="34" charset="-122"/>
+                <a:cs typeface="Calibri" pitchFamily="34" charset="-120"/>
+              </a:rPr>
+              <a:t>Policy-as-code gate thresholds (OPA), per team</a:t>
+            </a:r>
+            <a:endParaRPr lang="en-US" sz="1050" dirty="0"/>
+          </a:p>
+          <a:p>
+            <a:pPr marL="127000" indent="-127000">
+              <a:lnSpc>
+                <a:spcPct val="104000"/>
+              </a:lnSpc>
+              <a:spcAft>
+                <a:spcPts val="700"/>
+              </a:spcAft>
+              <a:buSzPct val="100000"/>
+              <a:buChar char="•"/>
+            </a:pPr>
+            <a:r>
+              <a:rPr lang="en-US" sz="1050" dirty="0">
+                <a:solidFill>
+                  <a:srgbClr val="1E293B"/>
+                </a:solidFill>
+                <a:latin typeface="Calibri" pitchFamily="34" charset="0"/>
+                <a:ea typeface="Calibri" pitchFamily="34" charset="-122"/>
+                <a:cs typeface="Calibri" pitchFamily="34" charset="-120"/>
+              </a:rPr>
+              <a:t>Grafana SLOs, alerting &amp; cost dashboards</a:t>
+            </a:r>
+            <a:endParaRPr lang="en-US" sz="1050" dirty="0"/>
+          </a:p>
+          <a:p>
+            <a:pPr marL="127000" indent="-127000">
+              <a:lnSpc>
+                <a:spcPct val="104000"/>
+              </a:lnSpc>
+              <a:spcAft>
+                <a:spcPts val="700"/>
+              </a:spcAft>
+              <a:buSzPct val="100000"/>
+              <a:buChar char="•"/>
+            </a:pPr>
+            <a:r>
+              <a:rPr lang="en-US" sz="1050" dirty="0">
+                <a:solidFill>
+                  <a:srgbClr val="1E293B"/>
+                </a:solidFill>
+                <a:latin typeface="Calibri" pitchFamily="34" charset="0"/>
+                <a:ea typeface="Calibri" pitchFamily="34" charset="-122"/>
+                <a:cs typeface="Calibri" pitchFamily="34" charset="-120"/>
+              </a:rPr>
+              <a:t>Helm + canary deploys, load &amp; chaos testing</a:t>
+            </a:r>
+            <a:endParaRPr lang="en-US" sz="1050" dirty="0"/>
+          </a:p>
+        </p:txBody>
+      </p:sp>
+      <p:sp>
+        <p:nvSpPr>
+          <p:cNvPr id="42" name="Shape 36"/>
+          <p:cNvSpPr/>
+          <p:nvPr/>
+        </p:nvSpPr>
+        <p:spPr>
+          <a:xfrm>
+            <a:off x="9324365" y="5093208"/>
+            <a:ext cx="2035226" cy="0"/>
+          </a:xfrm>
+          <a:prstGeom prst="line">
+            <a:avLst/>
+          </a:prstGeom>
+          <a:noFill/>
           <a:ln w="12700">
             <a:solidFill>
-              <a:srgbClr val="2DD4BF"/>
+              <a:srgbClr val="E2E8F0"/>
             </a:solidFill>
             <a:prstDash val="solid"/>
           </a:ln>
@@ -13499,14 +14967,14 @@
       </p:sp>
       <p:sp>
         <p:nvSpPr>
-          <p:cNvPr id="8" name="Text 6"/>
-          <p:cNvSpPr/>
-          <p:nvPr/>
-        </p:nvSpPr>
-        <p:spPr>
-          <a:xfrm>
-            <a:off x="4358488" y="4526280"/>
-            <a:ext cx="2468880" cy="457200"/>
+          <p:cNvPr id="43" name="Text 37"/>
+          <p:cNvSpPr/>
+          <p:nvPr/>
+        </p:nvSpPr>
+        <p:spPr>
+          <a:xfrm>
+            <a:off x="9324365" y="5184648"/>
+            <a:ext cx="2053514" cy="512064"/>
           </a:xfrm>
           <a:prstGeom prst="rect">
             <a:avLst/>
@@ -13518,61 +14986,37 @@
           <a:bodyPr wrap="square" lIns="0" tIns="0" rIns="0" bIns="0" rtlCol="0" anchor="ctr"/>
           <a:lstStyle/>
           <a:p>
-            <a:pPr algn="ctr" indent="0" marL="0">
-              <a:buNone/>
-            </a:pPr>
-            <a:r>
-              <a:rPr lang="en-US" sz="1250" b="1" dirty="0">
-                <a:solidFill>
-                  <a:srgbClr val="2DD4BF"/>
+            <a:pPr indent="0" marL="0">
+              <a:lnSpc>
+                <a:spcPct val="100000"/>
+              </a:lnSpc>
+              <a:buNone/>
+            </a:pPr>
+            <a:r>
+              <a:rPr lang="en-US" sz="950" i="1" dirty="0">
+                <a:solidFill>
+                  <a:srgbClr val="16A34A"/>
                 </a:solidFill>
                 <a:latin typeface="Calibri" pitchFamily="34" charset="0"/>
                 <a:ea typeface="Calibri" pitchFamily="34" charset="-122"/>
                 <a:cs typeface="Calibri" pitchFamily="34" charset="-120"/>
               </a:rPr>
-              <a:t>Real Impact Analysis</a:t>
-            </a:r>
-            <a:endParaRPr lang="en-US" sz="1250" dirty="0"/>
-          </a:p>
-        </p:txBody>
-      </p:sp>
-      <p:sp>
-        <p:nvSpPr>
-          <p:cNvPr id="9" name="Shape 7"/>
-          <p:cNvSpPr/>
-          <p:nvPr/>
-        </p:nvSpPr>
-        <p:spPr>
-          <a:xfrm>
-            <a:off x="7055968" y="4526280"/>
-            <a:ext cx="2871216" cy="457200"/>
-          </a:xfrm>
-          <a:prstGeom prst="roundRect">
-            <a:avLst>
-              <a:gd name="adj" fmla="val 50000"/>
-            </a:avLst>
-          </a:prstGeom>
-          <a:solidFill>
-            <a:srgbClr val="16243F"/>
-          </a:solidFill>
-          <a:ln w="12700">
-            <a:solidFill>
-              <a:srgbClr val="2DD4BF"/>
-            </a:solidFill>
-            <a:prstDash val="solid"/>
-          </a:ln>
-        </p:spPr>
-      </p:sp>
-      <p:sp>
-        <p:nvSpPr>
-          <p:cNvPr id="10" name="Text 8"/>
-          <p:cNvSpPr/>
-          <p:nvPr/>
-        </p:nvSpPr>
-        <p:spPr>
-          <a:xfrm>
-            <a:off x="7055968" y="4526280"/>
-            <a:ext cx="2871216" cy="457200"/>
+              <a:t>Run it like any tier-1 internal platform</a:t>
+            </a:r>
+            <a:endParaRPr lang="en-US" sz="950" dirty="0"/>
+          </a:p>
+        </p:txBody>
+      </p:sp>
+      <p:sp>
+        <p:nvSpPr>
+          <p:cNvPr id="44" name="Text 38"/>
+          <p:cNvSpPr/>
+          <p:nvPr/>
+        </p:nvSpPr>
+        <p:spPr>
+          <a:xfrm>
+            <a:off x="594360" y="5989320"/>
+            <a:ext cx="11002975" cy="411480"/>
           </a:xfrm>
           <a:prstGeom prst="rect">
             <a:avLst/>
@@ -13588,17 +15032,31 @@
               <a:buNone/>
             </a:pPr>
             <a:r>
-              <a:rPr lang="en-US" sz="1250" b="1" dirty="0">
-                <a:solidFill>
-                  <a:srgbClr val="2DD4BF"/>
+              <a:rPr lang="en-US" sz="1050" b="1" dirty="0">
+                <a:solidFill>
+                  <a:srgbClr val="1E293B"/>
                 </a:solidFill>
                 <a:latin typeface="Calibri" pitchFamily="34" charset="0"/>
                 <a:ea typeface="Calibri" pitchFamily="34" charset="-122"/>
                 <a:cs typeface="Calibri" pitchFamily="34" charset="-120"/>
               </a:rPr>
-              <a:t>Deterministic Governance</a:t>
-            </a:r>
-            <a:endParaRPr lang="en-US" sz="1250" dirty="0"/>
+              <a:t>Already shipped: </a:t>
+            </a:r>
+            <a:pPr algn="ctr" indent="0" marL="0">
+              <a:buNone/>
+            </a:pPr>
+            <a:r>
+              <a:rPr lang="en-US" sz="1050" dirty="0">
+                <a:solidFill>
+                  <a:srgbClr val="64748B"/>
+                </a:solidFill>
+                <a:latin typeface="Calibri" pitchFamily="34" charset="0"/>
+                <a:ea typeface="Calibri" pitchFamily="34" charset="-122"/>
+                <a:cs typeface="Calibri" pitchFamily="34" charset="-120"/>
+              </a:rPr>
+              <a:t>tree-sitter ASTs · cross-agent correlation &amp; Top Issues · CI quality gate · function-context prompts · confidence-weighted gate · warm repo mirror · LLM concurrency control</a:t>
+            </a:r>
+            <a:endParaRPr lang="en-US" sz="1050" dirty="0"/>
           </a:p>
         </p:txBody>
       </p:sp>
@@ -13645,6 +15103,3758 @@
             <a:fld id="{F7021451-1387-4CA6-816F-3879F97B5CBC}" type="slidenum">
               <a:rPr b="0" lang="en-US"/>
               <a:t>18</a:t>
+            </a:fld>
+            <a:endParaRPr lang="en-US"/>
+          </a:p>
+        </p:txBody>
+      </p:sp>
+    </p:spTree>
+  </p:cSld>
+  <p:clrMapOvr>
+    <a:masterClrMapping/>
+  </p:clrMapOvr>
+</p:sld>
+</file>
+
+<file path=ppt/slides/slide19.xml><?xml version="1.0" encoding="utf-8"?>
+<p:sld xmlns:a="http://schemas.openxmlformats.org/drawingml/2006/main" xmlns:r="http://schemas.openxmlformats.org/officeDocument/2006/relationships" xmlns:p="http://schemas.openxmlformats.org/presentationml/2006/main">
+  <p:cSld name="Slide 19">
+    <p:bg>
+      <p:bgPr>
+        <a:solidFill>
+          <a:srgbClr val="FFFFFF"/>
+        </a:solidFill>
+      </p:bgPr>
+    </p:bg>
+    <p:spTree>
+      <p:nvGrpSpPr>
+        <p:cNvPr id="1" name=""/>
+        <p:cNvGrpSpPr/>
+        <p:nvPr/>
+      </p:nvGrpSpPr>
+      <p:grpSpPr>
+        <a:xfrm>
+          <a:off x="0" y="0"/>
+          <a:ext cx="0" cy="0"/>
+          <a:chOff x="0" y="0"/>
+          <a:chExt cx="0" cy="0"/>
+        </a:xfrm>
+      </p:grpSpPr>
+      <p:sp>
+        <p:nvSpPr>
+          <p:cNvPr id="2" name="Text 0"/>
+          <p:cNvSpPr/>
+          <p:nvPr/>
+        </p:nvSpPr>
+        <p:spPr>
+          <a:xfrm>
+            <a:off x="594360" y="365760"/>
+            <a:ext cx="5486400" cy="274320"/>
+          </a:xfrm>
+          <a:prstGeom prst="rect">
+            <a:avLst/>
+          </a:prstGeom>
+          <a:noFill/>
+          <a:ln/>
+        </p:spPr>
+        <p:txBody>
+          <a:bodyPr wrap="square" lIns="0" tIns="0" rIns="0" bIns="0" rtlCol="0" anchor="ctr"/>
+          <a:lstStyle/>
+          <a:p>
+            <a:pPr indent="0" marL="0">
+              <a:buNone/>
+            </a:pPr>
+            <a:r>
+              <a:rPr lang="en-US" sz="1200" b="1" spc="300" kern="0" dirty="0">
+                <a:solidFill>
+                  <a:srgbClr val="2DD4BF"/>
+                </a:solidFill>
+                <a:latin typeface="Calibri" pitchFamily="34" charset="0"/>
+                <a:ea typeface="Calibri" pitchFamily="34" charset="-122"/>
+                <a:cs typeface="Calibri" pitchFamily="34" charset="-120"/>
+              </a:rPr>
+              <a:t>ROADMAP · TASK LIST</a:t>
+            </a:r>
+            <a:endParaRPr lang="en-US" sz="1200" dirty="0"/>
+          </a:p>
+        </p:txBody>
+      </p:sp>
+      <p:sp>
+        <p:nvSpPr>
+          <p:cNvPr id="3" name="Text 1"/>
+          <p:cNvSpPr/>
+          <p:nvPr/>
+        </p:nvSpPr>
+        <p:spPr>
+          <a:xfrm>
+            <a:off x="594360" y="566928"/>
+            <a:ext cx="11002975" cy="731520"/>
+          </a:xfrm>
+          <a:prstGeom prst="rect">
+            <a:avLst/>
+          </a:prstGeom>
+          <a:noFill/>
+          <a:ln/>
+        </p:spPr>
+        <p:txBody>
+          <a:bodyPr wrap="square" lIns="0" tIns="0" rIns="0" bIns="0" rtlCol="0" anchor="ctr"/>
+          <a:lstStyle/>
+          <a:p>
+            <a:pPr indent="0" marL="0">
+              <a:buNone/>
+            </a:pPr>
+            <a:r>
+              <a:rPr lang="en-US" sz="3000" b="1" dirty="0">
+                <a:solidFill>
+                  <a:srgbClr val="1E293B"/>
+                </a:solidFill>
+                <a:latin typeface="Georgia" pitchFamily="34" charset="0"/>
+                <a:ea typeface="Georgia" pitchFamily="34" charset="-122"/>
+                <a:cs typeface="Georgia" pitchFamily="34" charset="-120"/>
+              </a:rPr>
+              <a:t>Planned tasks</a:t>
+            </a:r>
+            <a:endParaRPr lang="en-US" sz="3000" dirty="0"/>
+          </a:p>
+        </p:txBody>
+      </p:sp>
+      <p:graphicFrame>
+        <p:nvGraphicFramePr>
+          <p:cNvPr id="20" name="Table 0"/>
+          <p:cNvGraphicFramePr>
+            <a:graphicFrameLocks noGrp="1"/>
+          </p:cNvGraphicFramePr>
+          <p:nvPr>
+            <p:extLst>
+              <p:ext uri="{D42A27DB-BD31-4B8C-83A1-F6EECF244321}">
+                <p14:modId xmlns:p14="http://schemas.microsoft.com/office/powerpoint/2010/main" val="1579011935"/>
+              </p:ext>
+            </p:extLst>
+          </p:nvPr>
+        </p:nvGraphicFramePr>
+        <p:xfrm>
+          <a:off x="594360" y="1481328"/>
+          <a:ext cx="11002975" cy="914400"/>
+        </p:xfrm>
+        <a:graphic>
+          <a:graphicData uri="http://schemas.openxmlformats.org/drawingml/2006/table">
+            <a:tbl>
+              <a:tblPr/>
+              <a:tblGrid>
+                <a:gridCol w="457200"/>
+                <a:gridCol w="3200400"/>
+                <a:gridCol w="5513832"/>
+                <a:gridCol w="1828800"/>
+              </a:tblGrid>
+              <a:tr h="310896">
+                <a:tc>
+                  <a:txBody>
+                    <a:bodyPr/>
+                    <a:lstStyle/>
+                    <a:p>
+                      <a:pPr algn="ctr" indent="0" marL="0">
+                        <a:buNone/>
+                      </a:pPr>
+                      <a:r>
+                        <a:rPr lang="en-US" sz="1250" b="1" dirty="0">
+                          <a:solidFill>
+                            <a:srgbClr val="FFFFFF"/>
+                          </a:solidFill>
+                          <a:latin typeface="Georgia" pitchFamily="34" charset="0"/>
+                          <a:ea typeface="Georgia" pitchFamily="34" charset="-122"/>
+                          <a:cs typeface="Georgia" pitchFamily="34" charset="-120"/>
+                        </a:rPr>
+                        <a:t>#</a:t>
+                      </a:r>
+                      <a:endParaRPr lang="en-US" sz="1250" dirty="0">
+                        <a:latin typeface="Georgia" charset="0"/>
+                        <a:ea typeface="Georgia" charset="0"/>
+                        <a:cs typeface="Georgia" charset="0"/>
+                      </a:endParaRPr>
+                    </a:p>
+                  </a:txBody>
+                  <a:tcPr marL="91440" marR="91440" marT="45720" marB="45720" anchor="ctr">
+                    <a:lnL w="9525" cap="flat" cmpd="sng" algn="ctr">
+                      <a:solidFill>
+                        <a:srgbClr val="E2E8F0"/>
+                      </a:solidFill>
+                      <a:prstDash val="solid"/>
+                      <a:round/>
+                      <a:headEnd type="none" w="med" len="med"/>
+                      <a:tailEnd type="none" w="med" len="med"/>
+                    </a:lnL>
+                    <a:lnR w="9525" cap="flat" cmpd="sng" algn="ctr">
+                      <a:solidFill>
+                        <a:srgbClr val="E2E8F0"/>
+                      </a:solidFill>
+                      <a:prstDash val="solid"/>
+                      <a:round/>
+                      <a:headEnd type="none" w="med" len="med"/>
+                      <a:tailEnd type="none" w="med" len="med"/>
+                    </a:lnR>
+                    <a:lnT w="9525" cap="flat" cmpd="sng" algn="ctr">
+                      <a:solidFill>
+                        <a:srgbClr val="E2E8F0"/>
+                      </a:solidFill>
+                      <a:prstDash val="solid"/>
+                      <a:round/>
+                      <a:headEnd type="none" w="med" len="med"/>
+                      <a:tailEnd type="none" w="med" len="med"/>
+                    </a:lnT>
+                    <a:lnB w="9525" cap="flat" cmpd="sng" algn="ctr">
+                      <a:solidFill>
+                        <a:srgbClr val="E2E8F0"/>
+                      </a:solidFill>
+                      <a:prstDash val="solid"/>
+                      <a:round/>
+                      <a:headEnd type="none" w="med" len="med"/>
+                      <a:tailEnd type="none" w="med" len="med"/>
+                    </a:lnB>
+                    <a:solidFill>
+                      <a:srgbClr val="0E1A33"/>
+                    </a:solidFill>
+                  </a:tcPr>
+                </a:tc>
+                <a:tc>
+                  <a:txBody>
+                    <a:bodyPr/>
+                    <a:lstStyle/>
+                    <a:p>
+                      <a:pPr algn="l" indent="0" marL="0">
+                        <a:buNone/>
+                      </a:pPr>
+                      <a:r>
+                        <a:rPr lang="en-US" sz="1250" b="1" dirty="0">
+                          <a:solidFill>
+                            <a:srgbClr val="FFFFFF"/>
+                          </a:solidFill>
+                          <a:latin typeface="Georgia" pitchFamily="34" charset="0"/>
+                          <a:ea typeface="Georgia" pitchFamily="34" charset="-122"/>
+                          <a:cs typeface="Georgia" pitchFamily="34" charset="-120"/>
+                        </a:rPr>
+                        <a:t>Roadmap task</a:t>
+                      </a:r>
+                      <a:endParaRPr lang="en-US" sz="1250" dirty="0">
+                        <a:latin typeface="Georgia" charset="0"/>
+                        <a:ea typeface="Georgia" charset="0"/>
+                        <a:cs typeface="Georgia" charset="0"/>
+                      </a:endParaRPr>
+                    </a:p>
+                  </a:txBody>
+                  <a:tcPr marL="91440" marR="91440" marT="45720" marB="45720" anchor="ctr">
+                    <a:lnL w="9525" cap="flat" cmpd="sng" algn="ctr">
+                      <a:solidFill>
+                        <a:srgbClr val="E2E8F0"/>
+                      </a:solidFill>
+                      <a:prstDash val="solid"/>
+                      <a:round/>
+                      <a:headEnd type="none" w="med" len="med"/>
+                      <a:tailEnd type="none" w="med" len="med"/>
+                    </a:lnL>
+                    <a:lnR w="9525" cap="flat" cmpd="sng" algn="ctr">
+                      <a:solidFill>
+                        <a:srgbClr val="E2E8F0"/>
+                      </a:solidFill>
+                      <a:prstDash val="solid"/>
+                      <a:round/>
+                      <a:headEnd type="none" w="med" len="med"/>
+                      <a:tailEnd type="none" w="med" len="med"/>
+                    </a:lnR>
+                    <a:lnT w="9525" cap="flat" cmpd="sng" algn="ctr">
+                      <a:solidFill>
+                        <a:srgbClr val="E2E8F0"/>
+                      </a:solidFill>
+                      <a:prstDash val="solid"/>
+                      <a:round/>
+                      <a:headEnd type="none" w="med" len="med"/>
+                      <a:tailEnd type="none" w="med" len="med"/>
+                    </a:lnT>
+                    <a:lnB w="9525" cap="flat" cmpd="sng" algn="ctr">
+                      <a:solidFill>
+                        <a:srgbClr val="E2E8F0"/>
+                      </a:solidFill>
+                      <a:prstDash val="solid"/>
+                      <a:round/>
+                      <a:headEnd type="none" w="med" len="med"/>
+                      <a:tailEnd type="none" w="med" len="med"/>
+                    </a:lnB>
+                    <a:solidFill>
+                      <a:srgbClr val="0E1A33"/>
+                    </a:solidFill>
+                  </a:tcPr>
+                </a:tc>
+                <a:tc>
+                  <a:txBody>
+                    <a:bodyPr/>
+                    <a:lstStyle/>
+                    <a:p>
+                      <a:pPr algn="l" indent="0" marL="0">
+                        <a:buNone/>
+                      </a:pPr>
+                      <a:r>
+                        <a:rPr lang="en-US" sz="1250" b="1" dirty="0">
+                          <a:solidFill>
+                            <a:srgbClr val="FFFFFF"/>
+                          </a:solidFill>
+                          <a:latin typeface="Georgia" pitchFamily="34" charset="0"/>
+                          <a:ea typeface="Georgia" pitchFamily="34" charset="-122"/>
+                          <a:cs typeface="Georgia" pitchFamily="34" charset="-120"/>
+                        </a:rPr>
+                        <a:t>What it delivers</a:t>
+                      </a:r>
+                      <a:endParaRPr lang="en-US" sz="1250" dirty="0">
+                        <a:latin typeface="Georgia" charset="0"/>
+                        <a:ea typeface="Georgia" charset="0"/>
+                        <a:cs typeface="Georgia" charset="0"/>
+                      </a:endParaRPr>
+                    </a:p>
+                  </a:txBody>
+                  <a:tcPr marL="91440" marR="91440" marT="45720" marB="45720" anchor="ctr">
+                    <a:lnL w="9525" cap="flat" cmpd="sng" algn="ctr">
+                      <a:solidFill>
+                        <a:srgbClr val="E2E8F0"/>
+                      </a:solidFill>
+                      <a:prstDash val="solid"/>
+                      <a:round/>
+                      <a:headEnd type="none" w="med" len="med"/>
+                      <a:tailEnd type="none" w="med" len="med"/>
+                    </a:lnL>
+                    <a:lnR w="9525" cap="flat" cmpd="sng" algn="ctr">
+                      <a:solidFill>
+                        <a:srgbClr val="E2E8F0"/>
+                      </a:solidFill>
+                      <a:prstDash val="solid"/>
+                      <a:round/>
+                      <a:headEnd type="none" w="med" len="med"/>
+                      <a:tailEnd type="none" w="med" len="med"/>
+                    </a:lnR>
+                    <a:lnT w="9525" cap="flat" cmpd="sng" algn="ctr">
+                      <a:solidFill>
+                        <a:srgbClr val="E2E8F0"/>
+                      </a:solidFill>
+                      <a:prstDash val="solid"/>
+                      <a:round/>
+                      <a:headEnd type="none" w="med" len="med"/>
+                      <a:tailEnd type="none" w="med" len="med"/>
+                    </a:lnT>
+                    <a:lnB w="9525" cap="flat" cmpd="sng" algn="ctr">
+                      <a:solidFill>
+                        <a:srgbClr val="E2E8F0"/>
+                      </a:solidFill>
+                      <a:prstDash val="solid"/>
+                      <a:round/>
+                      <a:headEnd type="none" w="med" len="med"/>
+                      <a:tailEnd type="none" w="med" len="med"/>
+                    </a:lnB>
+                    <a:solidFill>
+                      <a:srgbClr val="0E1A33"/>
+                    </a:solidFill>
+                  </a:tcPr>
+                </a:tc>
+                <a:tc>
+                  <a:txBody>
+                    <a:bodyPr/>
+                    <a:lstStyle/>
+                    <a:p>
+                      <a:pPr algn="ctr" indent="0" marL="0">
+                        <a:buNone/>
+                      </a:pPr>
+                      <a:r>
+                        <a:rPr lang="en-US" sz="1250" b="1" dirty="0">
+                          <a:solidFill>
+                            <a:srgbClr val="FFFFFF"/>
+                          </a:solidFill>
+                          <a:latin typeface="Georgia" pitchFamily="34" charset="0"/>
+                          <a:ea typeface="Georgia" pitchFamily="34" charset="-122"/>
+                          <a:cs typeface="Georgia" pitchFamily="34" charset="-120"/>
+                        </a:rPr>
+                        <a:t>Theme</a:t>
+                      </a:r>
+                      <a:endParaRPr lang="en-US" sz="1250" dirty="0">
+                        <a:latin typeface="Georgia" charset="0"/>
+                        <a:ea typeface="Georgia" charset="0"/>
+                        <a:cs typeface="Georgia" charset="0"/>
+                      </a:endParaRPr>
+                    </a:p>
+                  </a:txBody>
+                  <a:tcPr marL="91440" marR="91440" marT="45720" marB="45720" anchor="ctr">
+                    <a:lnL w="9525" cap="flat" cmpd="sng" algn="ctr">
+                      <a:solidFill>
+                        <a:srgbClr val="E2E8F0"/>
+                      </a:solidFill>
+                      <a:prstDash val="solid"/>
+                      <a:round/>
+                      <a:headEnd type="none" w="med" len="med"/>
+                      <a:tailEnd type="none" w="med" len="med"/>
+                    </a:lnL>
+                    <a:lnR w="9525" cap="flat" cmpd="sng" algn="ctr">
+                      <a:solidFill>
+                        <a:srgbClr val="E2E8F0"/>
+                      </a:solidFill>
+                      <a:prstDash val="solid"/>
+                      <a:round/>
+                      <a:headEnd type="none" w="med" len="med"/>
+                      <a:tailEnd type="none" w="med" len="med"/>
+                    </a:lnR>
+                    <a:lnT w="9525" cap="flat" cmpd="sng" algn="ctr">
+                      <a:solidFill>
+                        <a:srgbClr val="E2E8F0"/>
+                      </a:solidFill>
+                      <a:prstDash val="solid"/>
+                      <a:round/>
+                      <a:headEnd type="none" w="med" len="med"/>
+                      <a:tailEnd type="none" w="med" len="med"/>
+                    </a:lnT>
+                    <a:lnB w="9525" cap="flat" cmpd="sng" algn="ctr">
+                      <a:solidFill>
+                        <a:srgbClr val="E2E8F0"/>
+                      </a:solidFill>
+                      <a:prstDash val="solid"/>
+                      <a:round/>
+                      <a:headEnd type="none" w="med" len="med"/>
+                      <a:tailEnd type="none" w="med" len="med"/>
+                    </a:lnB>
+                    <a:solidFill>
+                      <a:srgbClr val="0E1A33"/>
+                    </a:solidFill>
+                  </a:tcPr>
+                </a:tc>
+              </a:tr>
+              <a:tr h="370332">
+                <a:tc>
+                  <a:txBody>
+                    <a:bodyPr/>
+                    <a:lstStyle/>
+                    <a:p>
+                      <a:pPr algn="ctr" indent="0" marL="0">
+                        <a:buNone/>
+                      </a:pPr>
+                      <a:r>
+                        <a:rPr lang="en-US" sz="1050" b="1" dirty="0">
+                          <a:solidFill>
+                            <a:srgbClr val="94A3B8"/>
+                          </a:solidFill>
+                          <a:latin typeface="Calibri" pitchFamily="34" charset="0"/>
+                          <a:ea typeface="Calibri" pitchFamily="34" charset="-122"/>
+                          <a:cs typeface="Calibri" pitchFamily="34" charset="-120"/>
+                        </a:rPr>
+                        <a:t>1</a:t>
+                      </a:r>
+                      <a:endParaRPr lang="en-US" sz="1050" dirty="0">
+                        <a:latin typeface="Calibri" charset="0"/>
+                        <a:ea typeface="Calibri" charset="0"/>
+                        <a:cs typeface="Calibri" charset="0"/>
+                      </a:endParaRPr>
+                    </a:p>
+                  </a:txBody>
+                  <a:tcPr marL="91440" marR="91440" marT="45720" marB="45720" anchor="ctr">
+                    <a:lnL w="9525" cap="flat" cmpd="sng" algn="ctr">
+                      <a:solidFill>
+                        <a:srgbClr val="E2E8F0"/>
+                      </a:solidFill>
+                      <a:prstDash val="solid"/>
+                      <a:round/>
+                      <a:headEnd type="none" w="med" len="med"/>
+                      <a:tailEnd type="none" w="med" len="med"/>
+                    </a:lnL>
+                    <a:lnR w="9525" cap="flat" cmpd="sng" algn="ctr">
+                      <a:solidFill>
+                        <a:srgbClr val="E2E8F0"/>
+                      </a:solidFill>
+                      <a:prstDash val="solid"/>
+                      <a:round/>
+                      <a:headEnd type="none" w="med" len="med"/>
+                      <a:tailEnd type="none" w="med" len="med"/>
+                    </a:lnR>
+                    <a:lnT w="9525" cap="flat" cmpd="sng" algn="ctr">
+                      <a:solidFill>
+                        <a:srgbClr val="E2E8F0"/>
+                      </a:solidFill>
+                      <a:prstDash val="solid"/>
+                      <a:round/>
+                      <a:headEnd type="none" w="med" len="med"/>
+                      <a:tailEnd type="none" w="med" len="med"/>
+                    </a:lnT>
+                    <a:lnB w="9525" cap="flat" cmpd="sng" algn="ctr">
+                      <a:solidFill>
+                        <a:srgbClr val="E2E8F0"/>
+                      </a:solidFill>
+                      <a:prstDash val="solid"/>
+                      <a:round/>
+                      <a:headEnd type="none" w="med" len="med"/>
+                      <a:tailEnd type="none" w="med" len="med"/>
+                    </a:lnB>
+                    <a:solidFill>
+                      <a:srgbClr val="FFFFFF"/>
+                    </a:solidFill>
+                  </a:tcPr>
+                </a:tc>
+                <a:tc>
+                  <a:txBody>
+                    <a:bodyPr/>
+                    <a:lstStyle/>
+                    <a:p>
+                      <a:pPr algn="l" indent="0" marL="0">
+                        <a:buNone/>
+                      </a:pPr>
+                      <a:r>
+                        <a:rPr lang="en-US" sz="1050" b="1" dirty="0">
+                          <a:solidFill>
+                            <a:srgbClr val="1E293B"/>
+                          </a:solidFill>
+                          <a:latin typeface="Calibri" pitchFamily="34" charset="0"/>
+                          <a:ea typeface="Calibri" pitchFamily="34" charset="-122"/>
+                          <a:cs typeface="Calibri" pitchFamily="34" charset="-120"/>
+                        </a:rPr>
+                        <a:t>FSD tracking &amp; code-vs-spec validation</a:t>
+                      </a:r>
+                      <a:endParaRPr lang="en-US" sz="1050" dirty="0">
+                        <a:latin typeface="Calibri" charset="0"/>
+                        <a:ea typeface="Calibri" charset="0"/>
+                        <a:cs typeface="Calibri" charset="0"/>
+                      </a:endParaRPr>
+                    </a:p>
+                  </a:txBody>
+                  <a:tcPr marL="76200" marR="50800" marT="25400" marB="25400" anchor="ctr">
+                    <a:lnL w="9525" cap="flat" cmpd="sng" algn="ctr">
+                      <a:solidFill>
+                        <a:srgbClr val="E2E8F0"/>
+                      </a:solidFill>
+                      <a:prstDash val="solid"/>
+                      <a:round/>
+                      <a:headEnd type="none" w="med" len="med"/>
+                      <a:tailEnd type="none" w="med" len="med"/>
+                    </a:lnL>
+                    <a:lnR w="9525" cap="flat" cmpd="sng" algn="ctr">
+                      <a:solidFill>
+                        <a:srgbClr val="E2E8F0"/>
+                      </a:solidFill>
+                      <a:prstDash val="solid"/>
+                      <a:round/>
+                      <a:headEnd type="none" w="med" len="med"/>
+                      <a:tailEnd type="none" w="med" len="med"/>
+                    </a:lnR>
+                    <a:lnT w="9525" cap="flat" cmpd="sng" algn="ctr">
+                      <a:solidFill>
+                        <a:srgbClr val="E2E8F0"/>
+                      </a:solidFill>
+                      <a:prstDash val="solid"/>
+                      <a:round/>
+                      <a:headEnd type="none" w="med" len="med"/>
+                      <a:tailEnd type="none" w="med" len="med"/>
+                    </a:lnT>
+                    <a:lnB w="9525" cap="flat" cmpd="sng" algn="ctr">
+                      <a:solidFill>
+                        <a:srgbClr val="E2E8F0"/>
+                      </a:solidFill>
+                      <a:prstDash val="solid"/>
+                      <a:round/>
+                      <a:headEnd type="none" w="med" len="med"/>
+                      <a:tailEnd type="none" w="med" len="med"/>
+                    </a:lnB>
+                    <a:solidFill>
+                      <a:srgbClr val="FFFFFF"/>
+                    </a:solidFill>
+                  </a:tcPr>
+                </a:tc>
+                <a:tc>
+                  <a:txBody>
+                    <a:bodyPr/>
+                    <a:lstStyle/>
+                    <a:p>
+                      <a:pPr algn="l" indent="0" marL="0">
+                        <a:buNone/>
+                      </a:pPr>
+                      <a:r>
+                        <a:rPr lang="en-US" sz="950" dirty="0">
+                          <a:solidFill>
+                            <a:srgbClr val="64748B"/>
+                          </a:solidFill>
+                          <a:latin typeface="Calibri" pitchFamily="34" charset="0"/>
+                          <a:ea typeface="Calibri" pitchFamily="34" charset="-122"/>
+                          <a:cs typeface="Calibri" pitchFamily="34" charset="-120"/>
+                        </a:rPr>
+                        <a:t>Link each PR to its Functional Specification Document; flag changes that contradict or miss the spec (builds on today's functional-doc upload)</a:t>
+                      </a:r>
+                      <a:endParaRPr lang="en-US" sz="950" dirty="0">
+                        <a:latin typeface="Calibri" charset="0"/>
+                        <a:ea typeface="Calibri" charset="0"/>
+                        <a:cs typeface="Calibri" charset="0"/>
+                      </a:endParaRPr>
+                    </a:p>
+                  </a:txBody>
+                  <a:tcPr marL="76200" marR="50800" marT="25400" marB="25400" anchor="ctr">
+                    <a:lnL w="9525" cap="flat" cmpd="sng" algn="ctr">
+                      <a:solidFill>
+                        <a:srgbClr val="E2E8F0"/>
+                      </a:solidFill>
+                      <a:prstDash val="solid"/>
+                      <a:round/>
+                      <a:headEnd type="none" w="med" len="med"/>
+                      <a:tailEnd type="none" w="med" len="med"/>
+                    </a:lnL>
+                    <a:lnR w="9525" cap="flat" cmpd="sng" algn="ctr">
+                      <a:solidFill>
+                        <a:srgbClr val="E2E8F0"/>
+                      </a:solidFill>
+                      <a:prstDash val="solid"/>
+                      <a:round/>
+                      <a:headEnd type="none" w="med" len="med"/>
+                      <a:tailEnd type="none" w="med" len="med"/>
+                    </a:lnR>
+                    <a:lnT w="9525" cap="flat" cmpd="sng" algn="ctr">
+                      <a:solidFill>
+                        <a:srgbClr val="E2E8F0"/>
+                      </a:solidFill>
+                      <a:prstDash val="solid"/>
+                      <a:round/>
+                      <a:headEnd type="none" w="med" len="med"/>
+                      <a:tailEnd type="none" w="med" len="med"/>
+                    </a:lnT>
+                    <a:lnB w="9525" cap="flat" cmpd="sng" algn="ctr">
+                      <a:solidFill>
+                        <a:srgbClr val="E2E8F0"/>
+                      </a:solidFill>
+                      <a:prstDash val="solid"/>
+                      <a:round/>
+                      <a:headEnd type="none" w="med" len="med"/>
+                      <a:tailEnd type="none" w="med" len="med"/>
+                    </a:lnB>
+                    <a:solidFill>
+                      <a:srgbClr val="FFFFFF"/>
+                    </a:solidFill>
+                  </a:tcPr>
+                </a:tc>
+                <a:tc>
+                  <a:txBody>
+                    <a:bodyPr/>
+                    <a:lstStyle/>
+                    <a:p>
+                      <a:pPr algn="ctr" indent="0" marL="0">
+                        <a:buNone/>
+                      </a:pPr>
+                      <a:r>
+                        <a:rPr lang="en-US" sz="900" b="1" dirty="0">
+                          <a:solidFill>
+                            <a:srgbClr val="6366F1"/>
+                          </a:solidFill>
+                          <a:latin typeface="Calibri" pitchFamily="34" charset="0"/>
+                          <a:ea typeface="Calibri" pitchFamily="34" charset="-122"/>
+                          <a:cs typeface="Calibri" pitchFamily="34" charset="-120"/>
+                        </a:rPr>
+                        <a:t>Functional intelligence</a:t>
+                      </a:r>
+                      <a:endParaRPr lang="en-US" sz="900" dirty="0">
+                        <a:latin typeface="Calibri" charset="0"/>
+                        <a:ea typeface="Calibri" charset="0"/>
+                        <a:cs typeface="Calibri" charset="0"/>
+                      </a:endParaRPr>
+                    </a:p>
+                  </a:txBody>
+                  <a:tcPr marL="91440" marR="91440" marT="45720" marB="45720" anchor="ctr">
+                    <a:lnL w="9525" cap="flat" cmpd="sng" algn="ctr">
+                      <a:solidFill>
+                        <a:srgbClr val="E2E8F0"/>
+                      </a:solidFill>
+                      <a:prstDash val="solid"/>
+                      <a:round/>
+                      <a:headEnd type="none" w="med" len="med"/>
+                      <a:tailEnd type="none" w="med" len="med"/>
+                    </a:lnL>
+                    <a:lnR w="9525" cap="flat" cmpd="sng" algn="ctr">
+                      <a:solidFill>
+                        <a:srgbClr val="E2E8F0"/>
+                      </a:solidFill>
+                      <a:prstDash val="solid"/>
+                      <a:round/>
+                      <a:headEnd type="none" w="med" len="med"/>
+                      <a:tailEnd type="none" w="med" len="med"/>
+                    </a:lnR>
+                    <a:lnT w="9525" cap="flat" cmpd="sng" algn="ctr">
+                      <a:solidFill>
+                        <a:srgbClr val="E2E8F0"/>
+                      </a:solidFill>
+                      <a:prstDash val="solid"/>
+                      <a:round/>
+                      <a:headEnd type="none" w="med" len="med"/>
+                      <a:tailEnd type="none" w="med" len="med"/>
+                    </a:lnT>
+                    <a:lnB w="9525" cap="flat" cmpd="sng" algn="ctr">
+                      <a:solidFill>
+                        <a:srgbClr val="E2E8F0"/>
+                      </a:solidFill>
+                      <a:prstDash val="solid"/>
+                      <a:round/>
+                      <a:headEnd type="none" w="med" len="med"/>
+                      <a:tailEnd type="none" w="med" len="med"/>
+                    </a:lnB>
+                    <a:solidFill>
+                      <a:srgbClr val="FFFFFF"/>
+                    </a:solidFill>
+                  </a:tcPr>
+                </a:tc>
+              </a:tr>
+              <a:tr h="370332">
+                <a:tc>
+                  <a:txBody>
+                    <a:bodyPr/>
+                    <a:lstStyle/>
+                    <a:p>
+                      <a:pPr algn="ctr" indent="0" marL="0">
+                        <a:buNone/>
+                      </a:pPr>
+                      <a:r>
+                        <a:rPr lang="en-US" sz="1050" b="1" dirty="0">
+                          <a:solidFill>
+                            <a:srgbClr val="94A3B8"/>
+                          </a:solidFill>
+                          <a:latin typeface="Calibri" pitchFamily="34" charset="0"/>
+                          <a:ea typeface="Calibri" pitchFamily="34" charset="-122"/>
+                          <a:cs typeface="Calibri" pitchFamily="34" charset="-120"/>
+                        </a:rPr>
+                        <a:t>2</a:t>
+                      </a:r>
+                      <a:endParaRPr lang="en-US" sz="1050" dirty="0">
+                        <a:latin typeface="Calibri" charset="0"/>
+                        <a:ea typeface="Calibri" charset="0"/>
+                        <a:cs typeface="Calibri" charset="0"/>
+                      </a:endParaRPr>
+                    </a:p>
+                  </a:txBody>
+                  <a:tcPr marL="91440" marR="91440" marT="45720" marB="45720" anchor="ctr">
+                    <a:lnL w="9525" cap="flat" cmpd="sng" algn="ctr">
+                      <a:solidFill>
+                        <a:srgbClr val="E2E8F0"/>
+                      </a:solidFill>
+                      <a:prstDash val="solid"/>
+                      <a:round/>
+                      <a:headEnd type="none" w="med" len="med"/>
+                      <a:tailEnd type="none" w="med" len="med"/>
+                    </a:lnL>
+                    <a:lnR w="9525" cap="flat" cmpd="sng" algn="ctr">
+                      <a:solidFill>
+                        <a:srgbClr val="E2E8F0"/>
+                      </a:solidFill>
+                      <a:prstDash val="solid"/>
+                      <a:round/>
+                      <a:headEnd type="none" w="med" len="med"/>
+                      <a:tailEnd type="none" w="med" len="med"/>
+                    </a:lnR>
+                    <a:lnT w="9525" cap="flat" cmpd="sng" algn="ctr">
+                      <a:solidFill>
+                        <a:srgbClr val="E2E8F0"/>
+                      </a:solidFill>
+                      <a:prstDash val="solid"/>
+                      <a:round/>
+                      <a:headEnd type="none" w="med" len="med"/>
+                      <a:tailEnd type="none" w="med" len="med"/>
+                    </a:lnT>
+                    <a:lnB w="9525" cap="flat" cmpd="sng" algn="ctr">
+                      <a:solidFill>
+                        <a:srgbClr val="E2E8F0"/>
+                      </a:solidFill>
+                      <a:prstDash val="solid"/>
+                      <a:round/>
+                      <a:headEnd type="none" w="med" len="med"/>
+                      <a:tailEnd type="none" w="med" len="med"/>
+                    </a:lnB>
+                    <a:solidFill>
+                      <a:srgbClr val="EEF2F8"/>
+                    </a:solidFill>
+                  </a:tcPr>
+                </a:tc>
+                <a:tc>
+                  <a:txBody>
+                    <a:bodyPr/>
+                    <a:lstStyle/>
+                    <a:p>
+                      <a:pPr algn="l" indent="0" marL="0">
+                        <a:buNone/>
+                      </a:pPr>
+                      <a:r>
+                        <a:rPr lang="en-US" sz="1050" b="1" dirty="0">
+                          <a:solidFill>
+                            <a:srgbClr val="1E293B"/>
+                          </a:solidFill>
+                          <a:latin typeface="Calibri" pitchFamily="34" charset="0"/>
+                          <a:ea typeface="Calibri" pitchFamily="34" charset="-122"/>
+                          <a:cs typeface="Calibri" pitchFamily="34" charset="-120"/>
+                        </a:rPr>
+                        <a:t>Functional impact analysis</a:t>
+                      </a:r>
+                      <a:endParaRPr lang="en-US" sz="1050" dirty="0">
+                        <a:latin typeface="Calibri" charset="0"/>
+                        <a:ea typeface="Calibri" charset="0"/>
+                        <a:cs typeface="Calibri" charset="0"/>
+                      </a:endParaRPr>
+                    </a:p>
+                  </a:txBody>
+                  <a:tcPr marL="76200" marR="50800" marT="25400" marB="25400" anchor="ctr">
+                    <a:lnL w="9525" cap="flat" cmpd="sng" algn="ctr">
+                      <a:solidFill>
+                        <a:srgbClr val="E2E8F0"/>
+                      </a:solidFill>
+                      <a:prstDash val="solid"/>
+                      <a:round/>
+                      <a:headEnd type="none" w="med" len="med"/>
+                      <a:tailEnd type="none" w="med" len="med"/>
+                    </a:lnL>
+                    <a:lnR w="9525" cap="flat" cmpd="sng" algn="ctr">
+                      <a:solidFill>
+                        <a:srgbClr val="E2E8F0"/>
+                      </a:solidFill>
+                      <a:prstDash val="solid"/>
+                      <a:round/>
+                      <a:headEnd type="none" w="med" len="med"/>
+                      <a:tailEnd type="none" w="med" len="med"/>
+                    </a:lnR>
+                    <a:lnT w="9525" cap="flat" cmpd="sng" algn="ctr">
+                      <a:solidFill>
+                        <a:srgbClr val="E2E8F0"/>
+                      </a:solidFill>
+                      <a:prstDash val="solid"/>
+                      <a:round/>
+                      <a:headEnd type="none" w="med" len="med"/>
+                      <a:tailEnd type="none" w="med" len="med"/>
+                    </a:lnT>
+                    <a:lnB w="9525" cap="flat" cmpd="sng" algn="ctr">
+                      <a:solidFill>
+                        <a:srgbClr val="E2E8F0"/>
+                      </a:solidFill>
+                      <a:prstDash val="solid"/>
+                      <a:round/>
+                      <a:headEnd type="none" w="med" len="med"/>
+                      <a:tailEnd type="none" w="med" len="med"/>
+                    </a:lnB>
+                    <a:solidFill>
+                      <a:srgbClr val="EEF2F8"/>
+                    </a:solidFill>
+                  </a:tcPr>
+                </a:tc>
+                <a:tc>
+                  <a:txBody>
+                    <a:bodyPr/>
+                    <a:lstStyle/>
+                    <a:p>
+                      <a:pPr algn="l" indent="0" marL="0">
+                        <a:buNone/>
+                      </a:pPr>
+                      <a:r>
+                        <a:rPr lang="en-US" sz="950" dirty="0">
+                          <a:solidFill>
+                            <a:srgbClr val="64748B"/>
+                          </a:solidFill>
+                          <a:latin typeface="Calibri" pitchFamily="34" charset="0"/>
+                          <a:ea typeface="Calibri" pitchFamily="34" charset="-122"/>
+                          <a:cs typeface="Calibri" pitchFamily="34" charset="-120"/>
+                        </a:rPr>
+                        <a:t>Combine FSD + code change + dependent repos to report which business functions are affected and where to regression-test</a:t>
+                      </a:r>
+                      <a:endParaRPr lang="en-US" sz="950" dirty="0">
+                        <a:latin typeface="Calibri" charset="0"/>
+                        <a:ea typeface="Calibri" charset="0"/>
+                        <a:cs typeface="Calibri" charset="0"/>
+                      </a:endParaRPr>
+                    </a:p>
+                  </a:txBody>
+                  <a:tcPr marL="76200" marR="50800" marT="25400" marB="25400" anchor="ctr">
+                    <a:lnL w="9525" cap="flat" cmpd="sng" algn="ctr">
+                      <a:solidFill>
+                        <a:srgbClr val="E2E8F0"/>
+                      </a:solidFill>
+                      <a:prstDash val="solid"/>
+                      <a:round/>
+                      <a:headEnd type="none" w="med" len="med"/>
+                      <a:tailEnd type="none" w="med" len="med"/>
+                    </a:lnL>
+                    <a:lnR w="9525" cap="flat" cmpd="sng" algn="ctr">
+                      <a:solidFill>
+                        <a:srgbClr val="E2E8F0"/>
+                      </a:solidFill>
+                      <a:prstDash val="solid"/>
+                      <a:round/>
+                      <a:headEnd type="none" w="med" len="med"/>
+                      <a:tailEnd type="none" w="med" len="med"/>
+                    </a:lnR>
+                    <a:lnT w="9525" cap="flat" cmpd="sng" algn="ctr">
+                      <a:solidFill>
+                        <a:srgbClr val="E2E8F0"/>
+                      </a:solidFill>
+                      <a:prstDash val="solid"/>
+                      <a:round/>
+                      <a:headEnd type="none" w="med" len="med"/>
+                      <a:tailEnd type="none" w="med" len="med"/>
+                    </a:lnT>
+                    <a:lnB w="9525" cap="flat" cmpd="sng" algn="ctr">
+                      <a:solidFill>
+                        <a:srgbClr val="E2E8F0"/>
+                      </a:solidFill>
+                      <a:prstDash val="solid"/>
+                      <a:round/>
+                      <a:headEnd type="none" w="med" len="med"/>
+                      <a:tailEnd type="none" w="med" len="med"/>
+                    </a:lnB>
+                    <a:solidFill>
+                      <a:srgbClr val="EEF2F8"/>
+                    </a:solidFill>
+                  </a:tcPr>
+                </a:tc>
+                <a:tc>
+                  <a:txBody>
+                    <a:bodyPr/>
+                    <a:lstStyle/>
+                    <a:p>
+                      <a:pPr algn="ctr" indent="0" marL="0">
+                        <a:buNone/>
+                      </a:pPr>
+                      <a:r>
+                        <a:rPr lang="en-US" sz="900" b="1" dirty="0">
+                          <a:solidFill>
+                            <a:srgbClr val="6366F1"/>
+                          </a:solidFill>
+                          <a:latin typeface="Calibri" pitchFamily="34" charset="0"/>
+                          <a:ea typeface="Calibri" pitchFamily="34" charset="-122"/>
+                          <a:cs typeface="Calibri" pitchFamily="34" charset="-120"/>
+                        </a:rPr>
+                        <a:t>Functional intelligence</a:t>
+                      </a:r>
+                      <a:endParaRPr lang="en-US" sz="900" dirty="0">
+                        <a:latin typeface="Calibri" charset="0"/>
+                        <a:ea typeface="Calibri" charset="0"/>
+                        <a:cs typeface="Calibri" charset="0"/>
+                      </a:endParaRPr>
+                    </a:p>
+                  </a:txBody>
+                  <a:tcPr marL="91440" marR="91440" marT="45720" marB="45720" anchor="ctr">
+                    <a:lnL w="9525" cap="flat" cmpd="sng" algn="ctr">
+                      <a:solidFill>
+                        <a:srgbClr val="E2E8F0"/>
+                      </a:solidFill>
+                      <a:prstDash val="solid"/>
+                      <a:round/>
+                      <a:headEnd type="none" w="med" len="med"/>
+                      <a:tailEnd type="none" w="med" len="med"/>
+                    </a:lnL>
+                    <a:lnR w="9525" cap="flat" cmpd="sng" algn="ctr">
+                      <a:solidFill>
+                        <a:srgbClr val="E2E8F0"/>
+                      </a:solidFill>
+                      <a:prstDash val="solid"/>
+                      <a:round/>
+                      <a:headEnd type="none" w="med" len="med"/>
+                      <a:tailEnd type="none" w="med" len="med"/>
+                    </a:lnR>
+                    <a:lnT w="9525" cap="flat" cmpd="sng" algn="ctr">
+                      <a:solidFill>
+                        <a:srgbClr val="E2E8F0"/>
+                      </a:solidFill>
+                      <a:prstDash val="solid"/>
+                      <a:round/>
+                      <a:headEnd type="none" w="med" len="med"/>
+                      <a:tailEnd type="none" w="med" len="med"/>
+                    </a:lnT>
+                    <a:lnB w="9525" cap="flat" cmpd="sng" algn="ctr">
+                      <a:solidFill>
+                        <a:srgbClr val="E2E8F0"/>
+                      </a:solidFill>
+                      <a:prstDash val="solid"/>
+                      <a:round/>
+                      <a:headEnd type="none" w="med" len="med"/>
+                      <a:tailEnd type="none" w="med" len="med"/>
+                    </a:lnB>
+                    <a:solidFill>
+                      <a:srgbClr val="EEF2F8"/>
+                    </a:solidFill>
+                  </a:tcPr>
+                </a:tc>
+              </a:tr>
+              <a:tr h="370332">
+                <a:tc>
+                  <a:txBody>
+                    <a:bodyPr/>
+                    <a:lstStyle/>
+                    <a:p>
+                      <a:pPr algn="ctr" indent="0" marL="0">
+                        <a:buNone/>
+                      </a:pPr>
+                      <a:r>
+                        <a:rPr lang="en-US" sz="1050" b="1" dirty="0">
+                          <a:solidFill>
+                            <a:srgbClr val="94A3B8"/>
+                          </a:solidFill>
+                          <a:latin typeface="Calibri" pitchFamily="34" charset="0"/>
+                          <a:ea typeface="Calibri" pitchFamily="34" charset="-122"/>
+                          <a:cs typeface="Calibri" pitchFamily="34" charset="-120"/>
+                        </a:rPr>
+                        <a:t>3</a:t>
+                      </a:r>
+                      <a:endParaRPr lang="en-US" sz="1050" dirty="0">
+                        <a:latin typeface="Calibri" charset="0"/>
+                        <a:ea typeface="Calibri" charset="0"/>
+                        <a:cs typeface="Calibri" charset="0"/>
+                      </a:endParaRPr>
+                    </a:p>
+                  </a:txBody>
+                  <a:tcPr marL="91440" marR="91440" marT="45720" marB="45720" anchor="ctr">
+                    <a:lnL w="9525" cap="flat" cmpd="sng" algn="ctr">
+                      <a:solidFill>
+                        <a:srgbClr val="E2E8F0"/>
+                      </a:solidFill>
+                      <a:prstDash val="solid"/>
+                      <a:round/>
+                      <a:headEnd type="none" w="med" len="med"/>
+                      <a:tailEnd type="none" w="med" len="med"/>
+                    </a:lnL>
+                    <a:lnR w="9525" cap="flat" cmpd="sng" algn="ctr">
+                      <a:solidFill>
+                        <a:srgbClr val="E2E8F0"/>
+                      </a:solidFill>
+                      <a:prstDash val="solid"/>
+                      <a:round/>
+                      <a:headEnd type="none" w="med" len="med"/>
+                      <a:tailEnd type="none" w="med" len="med"/>
+                    </a:lnR>
+                    <a:lnT w="9525" cap="flat" cmpd="sng" algn="ctr">
+                      <a:solidFill>
+                        <a:srgbClr val="E2E8F0"/>
+                      </a:solidFill>
+                      <a:prstDash val="solid"/>
+                      <a:round/>
+                      <a:headEnd type="none" w="med" len="med"/>
+                      <a:tailEnd type="none" w="med" len="med"/>
+                    </a:lnT>
+                    <a:lnB w="9525" cap="flat" cmpd="sng" algn="ctr">
+                      <a:solidFill>
+                        <a:srgbClr val="E2E8F0"/>
+                      </a:solidFill>
+                      <a:prstDash val="solid"/>
+                      <a:round/>
+                      <a:headEnd type="none" w="med" len="med"/>
+                      <a:tailEnd type="none" w="med" len="med"/>
+                    </a:lnB>
+                    <a:solidFill>
+                      <a:srgbClr val="FFFFFF"/>
+                    </a:solidFill>
+                  </a:tcPr>
+                </a:tc>
+                <a:tc>
+                  <a:txBody>
+                    <a:bodyPr/>
+                    <a:lstStyle/>
+                    <a:p>
+                      <a:pPr algn="l" indent="0" marL="0">
+                        <a:buNone/>
+                      </a:pPr>
+                      <a:r>
+                        <a:rPr lang="en-US" sz="1050" b="1" dirty="0">
+                          <a:solidFill>
+                            <a:srgbClr val="1E293B"/>
+                          </a:solidFill>
+                          <a:latin typeface="Calibri" pitchFamily="34" charset="0"/>
+                          <a:ea typeface="Calibri" pitchFamily="34" charset="-122"/>
+                          <a:cs typeface="Calibri" pitchFamily="34" charset="-120"/>
+                        </a:rPr>
+                        <a:t>Job queue + autoscaling workers</a:t>
+                      </a:r>
+                      <a:endParaRPr lang="en-US" sz="1050" dirty="0">
+                        <a:latin typeface="Calibri" charset="0"/>
+                        <a:ea typeface="Calibri" charset="0"/>
+                        <a:cs typeface="Calibri" charset="0"/>
+                      </a:endParaRPr>
+                    </a:p>
+                  </a:txBody>
+                  <a:tcPr marL="76200" marR="50800" marT="25400" marB="25400" anchor="ctr">
+                    <a:lnL w="9525" cap="flat" cmpd="sng" algn="ctr">
+                      <a:solidFill>
+                        <a:srgbClr val="E2E8F0"/>
+                      </a:solidFill>
+                      <a:prstDash val="solid"/>
+                      <a:round/>
+                      <a:headEnd type="none" w="med" len="med"/>
+                      <a:tailEnd type="none" w="med" len="med"/>
+                    </a:lnL>
+                    <a:lnR w="9525" cap="flat" cmpd="sng" algn="ctr">
+                      <a:solidFill>
+                        <a:srgbClr val="E2E8F0"/>
+                      </a:solidFill>
+                      <a:prstDash val="solid"/>
+                      <a:round/>
+                      <a:headEnd type="none" w="med" len="med"/>
+                      <a:tailEnd type="none" w="med" len="med"/>
+                    </a:lnR>
+                    <a:lnT w="9525" cap="flat" cmpd="sng" algn="ctr">
+                      <a:solidFill>
+                        <a:srgbClr val="E2E8F0"/>
+                      </a:solidFill>
+                      <a:prstDash val="solid"/>
+                      <a:round/>
+                      <a:headEnd type="none" w="med" len="med"/>
+                      <a:tailEnd type="none" w="med" len="med"/>
+                    </a:lnT>
+                    <a:lnB w="9525" cap="flat" cmpd="sng" algn="ctr">
+                      <a:solidFill>
+                        <a:srgbClr val="E2E8F0"/>
+                      </a:solidFill>
+                      <a:prstDash val="solid"/>
+                      <a:round/>
+                      <a:headEnd type="none" w="med" len="med"/>
+                      <a:tailEnd type="none" w="med" len="med"/>
+                    </a:lnB>
+                    <a:solidFill>
+                      <a:srgbClr val="FFFFFF"/>
+                    </a:solidFill>
+                  </a:tcPr>
+                </a:tc>
+                <a:tc>
+                  <a:txBody>
+                    <a:bodyPr/>
+                    <a:lstStyle/>
+                    <a:p>
+                      <a:pPr algn="l" indent="0" marL="0">
+                        <a:buNone/>
+                      </a:pPr>
+                      <a:r>
+                        <a:rPr lang="en-US" sz="950" dirty="0">
+                          <a:solidFill>
+                            <a:srgbClr val="64748B"/>
+                          </a:solidFill>
+                          <a:latin typeface="Calibri" pitchFamily="34" charset="0"/>
+                          <a:ea typeface="Calibri" pitchFamily="34" charset="-122"/>
+                          <a:cs typeface="Calibri" pitchFamily="34" charset="-120"/>
+                        </a:rPr>
+                        <a:t>Redis-backed analysis queue; API stays responsive under many concurrent PRs</a:t>
+                      </a:r>
+                      <a:endParaRPr lang="en-US" sz="950" dirty="0">
+                        <a:latin typeface="Calibri" charset="0"/>
+                        <a:ea typeface="Calibri" charset="0"/>
+                        <a:cs typeface="Calibri" charset="0"/>
+                      </a:endParaRPr>
+                    </a:p>
+                  </a:txBody>
+                  <a:tcPr marL="76200" marR="50800" marT="25400" marB="25400" anchor="ctr">
+                    <a:lnL w="9525" cap="flat" cmpd="sng" algn="ctr">
+                      <a:solidFill>
+                        <a:srgbClr val="E2E8F0"/>
+                      </a:solidFill>
+                      <a:prstDash val="solid"/>
+                      <a:round/>
+                      <a:headEnd type="none" w="med" len="med"/>
+                      <a:tailEnd type="none" w="med" len="med"/>
+                    </a:lnL>
+                    <a:lnR w="9525" cap="flat" cmpd="sng" algn="ctr">
+                      <a:solidFill>
+                        <a:srgbClr val="E2E8F0"/>
+                      </a:solidFill>
+                      <a:prstDash val="solid"/>
+                      <a:round/>
+                      <a:headEnd type="none" w="med" len="med"/>
+                      <a:tailEnd type="none" w="med" len="med"/>
+                    </a:lnR>
+                    <a:lnT w="9525" cap="flat" cmpd="sng" algn="ctr">
+                      <a:solidFill>
+                        <a:srgbClr val="E2E8F0"/>
+                      </a:solidFill>
+                      <a:prstDash val="solid"/>
+                      <a:round/>
+                      <a:headEnd type="none" w="med" len="med"/>
+                      <a:tailEnd type="none" w="med" len="med"/>
+                    </a:lnT>
+                    <a:lnB w="9525" cap="flat" cmpd="sng" algn="ctr">
+                      <a:solidFill>
+                        <a:srgbClr val="E2E8F0"/>
+                      </a:solidFill>
+                      <a:prstDash val="solid"/>
+                      <a:round/>
+                      <a:headEnd type="none" w="med" len="med"/>
+                      <a:tailEnd type="none" w="med" len="med"/>
+                    </a:lnB>
+                    <a:solidFill>
+                      <a:srgbClr val="FFFFFF"/>
+                    </a:solidFill>
+                  </a:tcPr>
+                </a:tc>
+                <a:tc>
+                  <a:txBody>
+                    <a:bodyPr/>
+                    <a:lstStyle/>
+                    <a:p>
+                      <a:pPr algn="ctr" indent="0" marL="0">
+                        <a:buNone/>
+                      </a:pPr>
+                      <a:r>
+                        <a:rPr lang="en-US" sz="900" b="1" dirty="0">
+                          <a:solidFill>
+                            <a:srgbClr val="38BDF8"/>
+                          </a:solidFill>
+                          <a:latin typeface="Calibri" pitchFamily="34" charset="0"/>
+                          <a:ea typeface="Calibri" pitchFamily="34" charset="-122"/>
+                          <a:cs typeface="Calibri" pitchFamily="34" charset="-120"/>
+                        </a:rPr>
+                        <a:t>Scale</a:t>
+                      </a:r>
+                      <a:endParaRPr lang="en-US" sz="900" dirty="0">
+                        <a:latin typeface="Calibri" charset="0"/>
+                        <a:ea typeface="Calibri" charset="0"/>
+                        <a:cs typeface="Calibri" charset="0"/>
+                      </a:endParaRPr>
+                    </a:p>
+                  </a:txBody>
+                  <a:tcPr marL="91440" marR="91440" marT="45720" marB="45720" anchor="ctr">
+                    <a:lnL w="9525" cap="flat" cmpd="sng" algn="ctr">
+                      <a:solidFill>
+                        <a:srgbClr val="E2E8F0"/>
+                      </a:solidFill>
+                      <a:prstDash val="solid"/>
+                      <a:round/>
+                      <a:headEnd type="none" w="med" len="med"/>
+                      <a:tailEnd type="none" w="med" len="med"/>
+                    </a:lnL>
+                    <a:lnR w="9525" cap="flat" cmpd="sng" algn="ctr">
+                      <a:solidFill>
+                        <a:srgbClr val="E2E8F0"/>
+                      </a:solidFill>
+                      <a:prstDash val="solid"/>
+                      <a:round/>
+                      <a:headEnd type="none" w="med" len="med"/>
+                      <a:tailEnd type="none" w="med" len="med"/>
+                    </a:lnR>
+                    <a:lnT w="9525" cap="flat" cmpd="sng" algn="ctr">
+                      <a:solidFill>
+                        <a:srgbClr val="E2E8F0"/>
+                      </a:solidFill>
+                      <a:prstDash val="solid"/>
+                      <a:round/>
+                      <a:headEnd type="none" w="med" len="med"/>
+                      <a:tailEnd type="none" w="med" len="med"/>
+                    </a:lnT>
+                    <a:lnB w="9525" cap="flat" cmpd="sng" algn="ctr">
+                      <a:solidFill>
+                        <a:srgbClr val="E2E8F0"/>
+                      </a:solidFill>
+                      <a:prstDash val="solid"/>
+                      <a:round/>
+                      <a:headEnd type="none" w="med" len="med"/>
+                      <a:tailEnd type="none" w="med" len="med"/>
+                    </a:lnB>
+                    <a:solidFill>
+                      <a:srgbClr val="FFFFFF"/>
+                    </a:solidFill>
+                  </a:tcPr>
+                </a:tc>
+              </a:tr>
+              <a:tr h="370332">
+                <a:tc>
+                  <a:txBody>
+                    <a:bodyPr/>
+                    <a:lstStyle/>
+                    <a:p>
+                      <a:pPr algn="ctr" indent="0" marL="0">
+                        <a:buNone/>
+                      </a:pPr>
+                      <a:r>
+                        <a:rPr lang="en-US" sz="1050" b="1" dirty="0">
+                          <a:solidFill>
+                            <a:srgbClr val="94A3B8"/>
+                          </a:solidFill>
+                          <a:latin typeface="Calibri" pitchFamily="34" charset="0"/>
+                          <a:ea typeface="Calibri" pitchFamily="34" charset="-122"/>
+                          <a:cs typeface="Calibri" pitchFamily="34" charset="-120"/>
+                        </a:rPr>
+                        <a:t>4</a:t>
+                      </a:r>
+                      <a:endParaRPr lang="en-US" sz="1050" dirty="0">
+                        <a:latin typeface="Calibri" charset="0"/>
+                        <a:ea typeface="Calibri" charset="0"/>
+                        <a:cs typeface="Calibri" charset="0"/>
+                      </a:endParaRPr>
+                    </a:p>
+                  </a:txBody>
+                  <a:tcPr marL="91440" marR="91440" marT="45720" marB="45720" anchor="ctr">
+                    <a:lnL w="9525" cap="flat" cmpd="sng" algn="ctr">
+                      <a:solidFill>
+                        <a:srgbClr val="E2E8F0"/>
+                      </a:solidFill>
+                      <a:prstDash val="solid"/>
+                      <a:round/>
+                      <a:headEnd type="none" w="med" len="med"/>
+                      <a:tailEnd type="none" w="med" len="med"/>
+                    </a:lnL>
+                    <a:lnR w="9525" cap="flat" cmpd="sng" algn="ctr">
+                      <a:solidFill>
+                        <a:srgbClr val="E2E8F0"/>
+                      </a:solidFill>
+                      <a:prstDash val="solid"/>
+                      <a:round/>
+                      <a:headEnd type="none" w="med" len="med"/>
+                      <a:tailEnd type="none" w="med" len="med"/>
+                    </a:lnR>
+                    <a:lnT w="9525" cap="flat" cmpd="sng" algn="ctr">
+                      <a:solidFill>
+                        <a:srgbClr val="E2E8F0"/>
+                      </a:solidFill>
+                      <a:prstDash val="solid"/>
+                      <a:round/>
+                      <a:headEnd type="none" w="med" len="med"/>
+                      <a:tailEnd type="none" w="med" len="med"/>
+                    </a:lnT>
+                    <a:lnB w="9525" cap="flat" cmpd="sng" algn="ctr">
+                      <a:solidFill>
+                        <a:srgbClr val="E2E8F0"/>
+                      </a:solidFill>
+                      <a:prstDash val="solid"/>
+                      <a:round/>
+                      <a:headEnd type="none" w="med" len="med"/>
+                      <a:tailEnd type="none" w="med" len="med"/>
+                    </a:lnB>
+                    <a:solidFill>
+                      <a:srgbClr val="EEF2F8"/>
+                    </a:solidFill>
+                  </a:tcPr>
+                </a:tc>
+                <a:tc>
+                  <a:txBody>
+                    <a:bodyPr/>
+                    <a:lstStyle/>
+                    <a:p>
+                      <a:pPr algn="l" indent="0" marL="0">
+                        <a:buNone/>
+                      </a:pPr>
+                      <a:r>
+                        <a:rPr lang="en-US" sz="1050" b="1" dirty="0">
+                          <a:solidFill>
+                            <a:srgbClr val="1E293B"/>
+                          </a:solidFill>
+                          <a:latin typeface="Calibri" pitchFamily="34" charset="0"/>
+                          <a:ea typeface="Calibri" pitchFamily="34" charset="-122"/>
+                          <a:cs typeface="Calibri" pitchFamily="34" charset="-120"/>
+                        </a:rPr>
+                        <a:t>PostgreSQL report store</a:t>
+                      </a:r>
+                      <a:endParaRPr lang="en-US" sz="1050" dirty="0">
+                        <a:latin typeface="Calibri" charset="0"/>
+                        <a:ea typeface="Calibri" charset="0"/>
+                        <a:cs typeface="Calibri" charset="0"/>
+                      </a:endParaRPr>
+                    </a:p>
+                  </a:txBody>
+                  <a:tcPr marL="76200" marR="50800" marT="25400" marB="25400" anchor="ctr">
+                    <a:lnL w="9525" cap="flat" cmpd="sng" algn="ctr">
+                      <a:solidFill>
+                        <a:srgbClr val="E2E8F0"/>
+                      </a:solidFill>
+                      <a:prstDash val="solid"/>
+                      <a:round/>
+                      <a:headEnd type="none" w="med" len="med"/>
+                      <a:tailEnd type="none" w="med" len="med"/>
+                    </a:lnL>
+                    <a:lnR w="9525" cap="flat" cmpd="sng" algn="ctr">
+                      <a:solidFill>
+                        <a:srgbClr val="E2E8F0"/>
+                      </a:solidFill>
+                      <a:prstDash val="solid"/>
+                      <a:round/>
+                      <a:headEnd type="none" w="med" len="med"/>
+                      <a:tailEnd type="none" w="med" len="med"/>
+                    </a:lnR>
+                    <a:lnT w="9525" cap="flat" cmpd="sng" algn="ctr">
+                      <a:solidFill>
+                        <a:srgbClr val="E2E8F0"/>
+                      </a:solidFill>
+                      <a:prstDash val="solid"/>
+                      <a:round/>
+                      <a:headEnd type="none" w="med" len="med"/>
+                      <a:tailEnd type="none" w="med" len="med"/>
+                    </a:lnT>
+                    <a:lnB w="9525" cap="flat" cmpd="sng" algn="ctr">
+                      <a:solidFill>
+                        <a:srgbClr val="E2E8F0"/>
+                      </a:solidFill>
+                      <a:prstDash val="solid"/>
+                      <a:round/>
+                      <a:headEnd type="none" w="med" len="med"/>
+                      <a:tailEnd type="none" w="med" len="med"/>
+                    </a:lnB>
+                    <a:solidFill>
+                      <a:srgbClr val="EEF2F8"/>
+                    </a:solidFill>
+                  </a:tcPr>
+                </a:tc>
+                <a:tc>
+                  <a:txBody>
+                    <a:bodyPr/>
+                    <a:lstStyle/>
+                    <a:p>
+                      <a:pPr algn="l" indent="0" marL="0">
+                        <a:buNone/>
+                      </a:pPr>
+                      <a:r>
+                        <a:rPr lang="en-US" sz="950" dirty="0">
+                          <a:solidFill>
+                            <a:srgbClr val="64748B"/>
+                          </a:solidFill>
+                          <a:latin typeface="Calibri" pitchFamily="34" charset="0"/>
+                          <a:ea typeface="Calibri" pitchFamily="34" charset="-122"/>
+                          <a:cs typeface="Calibri" pitchFamily="34" charset="-120"/>
+                        </a:rPr>
+                        <a:t>Replace SQLite for multi-instance deployments, retention policies</a:t>
+                      </a:r>
+                      <a:endParaRPr lang="en-US" sz="950" dirty="0">
+                        <a:latin typeface="Calibri" charset="0"/>
+                        <a:ea typeface="Calibri" charset="0"/>
+                        <a:cs typeface="Calibri" charset="0"/>
+                      </a:endParaRPr>
+                    </a:p>
+                  </a:txBody>
+                  <a:tcPr marL="76200" marR="50800" marT="25400" marB="25400" anchor="ctr">
+                    <a:lnL w="9525" cap="flat" cmpd="sng" algn="ctr">
+                      <a:solidFill>
+                        <a:srgbClr val="E2E8F0"/>
+                      </a:solidFill>
+                      <a:prstDash val="solid"/>
+                      <a:round/>
+                      <a:headEnd type="none" w="med" len="med"/>
+                      <a:tailEnd type="none" w="med" len="med"/>
+                    </a:lnL>
+                    <a:lnR w="9525" cap="flat" cmpd="sng" algn="ctr">
+                      <a:solidFill>
+                        <a:srgbClr val="E2E8F0"/>
+                      </a:solidFill>
+                      <a:prstDash val="solid"/>
+                      <a:round/>
+                      <a:headEnd type="none" w="med" len="med"/>
+                      <a:tailEnd type="none" w="med" len="med"/>
+                    </a:lnR>
+                    <a:lnT w="9525" cap="flat" cmpd="sng" algn="ctr">
+                      <a:solidFill>
+                        <a:srgbClr val="E2E8F0"/>
+                      </a:solidFill>
+                      <a:prstDash val="solid"/>
+                      <a:round/>
+                      <a:headEnd type="none" w="med" len="med"/>
+                      <a:tailEnd type="none" w="med" len="med"/>
+                    </a:lnT>
+                    <a:lnB w="9525" cap="flat" cmpd="sng" algn="ctr">
+                      <a:solidFill>
+                        <a:srgbClr val="E2E8F0"/>
+                      </a:solidFill>
+                      <a:prstDash val="solid"/>
+                      <a:round/>
+                      <a:headEnd type="none" w="med" len="med"/>
+                      <a:tailEnd type="none" w="med" len="med"/>
+                    </a:lnB>
+                    <a:solidFill>
+                      <a:srgbClr val="EEF2F8"/>
+                    </a:solidFill>
+                  </a:tcPr>
+                </a:tc>
+                <a:tc>
+                  <a:txBody>
+                    <a:bodyPr/>
+                    <a:lstStyle/>
+                    <a:p>
+                      <a:pPr algn="ctr" indent="0" marL="0">
+                        <a:buNone/>
+                      </a:pPr>
+                      <a:r>
+                        <a:rPr lang="en-US" sz="900" b="1" dirty="0">
+                          <a:solidFill>
+                            <a:srgbClr val="38BDF8"/>
+                          </a:solidFill>
+                          <a:latin typeface="Calibri" pitchFamily="34" charset="0"/>
+                          <a:ea typeface="Calibri" pitchFamily="34" charset="-122"/>
+                          <a:cs typeface="Calibri" pitchFamily="34" charset="-120"/>
+                        </a:rPr>
+                        <a:t>Scale</a:t>
+                      </a:r>
+                      <a:endParaRPr lang="en-US" sz="900" dirty="0">
+                        <a:latin typeface="Calibri" charset="0"/>
+                        <a:ea typeface="Calibri" charset="0"/>
+                        <a:cs typeface="Calibri" charset="0"/>
+                      </a:endParaRPr>
+                    </a:p>
+                  </a:txBody>
+                  <a:tcPr marL="91440" marR="91440" marT="45720" marB="45720" anchor="ctr">
+                    <a:lnL w="9525" cap="flat" cmpd="sng" algn="ctr">
+                      <a:solidFill>
+                        <a:srgbClr val="E2E8F0"/>
+                      </a:solidFill>
+                      <a:prstDash val="solid"/>
+                      <a:round/>
+                      <a:headEnd type="none" w="med" len="med"/>
+                      <a:tailEnd type="none" w="med" len="med"/>
+                    </a:lnL>
+                    <a:lnR w="9525" cap="flat" cmpd="sng" algn="ctr">
+                      <a:solidFill>
+                        <a:srgbClr val="E2E8F0"/>
+                      </a:solidFill>
+                      <a:prstDash val="solid"/>
+                      <a:round/>
+                      <a:headEnd type="none" w="med" len="med"/>
+                      <a:tailEnd type="none" w="med" len="med"/>
+                    </a:lnR>
+                    <a:lnT w="9525" cap="flat" cmpd="sng" algn="ctr">
+                      <a:solidFill>
+                        <a:srgbClr val="E2E8F0"/>
+                      </a:solidFill>
+                      <a:prstDash val="solid"/>
+                      <a:round/>
+                      <a:headEnd type="none" w="med" len="med"/>
+                      <a:tailEnd type="none" w="med" len="med"/>
+                    </a:lnT>
+                    <a:lnB w="9525" cap="flat" cmpd="sng" algn="ctr">
+                      <a:solidFill>
+                        <a:srgbClr val="E2E8F0"/>
+                      </a:solidFill>
+                      <a:prstDash val="solid"/>
+                      <a:round/>
+                      <a:headEnd type="none" w="med" len="med"/>
+                      <a:tailEnd type="none" w="med" len="med"/>
+                    </a:lnB>
+                    <a:solidFill>
+                      <a:srgbClr val="EEF2F8"/>
+                    </a:solidFill>
+                  </a:tcPr>
+                </a:tc>
+              </a:tr>
+              <a:tr h="370332">
+                <a:tc>
+                  <a:txBody>
+                    <a:bodyPr/>
+                    <a:lstStyle/>
+                    <a:p>
+                      <a:pPr algn="ctr" indent="0" marL="0">
+                        <a:buNone/>
+                      </a:pPr>
+                      <a:r>
+                        <a:rPr lang="en-US" sz="1050" b="1" dirty="0">
+                          <a:solidFill>
+                            <a:srgbClr val="94A3B8"/>
+                          </a:solidFill>
+                          <a:latin typeface="Calibri" pitchFamily="34" charset="0"/>
+                          <a:ea typeface="Calibri" pitchFamily="34" charset="-122"/>
+                          <a:cs typeface="Calibri" pitchFamily="34" charset="-120"/>
+                        </a:rPr>
+                        <a:t>5</a:t>
+                      </a:r>
+                      <a:endParaRPr lang="en-US" sz="1050" dirty="0">
+                        <a:latin typeface="Calibri" charset="0"/>
+                        <a:ea typeface="Calibri" charset="0"/>
+                        <a:cs typeface="Calibri" charset="0"/>
+                      </a:endParaRPr>
+                    </a:p>
+                  </a:txBody>
+                  <a:tcPr marL="91440" marR="91440" marT="45720" marB="45720" anchor="ctr">
+                    <a:lnL w="9525" cap="flat" cmpd="sng" algn="ctr">
+                      <a:solidFill>
+                        <a:srgbClr val="E2E8F0"/>
+                      </a:solidFill>
+                      <a:prstDash val="solid"/>
+                      <a:round/>
+                      <a:headEnd type="none" w="med" len="med"/>
+                      <a:tailEnd type="none" w="med" len="med"/>
+                    </a:lnL>
+                    <a:lnR w="9525" cap="flat" cmpd="sng" algn="ctr">
+                      <a:solidFill>
+                        <a:srgbClr val="E2E8F0"/>
+                      </a:solidFill>
+                      <a:prstDash val="solid"/>
+                      <a:round/>
+                      <a:headEnd type="none" w="med" len="med"/>
+                      <a:tailEnd type="none" w="med" len="med"/>
+                    </a:lnR>
+                    <a:lnT w="9525" cap="flat" cmpd="sng" algn="ctr">
+                      <a:solidFill>
+                        <a:srgbClr val="E2E8F0"/>
+                      </a:solidFill>
+                      <a:prstDash val="solid"/>
+                      <a:round/>
+                      <a:headEnd type="none" w="med" len="med"/>
+                      <a:tailEnd type="none" w="med" len="med"/>
+                    </a:lnT>
+                    <a:lnB w="9525" cap="flat" cmpd="sng" algn="ctr">
+                      <a:solidFill>
+                        <a:srgbClr val="E2E8F0"/>
+                      </a:solidFill>
+                      <a:prstDash val="solid"/>
+                      <a:round/>
+                      <a:headEnd type="none" w="med" len="med"/>
+                      <a:tailEnd type="none" w="med" len="med"/>
+                    </a:lnB>
+                    <a:solidFill>
+                      <a:srgbClr val="FFFFFF"/>
+                    </a:solidFill>
+                  </a:tcPr>
+                </a:tc>
+                <a:tc>
+                  <a:txBody>
+                    <a:bodyPr/>
+                    <a:lstStyle/>
+                    <a:p>
+                      <a:pPr algn="l" indent="0" marL="0">
+                        <a:buNone/>
+                      </a:pPr>
+                      <a:r>
+                        <a:rPr lang="en-US" sz="1050" b="1" dirty="0">
+                          <a:solidFill>
+                            <a:srgbClr val="1E293B"/>
+                          </a:solidFill>
+                          <a:latin typeface="Calibri" pitchFamily="34" charset="0"/>
+                          <a:ea typeface="Calibri" pitchFamily="34" charset="-122"/>
+                          <a:cs typeface="Calibri" pitchFamily="34" charset="-120"/>
+                        </a:rPr>
+                        <a:t>Cluster-wide rate &amp; LLM limits</a:t>
+                      </a:r>
+                      <a:endParaRPr lang="en-US" sz="1050" dirty="0">
+                        <a:latin typeface="Calibri" charset="0"/>
+                        <a:ea typeface="Calibri" charset="0"/>
+                        <a:cs typeface="Calibri" charset="0"/>
+                      </a:endParaRPr>
+                    </a:p>
+                  </a:txBody>
+                  <a:tcPr marL="76200" marR="50800" marT="25400" marB="25400" anchor="ctr">
+                    <a:lnL w="9525" cap="flat" cmpd="sng" algn="ctr">
+                      <a:solidFill>
+                        <a:srgbClr val="E2E8F0"/>
+                      </a:solidFill>
+                      <a:prstDash val="solid"/>
+                      <a:round/>
+                      <a:headEnd type="none" w="med" len="med"/>
+                      <a:tailEnd type="none" w="med" len="med"/>
+                    </a:lnL>
+                    <a:lnR w="9525" cap="flat" cmpd="sng" algn="ctr">
+                      <a:solidFill>
+                        <a:srgbClr val="E2E8F0"/>
+                      </a:solidFill>
+                      <a:prstDash val="solid"/>
+                      <a:round/>
+                      <a:headEnd type="none" w="med" len="med"/>
+                      <a:tailEnd type="none" w="med" len="med"/>
+                    </a:lnR>
+                    <a:lnT w="9525" cap="flat" cmpd="sng" algn="ctr">
+                      <a:solidFill>
+                        <a:srgbClr val="E2E8F0"/>
+                      </a:solidFill>
+                      <a:prstDash val="solid"/>
+                      <a:round/>
+                      <a:headEnd type="none" w="med" len="med"/>
+                      <a:tailEnd type="none" w="med" len="med"/>
+                    </a:lnT>
+                    <a:lnB w="9525" cap="flat" cmpd="sng" algn="ctr">
+                      <a:solidFill>
+                        <a:srgbClr val="E2E8F0"/>
+                      </a:solidFill>
+                      <a:prstDash val="solid"/>
+                      <a:round/>
+                      <a:headEnd type="none" w="med" len="med"/>
+                      <a:tailEnd type="none" w="med" len="med"/>
+                    </a:lnB>
+                    <a:solidFill>
+                      <a:srgbClr val="FFFFFF"/>
+                    </a:solidFill>
+                  </a:tcPr>
+                </a:tc>
+                <a:tc>
+                  <a:txBody>
+                    <a:bodyPr/>
+                    <a:lstStyle/>
+                    <a:p>
+                      <a:pPr algn="l" indent="0" marL="0">
+                        <a:buNone/>
+                      </a:pPr>
+                      <a:r>
+                        <a:rPr lang="en-US" sz="950" dirty="0">
+                          <a:solidFill>
+                            <a:srgbClr val="64748B"/>
+                          </a:solidFill>
+                          <a:latin typeface="Calibri" pitchFamily="34" charset="0"/>
+                          <a:ea typeface="Calibri" pitchFamily="34" charset="-122"/>
+                          <a:cs typeface="Calibri" pitchFamily="34" charset="-120"/>
+                        </a:rPr>
+                        <a:t>Shared Redis counters so limits hold across replicas</a:t>
+                      </a:r>
+                      <a:endParaRPr lang="en-US" sz="950" dirty="0">
+                        <a:latin typeface="Calibri" charset="0"/>
+                        <a:ea typeface="Calibri" charset="0"/>
+                        <a:cs typeface="Calibri" charset="0"/>
+                      </a:endParaRPr>
+                    </a:p>
+                  </a:txBody>
+                  <a:tcPr marL="76200" marR="50800" marT="25400" marB="25400" anchor="ctr">
+                    <a:lnL w="9525" cap="flat" cmpd="sng" algn="ctr">
+                      <a:solidFill>
+                        <a:srgbClr val="E2E8F0"/>
+                      </a:solidFill>
+                      <a:prstDash val="solid"/>
+                      <a:round/>
+                      <a:headEnd type="none" w="med" len="med"/>
+                      <a:tailEnd type="none" w="med" len="med"/>
+                    </a:lnL>
+                    <a:lnR w="9525" cap="flat" cmpd="sng" algn="ctr">
+                      <a:solidFill>
+                        <a:srgbClr val="E2E8F0"/>
+                      </a:solidFill>
+                      <a:prstDash val="solid"/>
+                      <a:round/>
+                      <a:headEnd type="none" w="med" len="med"/>
+                      <a:tailEnd type="none" w="med" len="med"/>
+                    </a:lnR>
+                    <a:lnT w="9525" cap="flat" cmpd="sng" algn="ctr">
+                      <a:solidFill>
+                        <a:srgbClr val="E2E8F0"/>
+                      </a:solidFill>
+                      <a:prstDash val="solid"/>
+                      <a:round/>
+                      <a:headEnd type="none" w="med" len="med"/>
+                      <a:tailEnd type="none" w="med" len="med"/>
+                    </a:lnT>
+                    <a:lnB w="9525" cap="flat" cmpd="sng" algn="ctr">
+                      <a:solidFill>
+                        <a:srgbClr val="E2E8F0"/>
+                      </a:solidFill>
+                      <a:prstDash val="solid"/>
+                      <a:round/>
+                      <a:headEnd type="none" w="med" len="med"/>
+                      <a:tailEnd type="none" w="med" len="med"/>
+                    </a:lnB>
+                    <a:solidFill>
+                      <a:srgbClr val="FFFFFF"/>
+                    </a:solidFill>
+                  </a:tcPr>
+                </a:tc>
+                <a:tc>
+                  <a:txBody>
+                    <a:bodyPr/>
+                    <a:lstStyle/>
+                    <a:p>
+                      <a:pPr algn="ctr" indent="0" marL="0">
+                        <a:buNone/>
+                      </a:pPr>
+                      <a:r>
+                        <a:rPr lang="en-US" sz="900" b="1" dirty="0">
+                          <a:solidFill>
+                            <a:srgbClr val="38BDF8"/>
+                          </a:solidFill>
+                          <a:latin typeface="Calibri" pitchFamily="34" charset="0"/>
+                          <a:ea typeface="Calibri" pitchFamily="34" charset="-122"/>
+                          <a:cs typeface="Calibri" pitchFamily="34" charset="-120"/>
+                        </a:rPr>
+                        <a:t>Scale</a:t>
+                      </a:r>
+                      <a:endParaRPr lang="en-US" sz="900" dirty="0">
+                        <a:latin typeface="Calibri" charset="0"/>
+                        <a:ea typeface="Calibri" charset="0"/>
+                        <a:cs typeface="Calibri" charset="0"/>
+                      </a:endParaRPr>
+                    </a:p>
+                  </a:txBody>
+                  <a:tcPr marL="91440" marR="91440" marT="45720" marB="45720" anchor="ctr">
+                    <a:lnL w="9525" cap="flat" cmpd="sng" algn="ctr">
+                      <a:solidFill>
+                        <a:srgbClr val="E2E8F0"/>
+                      </a:solidFill>
+                      <a:prstDash val="solid"/>
+                      <a:round/>
+                      <a:headEnd type="none" w="med" len="med"/>
+                      <a:tailEnd type="none" w="med" len="med"/>
+                    </a:lnL>
+                    <a:lnR w="9525" cap="flat" cmpd="sng" algn="ctr">
+                      <a:solidFill>
+                        <a:srgbClr val="E2E8F0"/>
+                      </a:solidFill>
+                      <a:prstDash val="solid"/>
+                      <a:round/>
+                      <a:headEnd type="none" w="med" len="med"/>
+                      <a:tailEnd type="none" w="med" len="med"/>
+                    </a:lnR>
+                    <a:lnT w="9525" cap="flat" cmpd="sng" algn="ctr">
+                      <a:solidFill>
+                        <a:srgbClr val="E2E8F0"/>
+                      </a:solidFill>
+                      <a:prstDash val="solid"/>
+                      <a:round/>
+                      <a:headEnd type="none" w="med" len="med"/>
+                      <a:tailEnd type="none" w="med" len="med"/>
+                    </a:lnT>
+                    <a:lnB w="9525" cap="flat" cmpd="sng" algn="ctr">
+                      <a:solidFill>
+                        <a:srgbClr val="E2E8F0"/>
+                      </a:solidFill>
+                      <a:prstDash val="solid"/>
+                      <a:round/>
+                      <a:headEnd type="none" w="med" len="med"/>
+                      <a:tailEnd type="none" w="med" len="med"/>
+                    </a:lnB>
+                    <a:solidFill>
+                      <a:srgbClr val="FFFFFF"/>
+                    </a:solidFill>
+                  </a:tcPr>
+                </a:tc>
+              </a:tr>
+              <a:tr h="370332">
+                <a:tc>
+                  <a:txBody>
+                    <a:bodyPr/>
+                    <a:lstStyle/>
+                    <a:p>
+                      <a:pPr algn="ctr" indent="0" marL="0">
+                        <a:buNone/>
+                      </a:pPr>
+                      <a:r>
+                        <a:rPr lang="en-US" sz="1050" b="1" dirty="0">
+                          <a:solidFill>
+                            <a:srgbClr val="94A3B8"/>
+                          </a:solidFill>
+                          <a:latin typeface="Calibri" pitchFamily="34" charset="0"/>
+                          <a:ea typeface="Calibri" pitchFamily="34" charset="-122"/>
+                          <a:cs typeface="Calibri" pitchFamily="34" charset="-120"/>
+                        </a:rPr>
+                        <a:t>6</a:t>
+                      </a:r>
+                      <a:endParaRPr lang="en-US" sz="1050" dirty="0">
+                        <a:latin typeface="Calibri" charset="0"/>
+                        <a:ea typeface="Calibri" charset="0"/>
+                        <a:cs typeface="Calibri" charset="0"/>
+                      </a:endParaRPr>
+                    </a:p>
+                  </a:txBody>
+                  <a:tcPr marL="91440" marR="91440" marT="45720" marB="45720" anchor="ctr">
+                    <a:lnL w="9525" cap="flat" cmpd="sng" algn="ctr">
+                      <a:solidFill>
+                        <a:srgbClr val="E2E8F0"/>
+                      </a:solidFill>
+                      <a:prstDash val="solid"/>
+                      <a:round/>
+                      <a:headEnd type="none" w="med" len="med"/>
+                      <a:tailEnd type="none" w="med" len="med"/>
+                    </a:lnL>
+                    <a:lnR w="9525" cap="flat" cmpd="sng" algn="ctr">
+                      <a:solidFill>
+                        <a:srgbClr val="E2E8F0"/>
+                      </a:solidFill>
+                      <a:prstDash val="solid"/>
+                      <a:round/>
+                      <a:headEnd type="none" w="med" len="med"/>
+                      <a:tailEnd type="none" w="med" len="med"/>
+                    </a:lnR>
+                    <a:lnT w="9525" cap="flat" cmpd="sng" algn="ctr">
+                      <a:solidFill>
+                        <a:srgbClr val="E2E8F0"/>
+                      </a:solidFill>
+                      <a:prstDash val="solid"/>
+                      <a:round/>
+                      <a:headEnd type="none" w="med" len="med"/>
+                      <a:tailEnd type="none" w="med" len="med"/>
+                    </a:lnT>
+                    <a:lnB w="9525" cap="flat" cmpd="sng" algn="ctr">
+                      <a:solidFill>
+                        <a:srgbClr val="E2E8F0"/>
+                      </a:solidFill>
+                      <a:prstDash val="solid"/>
+                      <a:round/>
+                      <a:headEnd type="none" w="med" len="med"/>
+                      <a:tailEnd type="none" w="med" len="med"/>
+                    </a:lnB>
+                    <a:solidFill>
+                      <a:srgbClr val="EEF2F8"/>
+                    </a:solidFill>
+                  </a:tcPr>
+                </a:tc>
+                <a:tc>
+                  <a:txBody>
+                    <a:bodyPr/>
+                    <a:lstStyle/>
+                    <a:p>
+                      <a:pPr algn="l" indent="0" marL="0">
+                        <a:buNone/>
+                      </a:pPr>
+                      <a:r>
+                        <a:rPr lang="en-US" sz="1050" b="1" dirty="0">
+                          <a:solidFill>
+                            <a:srgbClr val="1E293B"/>
+                          </a:solidFill>
+                          <a:latin typeface="Calibri" pitchFamily="34" charset="0"/>
+                          <a:ea typeface="Calibri" pitchFamily="34" charset="-122"/>
+                          <a:cs typeface="Calibri" pitchFamily="34" charset="-120"/>
+                        </a:rPr>
+                        <a:t>SSO / OIDC with team RBAC</a:t>
+                      </a:r>
+                      <a:endParaRPr lang="en-US" sz="1050" dirty="0">
+                        <a:latin typeface="Calibri" charset="0"/>
+                        <a:ea typeface="Calibri" charset="0"/>
+                        <a:cs typeface="Calibri" charset="0"/>
+                      </a:endParaRPr>
+                    </a:p>
+                  </a:txBody>
+                  <a:tcPr marL="76200" marR="50800" marT="25400" marB="25400" anchor="ctr">
+                    <a:lnL w="9525" cap="flat" cmpd="sng" algn="ctr">
+                      <a:solidFill>
+                        <a:srgbClr val="E2E8F0"/>
+                      </a:solidFill>
+                      <a:prstDash val="solid"/>
+                      <a:round/>
+                      <a:headEnd type="none" w="med" len="med"/>
+                      <a:tailEnd type="none" w="med" len="med"/>
+                    </a:lnL>
+                    <a:lnR w="9525" cap="flat" cmpd="sng" algn="ctr">
+                      <a:solidFill>
+                        <a:srgbClr val="E2E8F0"/>
+                      </a:solidFill>
+                      <a:prstDash val="solid"/>
+                      <a:round/>
+                      <a:headEnd type="none" w="med" len="med"/>
+                      <a:tailEnd type="none" w="med" len="med"/>
+                    </a:lnR>
+                    <a:lnT w="9525" cap="flat" cmpd="sng" algn="ctr">
+                      <a:solidFill>
+                        <a:srgbClr val="E2E8F0"/>
+                      </a:solidFill>
+                      <a:prstDash val="solid"/>
+                      <a:round/>
+                      <a:headEnd type="none" w="med" len="med"/>
+                      <a:tailEnd type="none" w="med" len="med"/>
+                    </a:lnT>
+                    <a:lnB w="9525" cap="flat" cmpd="sng" algn="ctr">
+                      <a:solidFill>
+                        <a:srgbClr val="E2E8F0"/>
+                      </a:solidFill>
+                      <a:prstDash val="solid"/>
+                      <a:round/>
+                      <a:headEnd type="none" w="med" len="med"/>
+                      <a:tailEnd type="none" w="med" len="med"/>
+                    </a:lnB>
+                    <a:solidFill>
+                      <a:srgbClr val="EEF2F8"/>
+                    </a:solidFill>
+                  </a:tcPr>
+                </a:tc>
+                <a:tc>
+                  <a:txBody>
+                    <a:bodyPr/>
+                    <a:lstStyle/>
+                    <a:p>
+                      <a:pPr algn="l" indent="0" marL="0">
+                        <a:buNone/>
+                      </a:pPr>
+                      <a:r>
+                        <a:rPr lang="en-US" sz="950" dirty="0">
+                          <a:solidFill>
+                            <a:srgbClr val="64748B"/>
+                          </a:solidFill>
+                          <a:latin typeface="Calibri" pitchFamily="34" charset="0"/>
+                          <a:ea typeface="Calibri" pitchFamily="34" charset="-122"/>
+                          <a:cs typeface="Calibri" pitchFamily="34" charset="-120"/>
+                        </a:rPr>
+                        <a:t>IdP login, team-scoped data, per-team gate thresholds</a:t>
+                      </a:r>
+                      <a:endParaRPr lang="en-US" sz="950" dirty="0">
+                        <a:latin typeface="Calibri" charset="0"/>
+                        <a:ea typeface="Calibri" charset="0"/>
+                        <a:cs typeface="Calibri" charset="0"/>
+                      </a:endParaRPr>
+                    </a:p>
+                  </a:txBody>
+                  <a:tcPr marL="76200" marR="50800" marT="25400" marB="25400" anchor="ctr">
+                    <a:lnL w="9525" cap="flat" cmpd="sng" algn="ctr">
+                      <a:solidFill>
+                        <a:srgbClr val="E2E8F0"/>
+                      </a:solidFill>
+                      <a:prstDash val="solid"/>
+                      <a:round/>
+                      <a:headEnd type="none" w="med" len="med"/>
+                      <a:tailEnd type="none" w="med" len="med"/>
+                    </a:lnL>
+                    <a:lnR w="9525" cap="flat" cmpd="sng" algn="ctr">
+                      <a:solidFill>
+                        <a:srgbClr val="E2E8F0"/>
+                      </a:solidFill>
+                      <a:prstDash val="solid"/>
+                      <a:round/>
+                      <a:headEnd type="none" w="med" len="med"/>
+                      <a:tailEnd type="none" w="med" len="med"/>
+                    </a:lnR>
+                    <a:lnT w="9525" cap="flat" cmpd="sng" algn="ctr">
+                      <a:solidFill>
+                        <a:srgbClr val="E2E8F0"/>
+                      </a:solidFill>
+                      <a:prstDash val="solid"/>
+                      <a:round/>
+                      <a:headEnd type="none" w="med" len="med"/>
+                      <a:tailEnd type="none" w="med" len="med"/>
+                    </a:lnT>
+                    <a:lnB w="9525" cap="flat" cmpd="sng" algn="ctr">
+                      <a:solidFill>
+                        <a:srgbClr val="E2E8F0"/>
+                      </a:solidFill>
+                      <a:prstDash val="solid"/>
+                      <a:round/>
+                      <a:headEnd type="none" w="med" len="med"/>
+                      <a:tailEnd type="none" w="med" len="med"/>
+                    </a:lnB>
+                    <a:solidFill>
+                      <a:srgbClr val="EEF2F8"/>
+                    </a:solidFill>
+                  </a:tcPr>
+                </a:tc>
+                <a:tc>
+                  <a:txBody>
+                    <a:bodyPr/>
+                    <a:lstStyle/>
+                    <a:p>
+                      <a:pPr algn="ctr" indent="0" marL="0">
+                        <a:buNone/>
+                      </a:pPr>
+                      <a:r>
+                        <a:rPr lang="en-US" sz="900" b="1" dirty="0">
+                          <a:solidFill>
+                            <a:srgbClr val="DC2626"/>
+                          </a:solidFill>
+                          <a:latin typeface="Calibri" pitchFamily="34" charset="0"/>
+                          <a:ea typeface="Calibri" pitchFamily="34" charset="-122"/>
+                          <a:cs typeface="Calibri" pitchFamily="34" charset="-120"/>
+                        </a:rPr>
+                        <a:t>Access</a:t>
+                      </a:r>
+                      <a:endParaRPr lang="en-US" sz="900" dirty="0">
+                        <a:latin typeface="Calibri" charset="0"/>
+                        <a:ea typeface="Calibri" charset="0"/>
+                        <a:cs typeface="Calibri" charset="0"/>
+                      </a:endParaRPr>
+                    </a:p>
+                  </a:txBody>
+                  <a:tcPr marL="91440" marR="91440" marT="45720" marB="45720" anchor="ctr">
+                    <a:lnL w="9525" cap="flat" cmpd="sng" algn="ctr">
+                      <a:solidFill>
+                        <a:srgbClr val="E2E8F0"/>
+                      </a:solidFill>
+                      <a:prstDash val="solid"/>
+                      <a:round/>
+                      <a:headEnd type="none" w="med" len="med"/>
+                      <a:tailEnd type="none" w="med" len="med"/>
+                    </a:lnL>
+                    <a:lnR w="9525" cap="flat" cmpd="sng" algn="ctr">
+                      <a:solidFill>
+                        <a:srgbClr val="E2E8F0"/>
+                      </a:solidFill>
+                      <a:prstDash val="solid"/>
+                      <a:round/>
+                      <a:headEnd type="none" w="med" len="med"/>
+                      <a:tailEnd type="none" w="med" len="med"/>
+                    </a:lnR>
+                    <a:lnT w="9525" cap="flat" cmpd="sng" algn="ctr">
+                      <a:solidFill>
+                        <a:srgbClr val="E2E8F0"/>
+                      </a:solidFill>
+                      <a:prstDash val="solid"/>
+                      <a:round/>
+                      <a:headEnd type="none" w="med" len="med"/>
+                      <a:tailEnd type="none" w="med" len="med"/>
+                    </a:lnT>
+                    <a:lnB w="9525" cap="flat" cmpd="sng" algn="ctr">
+                      <a:solidFill>
+                        <a:srgbClr val="E2E8F0"/>
+                      </a:solidFill>
+                      <a:prstDash val="solid"/>
+                      <a:round/>
+                      <a:headEnd type="none" w="med" len="med"/>
+                      <a:tailEnd type="none" w="med" len="med"/>
+                    </a:lnB>
+                    <a:solidFill>
+                      <a:srgbClr val="EEF2F8"/>
+                    </a:solidFill>
+                  </a:tcPr>
+                </a:tc>
+              </a:tr>
+              <a:tr h="370332">
+                <a:tc>
+                  <a:txBody>
+                    <a:bodyPr/>
+                    <a:lstStyle/>
+                    <a:p>
+                      <a:pPr algn="ctr" indent="0" marL="0">
+                        <a:buNone/>
+                      </a:pPr>
+                      <a:r>
+                        <a:rPr lang="en-US" sz="1050" b="1" dirty="0">
+                          <a:solidFill>
+                            <a:srgbClr val="94A3B8"/>
+                          </a:solidFill>
+                          <a:latin typeface="Calibri" pitchFamily="34" charset="0"/>
+                          <a:ea typeface="Calibri" pitchFamily="34" charset="-122"/>
+                          <a:cs typeface="Calibri" pitchFamily="34" charset="-120"/>
+                        </a:rPr>
+                        <a:t>7</a:t>
+                      </a:r>
+                      <a:endParaRPr lang="en-US" sz="1050" dirty="0">
+                        <a:latin typeface="Calibri" charset="0"/>
+                        <a:ea typeface="Calibri" charset="0"/>
+                        <a:cs typeface="Calibri" charset="0"/>
+                      </a:endParaRPr>
+                    </a:p>
+                  </a:txBody>
+                  <a:tcPr marL="91440" marR="91440" marT="45720" marB="45720" anchor="ctr">
+                    <a:lnL w="9525" cap="flat" cmpd="sng" algn="ctr">
+                      <a:solidFill>
+                        <a:srgbClr val="E2E8F0"/>
+                      </a:solidFill>
+                      <a:prstDash val="solid"/>
+                      <a:round/>
+                      <a:headEnd type="none" w="med" len="med"/>
+                      <a:tailEnd type="none" w="med" len="med"/>
+                    </a:lnL>
+                    <a:lnR w="9525" cap="flat" cmpd="sng" algn="ctr">
+                      <a:solidFill>
+                        <a:srgbClr val="E2E8F0"/>
+                      </a:solidFill>
+                      <a:prstDash val="solid"/>
+                      <a:round/>
+                      <a:headEnd type="none" w="med" len="med"/>
+                      <a:tailEnd type="none" w="med" len="med"/>
+                    </a:lnR>
+                    <a:lnT w="9525" cap="flat" cmpd="sng" algn="ctr">
+                      <a:solidFill>
+                        <a:srgbClr val="E2E8F0"/>
+                      </a:solidFill>
+                      <a:prstDash val="solid"/>
+                      <a:round/>
+                      <a:headEnd type="none" w="med" len="med"/>
+                      <a:tailEnd type="none" w="med" len="med"/>
+                    </a:lnT>
+                    <a:lnB w="9525" cap="flat" cmpd="sng" algn="ctr">
+                      <a:solidFill>
+                        <a:srgbClr val="E2E8F0"/>
+                      </a:solidFill>
+                      <a:prstDash val="solid"/>
+                      <a:round/>
+                      <a:headEnd type="none" w="med" len="med"/>
+                      <a:tailEnd type="none" w="med" len="med"/>
+                    </a:lnB>
+                    <a:solidFill>
+                      <a:srgbClr val="FFFFFF"/>
+                    </a:solidFill>
+                  </a:tcPr>
+                </a:tc>
+                <a:tc>
+                  <a:txBody>
+                    <a:bodyPr/>
+                    <a:lstStyle/>
+                    <a:p>
+                      <a:pPr algn="l" indent="0" marL="0">
+                        <a:buNone/>
+                      </a:pPr>
+                      <a:r>
+                        <a:rPr lang="en-US" sz="1050" b="1" dirty="0">
+                          <a:solidFill>
+                            <a:srgbClr val="1E293B"/>
+                          </a:solidFill>
+                          <a:latin typeface="Calibri" pitchFamily="34" charset="0"/>
+                          <a:ea typeface="Calibri" pitchFamily="34" charset="-122"/>
+                          <a:cs typeface="Calibri" pitchFamily="34" charset="-120"/>
+                        </a:rPr>
+                        <a:t>Vault / KMS secret management</a:t>
+                      </a:r>
+                      <a:endParaRPr lang="en-US" sz="1050" dirty="0">
+                        <a:latin typeface="Calibri" charset="0"/>
+                        <a:ea typeface="Calibri" charset="0"/>
+                        <a:cs typeface="Calibri" charset="0"/>
+                      </a:endParaRPr>
+                    </a:p>
+                  </a:txBody>
+                  <a:tcPr marL="76200" marR="50800" marT="25400" marB="25400" anchor="ctr">
+                    <a:lnL w="9525" cap="flat" cmpd="sng" algn="ctr">
+                      <a:solidFill>
+                        <a:srgbClr val="E2E8F0"/>
+                      </a:solidFill>
+                      <a:prstDash val="solid"/>
+                      <a:round/>
+                      <a:headEnd type="none" w="med" len="med"/>
+                      <a:tailEnd type="none" w="med" len="med"/>
+                    </a:lnL>
+                    <a:lnR w="9525" cap="flat" cmpd="sng" algn="ctr">
+                      <a:solidFill>
+                        <a:srgbClr val="E2E8F0"/>
+                      </a:solidFill>
+                      <a:prstDash val="solid"/>
+                      <a:round/>
+                      <a:headEnd type="none" w="med" len="med"/>
+                      <a:tailEnd type="none" w="med" len="med"/>
+                    </a:lnR>
+                    <a:lnT w="9525" cap="flat" cmpd="sng" algn="ctr">
+                      <a:solidFill>
+                        <a:srgbClr val="E2E8F0"/>
+                      </a:solidFill>
+                      <a:prstDash val="solid"/>
+                      <a:round/>
+                      <a:headEnd type="none" w="med" len="med"/>
+                      <a:tailEnd type="none" w="med" len="med"/>
+                    </a:lnT>
+                    <a:lnB w="9525" cap="flat" cmpd="sng" algn="ctr">
+                      <a:solidFill>
+                        <a:srgbClr val="E2E8F0"/>
+                      </a:solidFill>
+                      <a:prstDash val="solid"/>
+                      <a:round/>
+                      <a:headEnd type="none" w="med" len="med"/>
+                      <a:tailEnd type="none" w="med" len="med"/>
+                    </a:lnB>
+                    <a:solidFill>
+                      <a:srgbClr val="FFFFFF"/>
+                    </a:solidFill>
+                  </a:tcPr>
+                </a:tc>
+                <a:tc>
+                  <a:txBody>
+                    <a:bodyPr/>
+                    <a:lstStyle/>
+                    <a:p>
+                      <a:pPr algn="l" indent="0" marL="0">
+                        <a:buNone/>
+                      </a:pPr>
+                      <a:r>
+                        <a:rPr lang="en-US" sz="950" dirty="0">
+                          <a:solidFill>
+                            <a:srgbClr val="64748B"/>
+                          </a:solidFill>
+                          <a:latin typeface="Calibri" pitchFamily="34" charset="0"/>
+                          <a:ea typeface="Calibri" pitchFamily="34" charset="-122"/>
+                          <a:cs typeface="Calibri" pitchFamily="34" charset="-120"/>
+                        </a:rPr>
+                        <a:t>No provider keys on disk; automatic rotation</a:t>
+                      </a:r>
+                      <a:endParaRPr lang="en-US" sz="950" dirty="0">
+                        <a:latin typeface="Calibri" charset="0"/>
+                        <a:ea typeface="Calibri" charset="0"/>
+                        <a:cs typeface="Calibri" charset="0"/>
+                      </a:endParaRPr>
+                    </a:p>
+                  </a:txBody>
+                  <a:tcPr marL="76200" marR="50800" marT="25400" marB="25400" anchor="ctr">
+                    <a:lnL w="9525" cap="flat" cmpd="sng" algn="ctr">
+                      <a:solidFill>
+                        <a:srgbClr val="E2E8F0"/>
+                      </a:solidFill>
+                      <a:prstDash val="solid"/>
+                      <a:round/>
+                      <a:headEnd type="none" w="med" len="med"/>
+                      <a:tailEnd type="none" w="med" len="med"/>
+                    </a:lnL>
+                    <a:lnR w="9525" cap="flat" cmpd="sng" algn="ctr">
+                      <a:solidFill>
+                        <a:srgbClr val="E2E8F0"/>
+                      </a:solidFill>
+                      <a:prstDash val="solid"/>
+                      <a:round/>
+                      <a:headEnd type="none" w="med" len="med"/>
+                      <a:tailEnd type="none" w="med" len="med"/>
+                    </a:lnR>
+                    <a:lnT w="9525" cap="flat" cmpd="sng" algn="ctr">
+                      <a:solidFill>
+                        <a:srgbClr val="E2E8F0"/>
+                      </a:solidFill>
+                      <a:prstDash val="solid"/>
+                      <a:round/>
+                      <a:headEnd type="none" w="med" len="med"/>
+                      <a:tailEnd type="none" w="med" len="med"/>
+                    </a:lnT>
+                    <a:lnB w="9525" cap="flat" cmpd="sng" algn="ctr">
+                      <a:solidFill>
+                        <a:srgbClr val="E2E8F0"/>
+                      </a:solidFill>
+                      <a:prstDash val="solid"/>
+                      <a:round/>
+                      <a:headEnd type="none" w="med" len="med"/>
+                      <a:tailEnd type="none" w="med" len="med"/>
+                    </a:lnB>
+                    <a:solidFill>
+                      <a:srgbClr val="FFFFFF"/>
+                    </a:solidFill>
+                  </a:tcPr>
+                </a:tc>
+                <a:tc>
+                  <a:txBody>
+                    <a:bodyPr/>
+                    <a:lstStyle/>
+                    <a:p>
+                      <a:pPr algn="ctr" indent="0" marL="0">
+                        <a:buNone/>
+                      </a:pPr>
+                      <a:r>
+                        <a:rPr lang="en-US" sz="900" b="1" dirty="0">
+                          <a:solidFill>
+                            <a:srgbClr val="DC2626"/>
+                          </a:solidFill>
+                          <a:latin typeface="Calibri" pitchFamily="34" charset="0"/>
+                          <a:ea typeface="Calibri" pitchFamily="34" charset="-122"/>
+                          <a:cs typeface="Calibri" pitchFamily="34" charset="-120"/>
+                        </a:rPr>
+                        <a:t>Access</a:t>
+                      </a:r>
+                      <a:endParaRPr lang="en-US" sz="900" dirty="0">
+                        <a:latin typeface="Calibri" charset="0"/>
+                        <a:ea typeface="Calibri" charset="0"/>
+                        <a:cs typeface="Calibri" charset="0"/>
+                      </a:endParaRPr>
+                    </a:p>
+                  </a:txBody>
+                  <a:tcPr marL="91440" marR="91440" marT="45720" marB="45720" anchor="ctr">
+                    <a:lnL w="9525" cap="flat" cmpd="sng" algn="ctr">
+                      <a:solidFill>
+                        <a:srgbClr val="E2E8F0"/>
+                      </a:solidFill>
+                      <a:prstDash val="solid"/>
+                      <a:round/>
+                      <a:headEnd type="none" w="med" len="med"/>
+                      <a:tailEnd type="none" w="med" len="med"/>
+                    </a:lnL>
+                    <a:lnR w="9525" cap="flat" cmpd="sng" algn="ctr">
+                      <a:solidFill>
+                        <a:srgbClr val="E2E8F0"/>
+                      </a:solidFill>
+                      <a:prstDash val="solid"/>
+                      <a:round/>
+                      <a:headEnd type="none" w="med" len="med"/>
+                      <a:tailEnd type="none" w="med" len="med"/>
+                    </a:lnR>
+                    <a:lnT w="9525" cap="flat" cmpd="sng" algn="ctr">
+                      <a:solidFill>
+                        <a:srgbClr val="E2E8F0"/>
+                      </a:solidFill>
+                      <a:prstDash val="solid"/>
+                      <a:round/>
+                      <a:headEnd type="none" w="med" len="med"/>
+                      <a:tailEnd type="none" w="med" len="med"/>
+                    </a:lnT>
+                    <a:lnB w="9525" cap="flat" cmpd="sng" algn="ctr">
+                      <a:solidFill>
+                        <a:srgbClr val="E2E8F0"/>
+                      </a:solidFill>
+                      <a:prstDash val="solid"/>
+                      <a:round/>
+                      <a:headEnd type="none" w="med" len="med"/>
+                      <a:tailEnd type="none" w="med" len="med"/>
+                    </a:lnB>
+                    <a:solidFill>
+                      <a:srgbClr val="FFFFFF"/>
+                    </a:solidFill>
+                  </a:tcPr>
+                </a:tc>
+              </a:tr>
+              <a:tr h="370332">
+                <a:tc>
+                  <a:txBody>
+                    <a:bodyPr/>
+                    <a:lstStyle/>
+                    <a:p>
+                      <a:pPr algn="ctr" indent="0" marL="0">
+                        <a:buNone/>
+                      </a:pPr>
+                      <a:r>
+                        <a:rPr lang="en-US" sz="1050" b="1" dirty="0">
+                          <a:solidFill>
+                            <a:srgbClr val="94A3B8"/>
+                          </a:solidFill>
+                          <a:latin typeface="Calibri" pitchFamily="34" charset="0"/>
+                          <a:ea typeface="Calibri" pitchFamily="34" charset="-122"/>
+                          <a:cs typeface="Calibri" pitchFamily="34" charset="-120"/>
+                        </a:rPr>
+                        <a:t>8</a:t>
+                      </a:r>
+                      <a:endParaRPr lang="en-US" sz="1050" dirty="0">
+                        <a:latin typeface="Calibri" charset="0"/>
+                        <a:ea typeface="Calibri" charset="0"/>
+                        <a:cs typeface="Calibri" charset="0"/>
+                      </a:endParaRPr>
+                    </a:p>
+                  </a:txBody>
+                  <a:tcPr marL="91440" marR="91440" marT="45720" marB="45720" anchor="ctr">
+                    <a:lnL w="9525" cap="flat" cmpd="sng" algn="ctr">
+                      <a:solidFill>
+                        <a:srgbClr val="E2E8F0"/>
+                      </a:solidFill>
+                      <a:prstDash val="solid"/>
+                      <a:round/>
+                      <a:headEnd type="none" w="med" len="med"/>
+                      <a:tailEnd type="none" w="med" len="med"/>
+                    </a:lnL>
+                    <a:lnR w="9525" cap="flat" cmpd="sng" algn="ctr">
+                      <a:solidFill>
+                        <a:srgbClr val="E2E8F0"/>
+                      </a:solidFill>
+                      <a:prstDash val="solid"/>
+                      <a:round/>
+                      <a:headEnd type="none" w="med" len="med"/>
+                      <a:tailEnd type="none" w="med" len="med"/>
+                    </a:lnR>
+                    <a:lnT w="9525" cap="flat" cmpd="sng" algn="ctr">
+                      <a:solidFill>
+                        <a:srgbClr val="E2E8F0"/>
+                      </a:solidFill>
+                      <a:prstDash val="solid"/>
+                      <a:round/>
+                      <a:headEnd type="none" w="med" len="med"/>
+                      <a:tailEnd type="none" w="med" len="med"/>
+                    </a:lnT>
+                    <a:lnB w="9525" cap="flat" cmpd="sng" algn="ctr">
+                      <a:solidFill>
+                        <a:srgbClr val="E2E8F0"/>
+                      </a:solidFill>
+                      <a:prstDash val="solid"/>
+                      <a:round/>
+                      <a:headEnd type="none" w="med" len="med"/>
+                      <a:tailEnd type="none" w="med" len="med"/>
+                    </a:lnB>
+                    <a:solidFill>
+                      <a:srgbClr val="EEF2F8"/>
+                    </a:solidFill>
+                  </a:tcPr>
+                </a:tc>
+                <a:tc>
+                  <a:txBody>
+                    <a:bodyPr/>
+                    <a:lstStyle/>
+                    <a:p>
+                      <a:pPr algn="l" indent="0" marL="0">
+                        <a:buNone/>
+                      </a:pPr>
+                      <a:r>
+                        <a:rPr lang="en-US" sz="1050" b="1" dirty="0">
+                          <a:solidFill>
+                            <a:srgbClr val="1E293B"/>
+                          </a:solidFill>
+                          <a:latin typeface="Calibri" pitchFamily="34" charset="0"/>
+                          <a:ea typeface="Calibri" pitchFamily="34" charset="-122"/>
+                          <a:cs typeface="Calibri" pitchFamily="34" charset="-120"/>
+                        </a:rPr>
+                        <a:t>SARIF export + PR status checks</a:t>
+                      </a:r>
+                      <a:endParaRPr lang="en-US" sz="1050" dirty="0">
+                        <a:latin typeface="Calibri" charset="0"/>
+                        <a:ea typeface="Calibri" charset="0"/>
+                        <a:cs typeface="Calibri" charset="0"/>
+                      </a:endParaRPr>
+                    </a:p>
+                  </a:txBody>
+                  <a:tcPr marL="76200" marR="50800" marT="25400" marB="25400" anchor="ctr">
+                    <a:lnL w="9525" cap="flat" cmpd="sng" algn="ctr">
+                      <a:solidFill>
+                        <a:srgbClr val="E2E8F0"/>
+                      </a:solidFill>
+                      <a:prstDash val="solid"/>
+                      <a:round/>
+                      <a:headEnd type="none" w="med" len="med"/>
+                      <a:tailEnd type="none" w="med" len="med"/>
+                    </a:lnL>
+                    <a:lnR w="9525" cap="flat" cmpd="sng" algn="ctr">
+                      <a:solidFill>
+                        <a:srgbClr val="E2E8F0"/>
+                      </a:solidFill>
+                      <a:prstDash val="solid"/>
+                      <a:round/>
+                      <a:headEnd type="none" w="med" len="med"/>
+                      <a:tailEnd type="none" w="med" len="med"/>
+                    </a:lnR>
+                    <a:lnT w="9525" cap="flat" cmpd="sng" algn="ctr">
+                      <a:solidFill>
+                        <a:srgbClr val="E2E8F0"/>
+                      </a:solidFill>
+                      <a:prstDash val="solid"/>
+                      <a:round/>
+                      <a:headEnd type="none" w="med" len="med"/>
+                      <a:tailEnd type="none" w="med" len="med"/>
+                    </a:lnT>
+                    <a:lnB w="9525" cap="flat" cmpd="sng" algn="ctr">
+                      <a:solidFill>
+                        <a:srgbClr val="E2E8F0"/>
+                      </a:solidFill>
+                      <a:prstDash val="solid"/>
+                      <a:round/>
+                      <a:headEnd type="none" w="med" len="med"/>
+                      <a:tailEnd type="none" w="med" len="med"/>
+                    </a:lnB>
+                    <a:solidFill>
+                      <a:srgbClr val="EEF2F8"/>
+                    </a:solidFill>
+                  </a:tcPr>
+                </a:tc>
+                <a:tc>
+                  <a:txBody>
+                    <a:bodyPr/>
+                    <a:lstStyle/>
+                    <a:p>
+                      <a:pPr algn="l" indent="0" marL="0">
+                        <a:buNone/>
+                      </a:pPr>
+                      <a:r>
+                        <a:rPr lang="en-US" sz="950" dirty="0">
+                          <a:solidFill>
+                            <a:srgbClr val="64748B"/>
+                          </a:solidFill>
+                          <a:latin typeface="Calibri" pitchFamily="34" charset="0"/>
+                          <a:ea typeface="Calibri" pitchFamily="34" charset="-122"/>
+                          <a:cs typeface="Calibri" pitchFamily="34" charset="-120"/>
+                        </a:rPr>
+                        <a:t>Findings into code-scanning dashboards; gate enforced as a required check</a:t>
+                      </a:r>
+                      <a:endParaRPr lang="en-US" sz="950" dirty="0">
+                        <a:latin typeface="Calibri" charset="0"/>
+                        <a:ea typeface="Calibri" charset="0"/>
+                        <a:cs typeface="Calibri" charset="0"/>
+                      </a:endParaRPr>
+                    </a:p>
+                  </a:txBody>
+                  <a:tcPr marL="76200" marR="50800" marT="25400" marB="25400" anchor="ctr">
+                    <a:lnL w="9525" cap="flat" cmpd="sng" algn="ctr">
+                      <a:solidFill>
+                        <a:srgbClr val="E2E8F0"/>
+                      </a:solidFill>
+                      <a:prstDash val="solid"/>
+                      <a:round/>
+                      <a:headEnd type="none" w="med" len="med"/>
+                      <a:tailEnd type="none" w="med" len="med"/>
+                    </a:lnL>
+                    <a:lnR w="9525" cap="flat" cmpd="sng" algn="ctr">
+                      <a:solidFill>
+                        <a:srgbClr val="E2E8F0"/>
+                      </a:solidFill>
+                      <a:prstDash val="solid"/>
+                      <a:round/>
+                      <a:headEnd type="none" w="med" len="med"/>
+                      <a:tailEnd type="none" w="med" len="med"/>
+                    </a:lnR>
+                    <a:lnT w="9525" cap="flat" cmpd="sng" algn="ctr">
+                      <a:solidFill>
+                        <a:srgbClr val="E2E8F0"/>
+                      </a:solidFill>
+                      <a:prstDash val="solid"/>
+                      <a:round/>
+                      <a:headEnd type="none" w="med" len="med"/>
+                      <a:tailEnd type="none" w="med" len="med"/>
+                    </a:lnT>
+                    <a:lnB w="9525" cap="flat" cmpd="sng" algn="ctr">
+                      <a:solidFill>
+                        <a:srgbClr val="E2E8F0"/>
+                      </a:solidFill>
+                      <a:prstDash val="solid"/>
+                      <a:round/>
+                      <a:headEnd type="none" w="med" len="med"/>
+                      <a:tailEnd type="none" w="med" len="med"/>
+                    </a:lnB>
+                    <a:solidFill>
+                      <a:srgbClr val="EEF2F8"/>
+                    </a:solidFill>
+                  </a:tcPr>
+                </a:tc>
+                <a:tc>
+                  <a:txBody>
+                    <a:bodyPr/>
+                    <a:lstStyle/>
+                    <a:p>
+                      <a:pPr algn="ctr" indent="0" marL="0">
+                        <a:buNone/>
+                      </a:pPr>
+                      <a:r>
+                        <a:rPr lang="en-US" sz="900" b="1" dirty="0">
+                          <a:solidFill>
+                            <a:srgbClr val="D97706"/>
+                          </a:solidFill>
+                          <a:latin typeface="Calibri" pitchFamily="34" charset="0"/>
+                          <a:ea typeface="Calibri" pitchFamily="34" charset="-122"/>
+                          <a:cs typeface="Calibri" pitchFamily="34" charset="-120"/>
+                        </a:rPr>
+                        <a:t>Workflow</a:t>
+                      </a:r>
+                      <a:endParaRPr lang="en-US" sz="900" dirty="0">
+                        <a:latin typeface="Calibri" charset="0"/>
+                        <a:ea typeface="Calibri" charset="0"/>
+                        <a:cs typeface="Calibri" charset="0"/>
+                      </a:endParaRPr>
+                    </a:p>
+                  </a:txBody>
+                  <a:tcPr marL="91440" marR="91440" marT="45720" marB="45720" anchor="ctr">
+                    <a:lnL w="9525" cap="flat" cmpd="sng" algn="ctr">
+                      <a:solidFill>
+                        <a:srgbClr val="E2E8F0"/>
+                      </a:solidFill>
+                      <a:prstDash val="solid"/>
+                      <a:round/>
+                      <a:headEnd type="none" w="med" len="med"/>
+                      <a:tailEnd type="none" w="med" len="med"/>
+                    </a:lnL>
+                    <a:lnR w="9525" cap="flat" cmpd="sng" algn="ctr">
+                      <a:solidFill>
+                        <a:srgbClr val="E2E8F0"/>
+                      </a:solidFill>
+                      <a:prstDash val="solid"/>
+                      <a:round/>
+                      <a:headEnd type="none" w="med" len="med"/>
+                      <a:tailEnd type="none" w="med" len="med"/>
+                    </a:lnR>
+                    <a:lnT w="9525" cap="flat" cmpd="sng" algn="ctr">
+                      <a:solidFill>
+                        <a:srgbClr val="E2E8F0"/>
+                      </a:solidFill>
+                      <a:prstDash val="solid"/>
+                      <a:round/>
+                      <a:headEnd type="none" w="med" len="med"/>
+                      <a:tailEnd type="none" w="med" len="med"/>
+                    </a:lnT>
+                    <a:lnB w="9525" cap="flat" cmpd="sng" algn="ctr">
+                      <a:solidFill>
+                        <a:srgbClr val="E2E8F0"/>
+                      </a:solidFill>
+                      <a:prstDash val="solid"/>
+                      <a:round/>
+                      <a:headEnd type="none" w="med" len="med"/>
+                      <a:tailEnd type="none" w="med" len="med"/>
+                    </a:lnB>
+                    <a:solidFill>
+                      <a:srgbClr val="EEF2F8"/>
+                    </a:solidFill>
+                  </a:tcPr>
+                </a:tc>
+              </a:tr>
+              <a:tr h="370332">
+                <a:tc>
+                  <a:txBody>
+                    <a:bodyPr/>
+                    <a:lstStyle/>
+                    <a:p>
+                      <a:pPr algn="ctr" indent="0" marL="0">
+                        <a:buNone/>
+                      </a:pPr>
+                      <a:r>
+                        <a:rPr lang="en-US" sz="1050" b="1" dirty="0">
+                          <a:solidFill>
+                            <a:srgbClr val="94A3B8"/>
+                          </a:solidFill>
+                          <a:latin typeface="Calibri" pitchFamily="34" charset="0"/>
+                          <a:ea typeface="Calibri" pitchFamily="34" charset="-122"/>
+                          <a:cs typeface="Calibri" pitchFamily="34" charset="-120"/>
+                        </a:rPr>
+                        <a:t>9</a:t>
+                      </a:r>
+                      <a:endParaRPr lang="en-US" sz="1050" dirty="0">
+                        <a:latin typeface="Calibri" charset="0"/>
+                        <a:ea typeface="Calibri" charset="0"/>
+                        <a:cs typeface="Calibri" charset="0"/>
+                      </a:endParaRPr>
+                    </a:p>
+                  </a:txBody>
+                  <a:tcPr marL="91440" marR="91440" marT="45720" marB="45720" anchor="ctr">
+                    <a:lnL w="9525" cap="flat" cmpd="sng" algn="ctr">
+                      <a:solidFill>
+                        <a:srgbClr val="E2E8F0"/>
+                      </a:solidFill>
+                      <a:prstDash val="solid"/>
+                      <a:round/>
+                      <a:headEnd type="none" w="med" len="med"/>
+                      <a:tailEnd type="none" w="med" len="med"/>
+                    </a:lnL>
+                    <a:lnR w="9525" cap="flat" cmpd="sng" algn="ctr">
+                      <a:solidFill>
+                        <a:srgbClr val="E2E8F0"/>
+                      </a:solidFill>
+                      <a:prstDash val="solid"/>
+                      <a:round/>
+                      <a:headEnd type="none" w="med" len="med"/>
+                      <a:tailEnd type="none" w="med" len="med"/>
+                    </a:lnR>
+                    <a:lnT w="9525" cap="flat" cmpd="sng" algn="ctr">
+                      <a:solidFill>
+                        <a:srgbClr val="E2E8F0"/>
+                      </a:solidFill>
+                      <a:prstDash val="solid"/>
+                      <a:round/>
+                      <a:headEnd type="none" w="med" len="med"/>
+                      <a:tailEnd type="none" w="med" len="med"/>
+                    </a:lnT>
+                    <a:lnB w="9525" cap="flat" cmpd="sng" algn="ctr">
+                      <a:solidFill>
+                        <a:srgbClr val="E2E8F0"/>
+                      </a:solidFill>
+                      <a:prstDash val="solid"/>
+                      <a:round/>
+                      <a:headEnd type="none" w="med" len="med"/>
+                      <a:tailEnd type="none" w="med" len="med"/>
+                    </a:lnB>
+                    <a:solidFill>
+                      <a:srgbClr val="FFFFFF"/>
+                    </a:solidFill>
+                  </a:tcPr>
+                </a:tc>
+                <a:tc>
+                  <a:txBody>
+                    <a:bodyPr/>
+                    <a:lstStyle/>
+                    <a:p>
+                      <a:pPr algn="l" indent="0" marL="0">
+                        <a:buNone/>
+                      </a:pPr>
+                      <a:r>
+                        <a:rPr lang="en-US" sz="1050" b="1" dirty="0">
+                          <a:solidFill>
+                            <a:srgbClr val="1E293B"/>
+                          </a:solidFill>
+                          <a:latin typeface="Calibri" pitchFamily="34" charset="0"/>
+                          <a:ea typeface="Calibri" pitchFamily="34" charset="-122"/>
+                          <a:cs typeface="Calibri" pitchFamily="34" charset="-120"/>
+                        </a:rPr>
+                        <a:t>Transitive SCA</a:t>
+                      </a:r>
+                      <a:endParaRPr lang="en-US" sz="1050" dirty="0">
+                        <a:latin typeface="Calibri" charset="0"/>
+                        <a:ea typeface="Calibri" charset="0"/>
+                        <a:cs typeface="Calibri" charset="0"/>
+                      </a:endParaRPr>
+                    </a:p>
+                  </a:txBody>
+                  <a:tcPr marL="76200" marR="50800" marT="25400" marB="25400" anchor="ctr">
+                    <a:lnL w="9525" cap="flat" cmpd="sng" algn="ctr">
+                      <a:solidFill>
+                        <a:srgbClr val="E2E8F0"/>
+                      </a:solidFill>
+                      <a:prstDash val="solid"/>
+                      <a:round/>
+                      <a:headEnd type="none" w="med" len="med"/>
+                      <a:tailEnd type="none" w="med" len="med"/>
+                    </a:lnL>
+                    <a:lnR w="9525" cap="flat" cmpd="sng" algn="ctr">
+                      <a:solidFill>
+                        <a:srgbClr val="E2E8F0"/>
+                      </a:solidFill>
+                      <a:prstDash val="solid"/>
+                      <a:round/>
+                      <a:headEnd type="none" w="med" len="med"/>
+                      <a:tailEnd type="none" w="med" len="med"/>
+                    </a:lnR>
+                    <a:lnT w="9525" cap="flat" cmpd="sng" algn="ctr">
+                      <a:solidFill>
+                        <a:srgbClr val="E2E8F0"/>
+                      </a:solidFill>
+                      <a:prstDash val="solid"/>
+                      <a:round/>
+                      <a:headEnd type="none" w="med" len="med"/>
+                      <a:tailEnd type="none" w="med" len="med"/>
+                    </a:lnT>
+                    <a:lnB w="9525" cap="flat" cmpd="sng" algn="ctr">
+                      <a:solidFill>
+                        <a:srgbClr val="E2E8F0"/>
+                      </a:solidFill>
+                      <a:prstDash val="solid"/>
+                      <a:round/>
+                      <a:headEnd type="none" w="med" len="med"/>
+                      <a:tailEnd type="none" w="med" len="med"/>
+                    </a:lnB>
+                    <a:solidFill>
+                      <a:srgbClr val="FFFFFF"/>
+                    </a:solidFill>
+                  </a:tcPr>
+                </a:tc>
+                <a:tc>
+                  <a:txBody>
+                    <a:bodyPr/>
+                    <a:lstStyle/>
+                    <a:p>
+                      <a:pPr algn="l" indent="0" marL="0">
+                        <a:buNone/>
+                      </a:pPr>
+                      <a:r>
+                        <a:rPr lang="en-US" sz="950" dirty="0">
+                          <a:solidFill>
+                            <a:srgbClr val="64748B"/>
+                          </a:solidFill>
+                          <a:latin typeface="Calibri" pitchFamily="34" charset="0"/>
+                          <a:ea typeface="Calibri" pitchFamily="34" charset="-122"/>
+                          <a:cs typeface="Calibri" pitchFamily="34" charset="-120"/>
+                        </a:rPr>
+                        <a:t>Full dependency-tree CVE scan (mvn dependency:tree / lockfiles)</a:t>
+                      </a:r>
+                      <a:endParaRPr lang="en-US" sz="950" dirty="0">
+                        <a:latin typeface="Calibri" charset="0"/>
+                        <a:ea typeface="Calibri" charset="0"/>
+                        <a:cs typeface="Calibri" charset="0"/>
+                      </a:endParaRPr>
+                    </a:p>
+                  </a:txBody>
+                  <a:tcPr marL="76200" marR="50800" marT="25400" marB="25400" anchor="ctr">
+                    <a:lnL w="9525" cap="flat" cmpd="sng" algn="ctr">
+                      <a:solidFill>
+                        <a:srgbClr val="E2E8F0"/>
+                      </a:solidFill>
+                      <a:prstDash val="solid"/>
+                      <a:round/>
+                      <a:headEnd type="none" w="med" len="med"/>
+                      <a:tailEnd type="none" w="med" len="med"/>
+                    </a:lnL>
+                    <a:lnR w="9525" cap="flat" cmpd="sng" algn="ctr">
+                      <a:solidFill>
+                        <a:srgbClr val="E2E8F0"/>
+                      </a:solidFill>
+                      <a:prstDash val="solid"/>
+                      <a:round/>
+                      <a:headEnd type="none" w="med" len="med"/>
+                      <a:tailEnd type="none" w="med" len="med"/>
+                    </a:lnR>
+                    <a:lnT w="9525" cap="flat" cmpd="sng" algn="ctr">
+                      <a:solidFill>
+                        <a:srgbClr val="E2E8F0"/>
+                      </a:solidFill>
+                      <a:prstDash val="solid"/>
+                      <a:round/>
+                      <a:headEnd type="none" w="med" len="med"/>
+                      <a:tailEnd type="none" w="med" len="med"/>
+                    </a:lnT>
+                    <a:lnB w="9525" cap="flat" cmpd="sng" algn="ctr">
+                      <a:solidFill>
+                        <a:srgbClr val="E2E8F0"/>
+                      </a:solidFill>
+                      <a:prstDash val="solid"/>
+                      <a:round/>
+                      <a:headEnd type="none" w="med" len="med"/>
+                      <a:tailEnd type="none" w="med" len="med"/>
+                    </a:lnB>
+                    <a:solidFill>
+                      <a:srgbClr val="FFFFFF"/>
+                    </a:solidFill>
+                  </a:tcPr>
+                </a:tc>
+                <a:tc>
+                  <a:txBody>
+                    <a:bodyPr/>
+                    <a:lstStyle/>
+                    <a:p>
+                      <a:pPr algn="ctr" indent="0" marL="0">
+                        <a:buNone/>
+                      </a:pPr>
+                      <a:r>
+                        <a:rPr lang="en-US" sz="900" b="1" dirty="0">
+                          <a:solidFill>
+                            <a:srgbClr val="2DD4BF"/>
+                          </a:solidFill>
+                          <a:latin typeface="Calibri" pitchFamily="34" charset="0"/>
+                          <a:ea typeface="Calibri" pitchFamily="34" charset="-122"/>
+                          <a:cs typeface="Calibri" pitchFamily="34" charset="-120"/>
+                        </a:rPr>
+                        <a:t>Detection</a:t>
+                      </a:r>
+                      <a:endParaRPr lang="en-US" sz="900" dirty="0">
+                        <a:latin typeface="Calibri" charset="0"/>
+                        <a:ea typeface="Calibri" charset="0"/>
+                        <a:cs typeface="Calibri" charset="0"/>
+                      </a:endParaRPr>
+                    </a:p>
+                  </a:txBody>
+                  <a:tcPr marL="91440" marR="91440" marT="45720" marB="45720" anchor="ctr">
+                    <a:lnL w="9525" cap="flat" cmpd="sng" algn="ctr">
+                      <a:solidFill>
+                        <a:srgbClr val="E2E8F0"/>
+                      </a:solidFill>
+                      <a:prstDash val="solid"/>
+                      <a:round/>
+                      <a:headEnd type="none" w="med" len="med"/>
+                      <a:tailEnd type="none" w="med" len="med"/>
+                    </a:lnL>
+                    <a:lnR w="9525" cap="flat" cmpd="sng" algn="ctr">
+                      <a:solidFill>
+                        <a:srgbClr val="E2E8F0"/>
+                      </a:solidFill>
+                      <a:prstDash val="solid"/>
+                      <a:round/>
+                      <a:headEnd type="none" w="med" len="med"/>
+                      <a:tailEnd type="none" w="med" len="med"/>
+                    </a:lnR>
+                    <a:lnT w="9525" cap="flat" cmpd="sng" algn="ctr">
+                      <a:solidFill>
+                        <a:srgbClr val="E2E8F0"/>
+                      </a:solidFill>
+                      <a:prstDash val="solid"/>
+                      <a:round/>
+                      <a:headEnd type="none" w="med" len="med"/>
+                      <a:tailEnd type="none" w="med" len="med"/>
+                    </a:lnT>
+                    <a:lnB w="9525" cap="flat" cmpd="sng" algn="ctr">
+                      <a:solidFill>
+                        <a:srgbClr val="E2E8F0"/>
+                      </a:solidFill>
+                      <a:prstDash val="solid"/>
+                      <a:round/>
+                      <a:headEnd type="none" w="med" len="med"/>
+                      <a:tailEnd type="none" w="med" len="med"/>
+                    </a:lnB>
+                    <a:solidFill>
+                      <a:srgbClr val="FFFFFF"/>
+                    </a:solidFill>
+                  </a:tcPr>
+                </a:tc>
+              </a:tr>
+              <a:tr h="370332">
+                <a:tc>
+                  <a:txBody>
+                    <a:bodyPr/>
+                    <a:lstStyle/>
+                    <a:p>
+                      <a:pPr algn="ctr" indent="0" marL="0">
+                        <a:buNone/>
+                      </a:pPr>
+                      <a:r>
+                        <a:rPr lang="en-US" sz="1050" b="1" dirty="0">
+                          <a:solidFill>
+                            <a:srgbClr val="94A3B8"/>
+                          </a:solidFill>
+                          <a:latin typeface="Calibri" pitchFamily="34" charset="0"/>
+                          <a:ea typeface="Calibri" pitchFamily="34" charset="-122"/>
+                          <a:cs typeface="Calibri" pitchFamily="34" charset="-120"/>
+                        </a:rPr>
+                        <a:t>10</a:t>
+                      </a:r>
+                      <a:endParaRPr lang="en-US" sz="1050" dirty="0">
+                        <a:latin typeface="Calibri" charset="0"/>
+                        <a:ea typeface="Calibri" charset="0"/>
+                        <a:cs typeface="Calibri" charset="0"/>
+                      </a:endParaRPr>
+                    </a:p>
+                  </a:txBody>
+                  <a:tcPr marL="91440" marR="91440" marT="45720" marB="45720" anchor="ctr">
+                    <a:lnL w="9525" cap="flat" cmpd="sng" algn="ctr">
+                      <a:solidFill>
+                        <a:srgbClr val="E2E8F0"/>
+                      </a:solidFill>
+                      <a:prstDash val="solid"/>
+                      <a:round/>
+                      <a:headEnd type="none" w="med" len="med"/>
+                      <a:tailEnd type="none" w="med" len="med"/>
+                    </a:lnL>
+                    <a:lnR w="9525" cap="flat" cmpd="sng" algn="ctr">
+                      <a:solidFill>
+                        <a:srgbClr val="E2E8F0"/>
+                      </a:solidFill>
+                      <a:prstDash val="solid"/>
+                      <a:round/>
+                      <a:headEnd type="none" w="med" len="med"/>
+                      <a:tailEnd type="none" w="med" len="med"/>
+                    </a:lnR>
+                    <a:lnT w="9525" cap="flat" cmpd="sng" algn="ctr">
+                      <a:solidFill>
+                        <a:srgbClr val="E2E8F0"/>
+                      </a:solidFill>
+                      <a:prstDash val="solid"/>
+                      <a:round/>
+                      <a:headEnd type="none" w="med" len="med"/>
+                      <a:tailEnd type="none" w="med" len="med"/>
+                    </a:lnT>
+                    <a:lnB w="9525" cap="flat" cmpd="sng" algn="ctr">
+                      <a:solidFill>
+                        <a:srgbClr val="E2E8F0"/>
+                      </a:solidFill>
+                      <a:prstDash val="solid"/>
+                      <a:round/>
+                      <a:headEnd type="none" w="med" len="med"/>
+                      <a:tailEnd type="none" w="med" len="med"/>
+                    </a:lnB>
+                    <a:solidFill>
+                      <a:srgbClr val="EEF2F8"/>
+                    </a:solidFill>
+                  </a:tcPr>
+                </a:tc>
+                <a:tc>
+                  <a:txBody>
+                    <a:bodyPr/>
+                    <a:lstStyle/>
+                    <a:p>
+                      <a:pPr algn="l" indent="0" marL="0">
+                        <a:buNone/>
+                      </a:pPr>
+                      <a:r>
+                        <a:rPr lang="en-US" sz="1050" b="1" dirty="0">
+                          <a:solidFill>
+                            <a:srgbClr val="1E293B"/>
+                          </a:solidFill>
+                          <a:latin typeface="Calibri" pitchFamily="34" charset="0"/>
+                          <a:ea typeface="Calibri" pitchFamily="34" charset="-122"/>
+                          <a:cs typeface="Calibri" pitchFamily="34" charset="-120"/>
+                        </a:rPr>
+                        <a:t>Compiler-index cross-repo refs</a:t>
+                      </a:r>
+                      <a:endParaRPr lang="en-US" sz="1050" dirty="0">
+                        <a:latin typeface="Calibri" charset="0"/>
+                        <a:ea typeface="Calibri" charset="0"/>
+                        <a:cs typeface="Calibri" charset="0"/>
+                      </a:endParaRPr>
+                    </a:p>
+                  </a:txBody>
+                  <a:tcPr marL="76200" marR="50800" marT="25400" marB="25400" anchor="ctr">
+                    <a:lnL w="9525" cap="flat" cmpd="sng" algn="ctr">
+                      <a:solidFill>
+                        <a:srgbClr val="E2E8F0"/>
+                      </a:solidFill>
+                      <a:prstDash val="solid"/>
+                      <a:round/>
+                      <a:headEnd type="none" w="med" len="med"/>
+                      <a:tailEnd type="none" w="med" len="med"/>
+                    </a:lnL>
+                    <a:lnR w="9525" cap="flat" cmpd="sng" algn="ctr">
+                      <a:solidFill>
+                        <a:srgbClr val="E2E8F0"/>
+                      </a:solidFill>
+                      <a:prstDash val="solid"/>
+                      <a:round/>
+                      <a:headEnd type="none" w="med" len="med"/>
+                      <a:tailEnd type="none" w="med" len="med"/>
+                    </a:lnR>
+                    <a:lnT w="9525" cap="flat" cmpd="sng" algn="ctr">
+                      <a:solidFill>
+                        <a:srgbClr val="E2E8F0"/>
+                      </a:solidFill>
+                      <a:prstDash val="solid"/>
+                      <a:round/>
+                      <a:headEnd type="none" w="med" len="med"/>
+                      <a:tailEnd type="none" w="med" len="med"/>
+                    </a:lnT>
+                    <a:lnB w="9525" cap="flat" cmpd="sng" algn="ctr">
+                      <a:solidFill>
+                        <a:srgbClr val="E2E8F0"/>
+                      </a:solidFill>
+                      <a:prstDash val="solid"/>
+                      <a:round/>
+                      <a:headEnd type="none" w="med" len="med"/>
+                      <a:tailEnd type="none" w="med" len="med"/>
+                    </a:lnB>
+                    <a:solidFill>
+                      <a:srgbClr val="EEF2F8"/>
+                    </a:solidFill>
+                  </a:tcPr>
+                </a:tc>
+                <a:tc>
+                  <a:txBody>
+                    <a:bodyPr/>
+                    <a:lstStyle/>
+                    <a:p>
+                      <a:pPr algn="l" indent="0" marL="0">
+                        <a:buNone/>
+                      </a:pPr>
+                      <a:r>
+                        <a:rPr lang="en-US" sz="950" dirty="0">
+                          <a:solidFill>
+                            <a:srgbClr val="64748B"/>
+                          </a:solidFill>
+                          <a:latin typeface="Calibri" pitchFamily="34" charset="0"/>
+                          <a:ea typeface="Calibri" pitchFamily="34" charset="-122"/>
+                          <a:cs typeface="Calibri" pitchFamily="34" charset="-120"/>
+                        </a:rPr>
+                        <a:t>LSIF/SCIP for exact call-site resolution beyond grep</a:t>
+                      </a:r>
+                      <a:endParaRPr lang="en-US" sz="950" dirty="0">
+                        <a:latin typeface="Calibri" charset="0"/>
+                        <a:ea typeface="Calibri" charset="0"/>
+                        <a:cs typeface="Calibri" charset="0"/>
+                      </a:endParaRPr>
+                    </a:p>
+                  </a:txBody>
+                  <a:tcPr marL="76200" marR="50800" marT="25400" marB="25400" anchor="ctr">
+                    <a:lnL w="9525" cap="flat" cmpd="sng" algn="ctr">
+                      <a:solidFill>
+                        <a:srgbClr val="E2E8F0"/>
+                      </a:solidFill>
+                      <a:prstDash val="solid"/>
+                      <a:round/>
+                      <a:headEnd type="none" w="med" len="med"/>
+                      <a:tailEnd type="none" w="med" len="med"/>
+                    </a:lnL>
+                    <a:lnR w="9525" cap="flat" cmpd="sng" algn="ctr">
+                      <a:solidFill>
+                        <a:srgbClr val="E2E8F0"/>
+                      </a:solidFill>
+                      <a:prstDash val="solid"/>
+                      <a:round/>
+                      <a:headEnd type="none" w="med" len="med"/>
+                      <a:tailEnd type="none" w="med" len="med"/>
+                    </a:lnR>
+                    <a:lnT w="9525" cap="flat" cmpd="sng" algn="ctr">
+                      <a:solidFill>
+                        <a:srgbClr val="E2E8F0"/>
+                      </a:solidFill>
+                      <a:prstDash val="solid"/>
+                      <a:round/>
+                      <a:headEnd type="none" w="med" len="med"/>
+                      <a:tailEnd type="none" w="med" len="med"/>
+                    </a:lnT>
+                    <a:lnB w="9525" cap="flat" cmpd="sng" algn="ctr">
+                      <a:solidFill>
+                        <a:srgbClr val="E2E8F0"/>
+                      </a:solidFill>
+                      <a:prstDash val="solid"/>
+                      <a:round/>
+                      <a:headEnd type="none" w="med" len="med"/>
+                      <a:tailEnd type="none" w="med" len="med"/>
+                    </a:lnB>
+                    <a:solidFill>
+                      <a:srgbClr val="EEF2F8"/>
+                    </a:solidFill>
+                  </a:tcPr>
+                </a:tc>
+                <a:tc>
+                  <a:txBody>
+                    <a:bodyPr/>
+                    <a:lstStyle/>
+                    <a:p>
+                      <a:pPr algn="ctr" indent="0" marL="0">
+                        <a:buNone/>
+                      </a:pPr>
+                      <a:r>
+                        <a:rPr lang="en-US" sz="900" b="1" dirty="0">
+                          <a:solidFill>
+                            <a:srgbClr val="2DD4BF"/>
+                          </a:solidFill>
+                          <a:latin typeface="Calibri" pitchFamily="34" charset="0"/>
+                          <a:ea typeface="Calibri" pitchFamily="34" charset="-122"/>
+                          <a:cs typeface="Calibri" pitchFamily="34" charset="-120"/>
+                        </a:rPr>
+                        <a:t>Detection</a:t>
+                      </a:r>
+                      <a:endParaRPr lang="en-US" sz="900" dirty="0">
+                        <a:latin typeface="Calibri" charset="0"/>
+                        <a:ea typeface="Calibri" charset="0"/>
+                        <a:cs typeface="Calibri" charset="0"/>
+                      </a:endParaRPr>
+                    </a:p>
+                  </a:txBody>
+                  <a:tcPr marL="91440" marR="91440" marT="45720" marB="45720" anchor="ctr">
+                    <a:lnL w="9525" cap="flat" cmpd="sng" algn="ctr">
+                      <a:solidFill>
+                        <a:srgbClr val="E2E8F0"/>
+                      </a:solidFill>
+                      <a:prstDash val="solid"/>
+                      <a:round/>
+                      <a:headEnd type="none" w="med" len="med"/>
+                      <a:tailEnd type="none" w="med" len="med"/>
+                    </a:lnL>
+                    <a:lnR w="9525" cap="flat" cmpd="sng" algn="ctr">
+                      <a:solidFill>
+                        <a:srgbClr val="E2E8F0"/>
+                      </a:solidFill>
+                      <a:prstDash val="solid"/>
+                      <a:round/>
+                      <a:headEnd type="none" w="med" len="med"/>
+                      <a:tailEnd type="none" w="med" len="med"/>
+                    </a:lnR>
+                    <a:lnT w="9525" cap="flat" cmpd="sng" algn="ctr">
+                      <a:solidFill>
+                        <a:srgbClr val="E2E8F0"/>
+                      </a:solidFill>
+                      <a:prstDash val="solid"/>
+                      <a:round/>
+                      <a:headEnd type="none" w="med" len="med"/>
+                      <a:tailEnd type="none" w="med" len="med"/>
+                    </a:lnT>
+                    <a:lnB w="9525" cap="flat" cmpd="sng" algn="ctr">
+                      <a:solidFill>
+                        <a:srgbClr val="E2E8F0"/>
+                      </a:solidFill>
+                      <a:prstDash val="solid"/>
+                      <a:round/>
+                      <a:headEnd type="none" w="med" len="med"/>
+                      <a:tailEnd type="none" w="med" len="med"/>
+                    </a:lnB>
+                    <a:solidFill>
+                      <a:srgbClr val="EEF2F8"/>
+                    </a:solidFill>
+                  </a:tcPr>
+                </a:tc>
+              </a:tr>
+              <a:tr h="370332">
+                <a:tc>
+                  <a:txBody>
+                    <a:bodyPr/>
+                    <a:lstStyle/>
+                    <a:p>
+                      <a:pPr algn="ctr" indent="0" marL="0">
+                        <a:buNone/>
+                      </a:pPr>
+                      <a:r>
+                        <a:rPr lang="en-US" sz="1050" b="1" dirty="0">
+                          <a:solidFill>
+                            <a:srgbClr val="94A3B8"/>
+                          </a:solidFill>
+                          <a:latin typeface="Calibri" pitchFamily="34" charset="0"/>
+                          <a:ea typeface="Calibri" pitchFamily="34" charset="-122"/>
+                          <a:cs typeface="Calibri" pitchFamily="34" charset="-120"/>
+                        </a:rPr>
+                        <a:t>11</a:t>
+                      </a:r>
+                      <a:endParaRPr lang="en-US" sz="1050" dirty="0">
+                        <a:latin typeface="Calibri" charset="0"/>
+                        <a:ea typeface="Calibri" charset="0"/>
+                        <a:cs typeface="Calibri" charset="0"/>
+                      </a:endParaRPr>
+                    </a:p>
+                  </a:txBody>
+                  <a:tcPr marL="91440" marR="91440" marT="45720" marB="45720" anchor="ctr">
+                    <a:lnL w="9525" cap="flat" cmpd="sng" algn="ctr">
+                      <a:solidFill>
+                        <a:srgbClr val="E2E8F0"/>
+                      </a:solidFill>
+                      <a:prstDash val="solid"/>
+                      <a:round/>
+                      <a:headEnd type="none" w="med" len="med"/>
+                      <a:tailEnd type="none" w="med" len="med"/>
+                    </a:lnL>
+                    <a:lnR w="9525" cap="flat" cmpd="sng" algn="ctr">
+                      <a:solidFill>
+                        <a:srgbClr val="E2E8F0"/>
+                      </a:solidFill>
+                      <a:prstDash val="solid"/>
+                      <a:round/>
+                      <a:headEnd type="none" w="med" len="med"/>
+                      <a:tailEnd type="none" w="med" len="med"/>
+                    </a:lnR>
+                    <a:lnT w="9525" cap="flat" cmpd="sng" algn="ctr">
+                      <a:solidFill>
+                        <a:srgbClr val="E2E8F0"/>
+                      </a:solidFill>
+                      <a:prstDash val="solid"/>
+                      <a:round/>
+                      <a:headEnd type="none" w="med" len="med"/>
+                      <a:tailEnd type="none" w="med" len="med"/>
+                    </a:lnT>
+                    <a:lnB w="9525" cap="flat" cmpd="sng" algn="ctr">
+                      <a:solidFill>
+                        <a:srgbClr val="E2E8F0"/>
+                      </a:solidFill>
+                      <a:prstDash val="solid"/>
+                      <a:round/>
+                      <a:headEnd type="none" w="med" len="med"/>
+                      <a:tailEnd type="none" w="med" len="med"/>
+                    </a:lnB>
+                    <a:solidFill>
+                      <a:srgbClr val="FFFFFF"/>
+                    </a:solidFill>
+                  </a:tcPr>
+                </a:tc>
+                <a:tc>
+                  <a:txBody>
+                    <a:bodyPr/>
+                    <a:lstStyle/>
+                    <a:p>
+                      <a:pPr algn="l" indent="0" marL="0">
+                        <a:buNone/>
+                      </a:pPr>
+                      <a:r>
+                        <a:rPr lang="en-US" sz="1050" b="1" dirty="0">
+                          <a:solidFill>
+                            <a:srgbClr val="1E293B"/>
+                          </a:solidFill>
+                          <a:latin typeface="Calibri" pitchFamily="34" charset="0"/>
+                          <a:ea typeface="Calibri" pitchFamily="34" charset="-122"/>
+                          <a:cs typeface="Calibri" pitchFamily="34" charset="-120"/>
+                        </a:rPr>
+                        <a:t>Golden corpus from real PRs</a:t>
+                      </a:r>
+                      <a:endParaRPr lang="en-US" sz="1050" dirty="0">
+                        <a:latin typeface="Calibri" charset="0"/>
+                        <a:ea typeface="Calibri" charset="0"/>
+                        <a:cs typeface="Calibri" charset="0"/>
+                      </a:endParaRPr>
+                    </a:p>
+                  </a:txBody>
+                  <a:tcPr marL="76200" marR="50800" marT="25400" marB="25400" anchor="ctr">
+                    <a:lnL w="9525" cap="flat" cmpd="sng" algn="ctr">
+                      <a:solidFill>
+                        <a:srgbClr val="E2E8F0"/>
+                      </a:solidFill>
+                      <a:prstDash val="solid"/>
+                      <a:round/>
+                      <a:headEnd type="none" w="med" len="med"/>
+                      <a:tailEnd type="none" w="med" len="med"/>
+                    </a:lnL>
+                    <a:lnR w="9525" cap="flat" cmpd="sng" algn="ctr">
+                      <a:solidFill>
+                        <a:srgbClr val="E2E8F0"/>
+                      </a:solidFill>
+                      <a:prstDash val="solid"/>
+                      <a:round/>
+                      <a:headEnd type="none" w="med" len="med"/>
+                      <a:tailEnd type="none" w="med" len="med"/>
+                    </a:lnR>
+                    <a:lnT w="9525" cap="flat" cmpd="sng" algn="ctr">
+                      <a:solidFill>
+                        <a:srgbClr val="E2E8F0"/>
+                      </a:solidFill>
+                      <a:prstDash val="solid"/>
+                      <a:round/>
+                      <a:headEnd type="none" w="med" len="med"/>
+                      <a:tailEnd type="none" w="med" len="med"/>
+                    </a:lnT>
+                    <a:lnB w="9525" cap="flat" cmpd="sng" algn="ctr">
+                      <a:solidFill>
+                        <a:srgbClr val="E2E8F0"/>
+                      </a:solidFill>
+                      <a:prstDash val="solid"/>
+                      <a:round/>
+                      <a:headEnd type="none" w="med" len="med"/>
+                      <a:tailEnd type="none" w="med" len="med"/>
+                    </a:lnB>
+                    <a:solidFill>
+                      <a:srgbClr val="FFFFFF"/>
+                    </a:solidFill>
+                  </a:tcPr>
+                </a:tc>
+                <a:tc>
+                  <a:txBody>
+                    <a:bodyPr/>
+                    <a:lstStyle/>
+                    <a:p>
+                      <a:pPr algn="l" indent="0" marL="0">
+                        <a:buNone/>
+                      </a:pPr>
+                      <a:r>
+                        <a:rPr lang="en-US" sz="950" dirty="0">
+                          <a:solidFill>
+                            <a:srgbClr val="64748B"/>
+                          </a:solidFill>
+                          <a:latin typeface="Calibri" pitchFamily="34" charset="0"/>
+                          <a:ea typeface="Calibri" pitchFamily="34" charset="-122"/>
+                          <a:cs typeface="Calibri" pitchFamily="34" charset="-120"/>
+                        </a:rPr>
+                        <a:t>Grow the CI quality gate with anonymised production diffs</a:t>
+                      </a:r>
+                      <a:endParaRPr lang="en-US" sz="950" dirty="0">
+                        <a:latin typeface="Calibri" charset="0"/>
+                        <a:ea typeface="Calibri" charset="0"/>
+                        <a:cs typeface="Calibri" charset="0"/>
+                      </a:endParaRPr>
+                    </a:p>
+                  </a:txBody>
+                  <a:tcPr marL="76200" marR="50800" marT="25400" marB="25400" anchor="ctr">
+                    <a:lnL w="9525" cap="flat" cmpd="sng" algn="ctr">
+                      <a:solidFill>
+                        <a:srgbClr val="E2E8F0"/>
+                      </a:solidFill>
+                      <a:prstDash val="solid"/>
+                      <a:round/>
+                      <a:headEnd type="none" w="med" len="med"/>
+                      <a:tailEnd type="none" w="med" len="med"/>
+                    </a:lnL>
+                    <a:lnR w="9525" cap="flat" cmpd="sng" algn="ctr">
+                      <a:solidFill>
+                        <a:srgbClr val="E2E8F0"/>
+                      </a:solidFill>
+                      <a:prstDash val="solid"/>
+                      <a:round/>
+                      <a:headEnd type="none" w="med" len="med"/>
+                      <a:tailEnd type="none" w="med" len="med"/>
+                    </a:lnR>
+                    <a:lnT w="9525" cap="flat" cmpd="sng" algn="ctr">
+                      <a:solidFill>
+                        <a:srgbClr val="E2E8F0"/>
+                      </a:solidFill>
+                      <a:prstDash val="solid"/>
+                      <a:round/>
+                      <a:headEnd type="none" w="med" len="med"/>
+                      <a:tailEnd type="none" w="med" len="med"/>
+                    </a:lnT>
+                    <a:lnB w="9525" cap="flat" cmpd="sng" algn="ctr">
+                      <a:solidFill>
+                        <a:srgbClr val="E2E8F0"/>
+                      </a:solidFill>
+                      <a:prstDash val="solid"/>
+                      <a:round/>
+                      <a:headEnd type="none" w="med" len="med"/>
+                      <a:tailEnd type="none" w="med" len="med"/>
+                    </a:lnB>
+                    <a:solidFill>
+                      <a:srgbClr val="FFFFFF"/>
+                    </a:solidFill>
+                  </a:tcPr>
+                </a:tc>
+                <a:tc>
+                  <a:txBody>
+                    <a:bodyPr/>
+                    <a:lstStyle/>
+                    <a:p>
+                      <a:pPr algn="ctr" indent="0" marL="0">
+                        <a:buNone/>
+                      </a:pPr>
+                      <a:r>
+                        <a:rPr lang="en-US" sz="900" b="1" dirty="0">
+                          <a:solidFill>
+                            <a:srgbClr val="2DD4BF"/>
+                          </a:solidFill>
+                          <a:latin typeface="Calibri" pitchFamily="34" charset="0"/>
+                          <a:ea typeface="Calibri" pitchFamily="34" charset="-122"/>
+                          <a:cs typeface="Calibri" pitchFamily="34" charset="-120"/>
+                        </a:rPr>
+                        <a:t>Detection</a:t>
+                      </a:r>
+                      <a:endParaRPr lang="en-US" sz="900" dirty="0">
+                        <a:latin typeface="Calibri" charset="0"/>
+                        <a:ea typeface="Calibri" charset="0"/>
+                        <a:cs typeface="Calibri" charset="0"/>
+                      </a:endParaRPr>
+                    </a:p>
+                  </a:txBody>
+                  <a:tcPr marL="91440" marR="91440" marT="45720" marB="45720" anchor="ctr">
+                    <a:lnL w="9525" cap="flat" cmpd="sng" algn="ctr">
+                      <a:solidFill>
+                        <a:srgbClr val="E2E8F0"/>
+                      </a:solidFill>
+                      <a:prstDash val="solid"/>
+                      <a:round/>
+                      <a:headEnd type="none" w="med" len="med"/>
+                      <a:tailEnd type="none" w="med" len="med"/>
+                    </a:lnL>
+                    <a:lnR w="9525" cap="flat" cmpd="sng" algn="ctr">
+                      <a:solidFill>
+                        <a:srgbClr val="E2E8F0"/>
+                      </a:solidFill>
+                      <a:prstDash val="solid"/>
+                      <a:round/>
+                      <a:headEnd type="none" w="med" len="med"/>
+                      <a:tailEnd type="none" w="med" len="med"/>
+                    </a:lnR>
+                    <a:lnT w="9525" cap="flat" cmpd="sng" algn="ctr">
+                      <a:solidFill>
+                        <a:srgbClr val="E2E8F0"/>
+                      </a:solidFill>
+                      <a:prstDash val="solid"/>
+                      <a:round/>
+                      <a:headEnd type="none" w="med" len="med"/>
+                      <a:tailEnd type="none" w="med" len="med"/>
+                    </a:lnT>
+                    <a:lnB w="9525" cap="flat" cmpd="sng" algn="ctr">
+                      <a:solidFill>
+                        <a:srgbClr val="E2E8F0"/>
+                      </a:solidFill>
+                      <a:prstDash val="solid"/>
+                      <a:round/>
+                      <a:headEnd type="none" w="med" len="med"/>
+                      <a:tailEnd type="none" w="med" len="med"/>
+                    </a:lnB>
+                    <a:solidFill>
+                      <a:srgbClr val="FFFFFF"/>
+                    </a:solidFill>
+                  </a:tcPr>
+                </a:tc>
+              </a:tr>
+              <a:tr h="370332">
+                <a:tc>
+                  <a:txBody>
+                    <a:bodyPr/>
+                    <a:lstStyle/>
+                    <a:p>
+                      <a:pPr algn="ctr" indent="0" marL="0">
+                        <a:buNone/>
+                      </a:pPr>
+                      <a:r>
+                        <a:rPr lang="en-US" sz="1050" b="1" dirty="0">
+                          <a:solidFill>
+                            <a:srgbClr val="94A3B8"/>
+                          </a:solidFill>
+                          <a:latin typeface="Calibri" pitchFamily="34" charset="0"/>
+                          <a:ea typeface="Calibri" pitchFamily="34" charset="-122"/>
+                          <a:cs typeface="Calibri" pitchFamily="34" charset="-120"/>
+                        </a:rPr>
+                        <a:t>12</a:t>
+                      </a:r>
+                      <a:endParaRPr lang="en-US" sz="1050" dirty="0">
+                        <a:latin typeface="Calibri" charset="0"/>
+                        <a:ea typeface="Calibri" charset="0"/>
+                        <a:cs typeface="Calibri" charset="0"/>
+                      </a:endParaRPr>
+                    </a:p>
+                  </a:txBody>
+                  <a:tcPr marL="91440" marR="91440" marT="45720" marB="45720" anchor="ctr">
+                    <a:lnL w="9525" cap="flat" cmpd="sng" algn="ctr">
+                      <a:solidFill>
+                        <a:srgbClr val="E2E8F0"/>
+                      </a:solidFill>
+                      <a:prstDash val="solid"/>
+                      <a:round/>
+                      <a:headEnd type="none" w="med" len="med"/>
+                      <a:tailEnd type="none" w="med" len="med"/>
+                    </a:lnL>
+                    <a:lnR w="9525" cap="flat" cmpd="sng" algn="ctr">
+                      <a:solidFill>
+                        <a:srgbClr val="E2E8F0"/>
+                      </a:solidFill>
+                      <a:prstDash val="solid"/>
+                      <a:round/>
+                      <a:headEnd type="none" w="med" len="med"/>
+                      <a:tailEnd type="none" w="med" len="med"/>
+                    </a:lnR>
+                    <a:lnT w="9525" cap="flat" cmpd="sng" algn="ctr">
+                      <a:solidFill>
+                        <a:srgbClr val="E2E8F0"/>
+                      </a:solidFill>
+                      <a:prstDash val="solid"/>
+                      <a:round/>
+                      <a:headEnd type="none" w="med" len="med"/>
+                      <a:tailEnd type="none" w="med" len="med"/>
+                    </a:lnT>
+                    <a:lnB w="9525" cap="flat" cmpd="sng" algn="ctr">
+                      <a:solidFill>
+                        <a:srgbClr val="E2E8F0"/>
+                      </a:solidFill>
+                      <a:prstDash val="solid"/>
+                      <a:round/>
+                      <a:headEnd type="none" w="med" len="med"/>
+                      <a:tailEnd type="none" w="med" len="med"/>
+                    </a:lnB>
+                    <a:solidFill>
+                      <a:srgbClr val="EEF2F8"/>
+                    </a:solidFill>
+                  </a:tcPr>
+                </a:tc>
+                <a:tc>
+                  <a:txBody>
+                    <a:bodyPr/>
+                    <a:lstStyle/>
+                    <a:p>
+                      <a:pPr algn="l" indent="0" marL="0">
+                        <a:buNone/>
+                      </a:pPr>
+                      <a:r>
+                        <a:rPr lang="en-US" sz="1050" b="1" dirty="0">
+                          <a:solidFill>
+                            <a:srgbClr val="1E293B"/>
+                          </a:solidFill>
+                          <a:latin typeface="Calibri" pitchFamily="34" charset="0"/>
+                          <a:ea typeface="Calibri" pitchFamily="34" charset="-122"/>
+                          <a:cs typeface="Calibri" pitchFamily="34" charset="-120"/>
+                        </a:rPr>
+                        <a:t>OPA gate policies · SLO dashboards · Helm/canary</a:t>
+                      </a:r>
+                      <a:endParaRPr lang="en-US" sz="1050" dirty="0">
+                        <a:latin typeface="Calibri" charset="0"/>
+                        <a:ea typeface="Calibri" charset="0"/>
+                        <a:cs typeface="Calibri" charset="0"/>
+                      </a:endParaRPr>
+                    </a:p>
+                  </a:txBody>
+                  <a:tcPr marL="76200" marR="50800" marT="25400" marB="25400" anchor="ctr">
+                    <a:lnL w="9525" cap="flat" cmpd="sng" algn="ctr">
+                      <a:solidFill>
+                        <a:srgbClr val="E2E8F0"/>
+                      </a:solidFill>
+                      <a:prstDash val="solid"/>
+                      <a:round/>
+                      <a:headEnd type="none" w="med" len="med"/>
+                      <a:tailEnd type="none" w="med" len="med"/>
+                    </a:lnL>
+                    <a:lnR w="9525" cap="flat" cmpd="sng" algn="ctr">
+                      <a:solidFill>
+                        <a:srgbClr val="E2E8F0"/>
+                      </a:solidFill>
+                      <a:prstDash val="solid"/>
+                      <a:round/>
+                      <a:headEnd type="none" w="med" len="med"/>
+                      <a:tailEnd type="none" w="med" len="med"/>
+                    </a:lnR>
+                    <a:lnT w="9525" cap="flat" cmpd="sng" algn="ctr">
+                      <a:solidFill>
+                        <a:srgbClr val="E2E8F0"/>
+                      </a:solidFill>
+                      <a:prstDash val="solid"/>
+                      <a:round/>
+                      <a:headEnd type="none" w="med" len="med"/>
+                      <a:tailEnd type="none" w="med" len="med"/>
+                    </a:lnT>
+                    <a:lnB w="9525" cap="flat" cmpd="sng" algn="ctr">
+                      <a:solidFill>
+                        <a:srgbClr val="E2E8F0"/>
+                      </a:solidFill>
+                      <a:prstDash val="solid"/>
+                      <a:round/>
+                      <a:headEnd type="none" w="med" len="med"/>
+                      <a:tailEnd type="none" w="med" len="med"/>
+                    </a:lnB>
+                    <a:solidFill>
+                      <a:srgbClr val="EEF2F8"/>
+                    </a:solidFill>
+                  </a:tcPr>
+                </a:tc>
+                <a:tc>
+                  <a:txBody>
+                    <a:bodyPr/>
+                    <a:lstStyle/>
+                    <a:p>
+                      <a:pPr algn="l" indent="0" marL="0">
+                        <a:buNone/>
+                      </a:pPr>
+                      <a:r>
+                        <a:rPr lang="en-US" sz="950" dirty="0">
+                          <a:solidFill>
+                            <a:srgbClr val="64748B"/>
+                          </a:solidFill>
+                          <a:latin typeface="Calibri" pitchFamily="34" charset="0"/>
+                          <a:ea typeface="Calibri" pitchFamily="34" charset="-122"/>
+                          <a:cs typeface="Calibri" pitchFamily="34" charset="-120"/>
+                        </a:rPr>
+                        <a:t>Policy-as-code per team, Grafana SLOs, progressive deploys</a:t>
+                      </a:r>
+                      <a:endParaRPr lang="en-US" sz="950" dirty="0">
+                        <a:latin typeface="Calibri" charset="0"/>
+                        <a:ea typeface="Calibri" charset="0"/>
+                        <a:cs typeface="Calibri" charset="0"/>
+                      </a:endParaRPr>
+                    </a:p>
+                  </a:txBody>
+                  <a:tcPr marL="76200" marR="50800" marT="25400" marB="25400" anchor="ctr">
+                    <a:lnL w="9525" cap="flat" cmpd="sng" algn="ctr">
+                      <a:solidFill>
+                        <a:srgbClr val="E2E8F0"/>
+                      </a:solidFill>
+                      <a:prstDash val="solid"/>
+                      <a:round/>
+                      <a:headEnd type="none" w="med" len="med"/>
+                      <a:tailEnd type="none" w="med" len="med"/>
+                    </a:lnL>
+                    <a:lnR w="9525" cap="flat" cmpd="sng" algn="ctr">
+                      <a:solidFill>
+                        <a:srgbClr val="E2E8F0"/>
+                      </a:solidFill>
+                      <a:prstDash val="solid"/>
+                      <a:round/>
+                      <a:headEnd type="none" w="med" len="med"/>
+                      <a:tailEnd type="none" w="med" len="med"/>
+                    </a:lnR>
+                    <a:lnT w="9525" cap="flat" cmpd="sng" algn="ctr">
+                      <a:solidFill>
+                        <a:srgbClr val="E2E8F0"/>
+                      </a:solidFill>
+                      <a:prstDash val="solid"/>
+                      <a:round/>
+                      <a:headEnd type="none" w="med" len="med"/>
+                      <a:tailEnd type="none" w="med" len="med"/>
+                    </a:lnT>
+                    <a:lnB w="9525" cap="flat" cmpd="sng" algn="ctr">
+                      <a:solidFill>
+                        <a:srgbClr val="E2E8F0"/>
+                      </a:solidFill>
+                      <a:prstDash val="solid"/>
+                      <a:round/>
+                      <a:headEnd type="none" w="med" len="med"/>
+                      <a:tailEnd type="none" w="med" len="med"/>
+                    </a:lnB>
+                    <a:solidFill>
+                      <a:srgbClr val="EEF2F8"/>
+                    </a:solidFill>
+                  </a:tcPr>
+                </a:tc>
+                <a:tc>
+                  <a:txBody>
+                    <a:bodyPr/>
+                    <a:lstStyle/>
+                    <a:p>
+                      <a:pPr algn="ctr" indent="0" marL="0">
+                        <a:buNone/>
+                      </a:pPr>
+                      <a:r>
+                        <a:rPr lang="en-US" sz="900" b="1" dirty="0">
+                          <a:solidFill>
+                            <a:srgbClr val="16A34A"/>
+                          </a:solidFill>
+                          <a:latin typeface="Calibri" pitchFamily="34" charset="0"/>
+                          <a:ea typeface="Calibri" pitchFamily="34" charset="-122"/>
+                          <a:cs typeface="Calibri" pitchFamily="34" charset="-120"/>
+                        </a:rPr>
+                        <a:t>Operations</a:t>
+                      </a:r>
+                      <a:endParaRPr lang="en-US" sz="900" dirty="0">
+                        <a:latin typeface="Calibri" charset="0"/>
+                        <a:ea typeface="Calibri" charset="0"/>
+                        <a:cs typeface="Calibri" charset="0"/>
+                      </a:endParaRPr>
+                    </a:p>
+                  </a:txBody>
+                  <a:tcPr marL="91440" marR="91440" marT="45720" marB="45720" anchor="ctr">
+                    <a:lnL w="9525" cap="flat" cmpd="sng" algn="ctr">
+                      <a:solidFill>
+                        <a:srgbClr val="E2E8F0"/>
+                      </a:solidFill>
+                      <a:prstDash val="solid"/>
+                      <a:round/>
+                      <a:headEnd type="none" w="med" len="med"/>
+                      <a:tailEnd type="none" w="med" len="med"/>
+                    </a:lnL>
+                    <a:lnR w="9525" cap="flat" cmpd="sng" algn="ctr">
+                      <a:solidFill>
+                        <a:srgbClr val="E2E8F0"/>
+                      </a:solidFill>
+                      <a:prstDash val="solid"/>
+                      <a:round/>
+                      <a:headEnd type="none" w="med" len="med"/>
+                      <a:tailEnd type="none" w="med" len="med"/>
+                    </a:lnR>
+                    <a:lnT w="9525" cap="flat" cmpd="sng" algn="ctr">
+                      <a:solidFill>
+                        <a:srgbClr val="E2E8F0"/>
+                      </a:solidFill>
+                      <a:prstDash val="solid"/>
+                      <a:round/>
+                      <a:headEnd type="none" w="med" len="med"/>
+                      <a:tailEnd type="none" w="med" len="med"/>
+                    </a:lnT>
+                    <a:lnB w="9525" cap="flat" cmpd="sng" algn="ctr">
+                      <a:solidFill>
+                        <a:srgbClr val="E2E8F0"/>
+                      </a:solidFill>
+                      <a:prstDash val="solid"/>
+                      <a:round/>
+                      <a:headEnd type="none" w="med" len="med"/>
+                      <a:tailEnd type="none" w="med" len="med"/>
+                    </a:lnB>
+                    <a:solidFill>
+                      <a:srgbClr val="EEF2F8"/>
+                    </a:solidFill>
+                  </a:tcPr>
+                </a:tc>
+              </a:tr>
+            </a:tbl>
+          </a:graphicData>
+        </a:graphic>
+      </p:graphicFrame>
+      <p:sp>
+        <p:nvSpPr>
+          <p:cNvPr id="25" name="Slide Number Placeholder 0"/>
+          <p:cNvSpPr>
+            <a:spLocks noGrp="1"/>
+          </p:cNvSpPr>
+          <p:nvPr>
+            <p:ph type="sldNum" sz="quarter" idx="4294967295"/>
+          </p:nvPr>
+        </p:nvSpPr>
+        <p:spPr>
+          <a:xfrm>
+            <a:off x="11430000" y="6437376"/>
+            <a:ext cx="640080" cy="274320"/>
+          </a:xfrm>
+          <a:prstGeom prst="rect">
+            <a:avLst/>
+          </a:prstGeom>
+          <a:extLst>
+            <a:ext uri="{C572A759-6A51-4108-AA02-DFA0A04FC94B}">
+              <ma14:wrappingTextBoxFlag xmlns:ma14="http://schemas.microsoft.com/office/mac/drawingml/2011/main" val="0"/>
+            </a:ext>
+          </a:extLst>
+        </p:spPr>
+        <p:txBody>
+          <a:bodyPr/>
+          <a:lstStyle>
+            <a:lvl1pPr>
+              <a:defRPr sz="900">
+                <a:solidFill>
+                  <a:srgbClr val="94A3B8"/>
+                </a:solidFill>
+                <a:latin typeface="Calibri"/>
+                <a:ea typeface="Calibri"/>
+                <a:cs typeface="Calibri"/>
+              </a:defRPr>
+            </a:lvl1pPr>
+          </a:lstStyle>
+          <a:p>
+            <a:pPr algn="r"/>
+            <a:fld id="{F7021451-1387-4CA6-816F-3879F97B5CBC}" type="slidenum">
+              <a:rPr b="0" lang="en-US"/>
+              <a:t>19</a:t>
             </a:fld>
             <a:endParaRPr lang="en-US"/>
           </a:p>
@@ -14677,6 +19887,405 @@
 </p:sld>
 </file>
 
+<file path=ppt/slides/slide20.xml><?xml version="1.0" encoding="utf-8"?>
+<p:sld xmlns:a="http://schemas.openxmlformats.org/drawingml/2006/main" xmlns:r="http://schemas.openxmlformats.org/officeDocument/2006/relationships" xmlns:p="http://schemas.openxmlformats.org/presentationml/2006/main">
+  <p:cSld name="Slide 20">
+    <p:bg>
+      <p:bgPr>
+        <a:solidFill>
+          <a:srgbClr val="0E1A33"/>
+        </a:solidFill>
+      </p:bgPr>
+    </p:bg>
+    <p:spTree>
+      <p:nvGrpSpPr>
+        <p:cNvPr id="1" name=""/>
+        <p:cNvGrpSpPr/>
+        <p:nvPr/>
+      </p:nvGrpSpPr>
+      <p:grpSpPr>
+        <a:xfrm>
+          <a:off x="0" y="0"/>
+          <a:ext cx="0" cy="0"/>
+          <a:chOff x="0" y="0"/>
+          <a:chExt cx="0" cy="0"/>
+        </a:xfrm>
+      </p:grpSpPr>
+      <p:sp>
+        <p:nvSpPr>
+          <p:cNvPr id="2" name="Shape 0"/>
+          <p:cNvSpPr/>
+          <p:nvPr/>
+        </p:nvSpPr>
+        <p:spPr>
+          <a:xfrm>
+            <a:off x="0" y="0"/>
+            <a:ext cx="12191695" cy="164592"/>
+          </a:xfrm>
+          <a:prstGeom prst="rect">
+            <a:avLst/>
+          </a:prstGeom>
+          <a:solidFill>
+            <a:srgbClr val="2DD4BF"/>
+          </a:solidFill>
+          <a:ln/>
+        </p:spPr>
+      </p:sp>
+      <p:sp>
+        <p:nvSpPr>
+          <p:cNvPr id="3" name="Text 1"/>
+          <p:cNvSpPr/>
+          <p:nvPr/>
+        </p:nvSpPr>
+        <p:spPr>
+          <a:xfrm>
+            <a:off x="594360" y="2057400"/>
+            <a:ext cx="11002975" cy="1005840"/>
+          </a:xfrm>
+          <a:prstGeom prst="rect">
+            <a:avLst/>
+          </a:prstGeom>
+          <a:noFill/>
+          <a:ln/>
+        </p:spPr>
+        <p:txBody>
+          <a:bodyPr wrap="square" lIns="0" tIns="0" rIns="0" bIns="0" rtlCol="0" anchor="ctr"/>
+          <a:lstStyle/>
+          <a:p>
+            <a:pPr algn="ctr" indent="0" marL="0">
+              <a:buNone/>
+            </a:pPr>
+            <a:r>
+              <a:rPr lang="en-US" sz="3600" b="1" dirty="0">
+                <a:solidFill>
+                  <a:srgbClr val="FFFFFF"/>
+                </a:solidFill>
+                <a:latin typeface="Georgia" pitchFamily="34" charset="0"/>
+                <a:ea typeface="Georgia" pitchFamily="34" charset="-122"/>
+                <a:cs typeface="Georgia" pitchFamily="34" charset="-120"/>
+              </a:rPr>
+              <a:t>Catch production issues before they merge</a:t>
+            </a:r>
+            <a:endParaRPr lang="en-US" sz="3600" dirty="0"/>
+          </a:p>
+        </p:txBody>
+      </p:sp>
+      <p:sp>
+        <p:nvSpPr>
+          <p:cNvPr id="4" name="Text 2"/>
+          <p:cNvSpPr/>
+          <p:nvPr/>
+        </p:nvSpPr>
+        <p:spPr>
+          <a:xfrm>
+            <a:off x="1371600" y="3246120"/>
+            <a:ext cx="9448495" cy="914400"/>
+          </a:xfrm>
+          <a:prstGeom prst="rect">
+            <a:avLst/>
+          </a:prstGeom>
+          <a:noFill/>
+          <a:ln/>
+        </p:spPr>
+        <p:txBody>
+          <a:bodyPr wrap="square" lIns="0" tIns="0" rIns="0" bIns="0" rtlCol="0" anchor="ctr"/>
+          <a:lstStyle/>
+          <a:p>
+            <a:pPr algn="ctr" indent="0" marL="0">
+              <a:lnSpc>
+                <a:spcPct val="115000"/>
+              </a:lnSpc>
+              <a:buNone/>
+            </a:pPr>
+            <a:r>
+              <a:rPr lang="en-US" sz="1500" dirty="0">
+                <a:solidFill>
+                  <a:srgbClr val="CADCFC"/>
+                </a:solidFill>
+                <a:latin typeface="Calibri" pitchFamily="34" charset="0"/>
+                <a:ea typeface="Calibri" pitchFamily="34" charset="-122"/>
+                <a:cs typeface="Calibri" pitchFamily="34" charset="-120"/>
+              </a:rPr>
+              <a:t>CIAA turns every Pull Request into a deep, consistent, evidence-backed review —</a:t>
+            </a:r>
+            <a:endParaRPr lang="en-US" sz="1500" dirty="0"/>
+          </a:p>
+          <a:p>
+            <a:pPr algn="ctr" indent="0" marL="0">
+              <a:lnSpc>
+                <a:spcPct val="115000"/>
+              </a:lnSpc>
+              <a:buNone/>
+            </a:pPr>
+            <a:r>
+              <a:rPr lang="en-US" sz="1500" dirty="0">
+                <a:solidFill>
+                  <a:srgbClr val="CADCFC"/>
+                </a:solidFill>
+                <a:latin typeface="Calibri" pitchFamily="34" charset="0"/>
+                <a:ea typeface="Calibri" pitchFamily="34" charset="-122"/>
+                <a:cs typeface="Calibri" pitchFamily="34" charset="-120"/>
+              </a:rPr>
+              <a:t>combining real impact analysis with a deterministic merge gate, at PR scale.</a:t>
+            </a:r>
+            <a:endParaRPr lang="en-US" sz="1500" dirty="0"/>
+          </a:p>
+        </p:txBody>
+      </p:sp>
+      <p:sp>
+        <p:nvSpPr>
+          <p:cNvPr id="5" name="Shape 3"/>
+          <p:cNvSpPr/>
+          <p:nvPr/>
+        </p:nvSpPr>
+        <p:spPr>
+          <a:xfrm>
+            <a:off x="2264512" y="4526280"/>
+            <a:ext cx="1865376" cy="457200"/>
+          </a:xfrm>
+          <a:prstGeom prst="roundRect">
+            <a:avLst>
+              <a:gd name="adj" fmla="val 50000"/>
+            </a:avLst>
+          </a:prstGeom>
+          <a:solidFill>
+            <a:srgbClr val="16243F"/>
+          </a:solidFill>
+          <a:ln w="12700">
+            <a:solidFill>
+              <a:srgbClr val="2DD4BF"/>
+            </a:solidFill>
+            <a:prstDash val="solid"/>
+          </a:ln>
+        </p:spPr>
+      </p:sp>
+      <p:sp>
+        <p:nvSpPr>
+          <p:cNvPr id="6" name="Text 4"/>
+          <p:cNvSpPr/>
+          <p:nvPr/>
+        </p:nvSpPr>
+        <p:spPr>
+          <a:xfrm>
+            <a:off x="2264512" y="4526280"/>
+            <a:ext cx="1865376" cy="457200"/>
+          </a:xfrm>
+          <a:prstGeom prst="rect">
+            <a:avLst/>
+          </a:prstGeom>
+          <a:noFill/>
+          <a:ln/>
+        </p:spPr>
+        <p:txBody>
+          <a:bodyPr wrap="square" lIns="0" tIns="0" rIns="0" bIns="0" rtlCol="0" anchor="ctr"/>
+          <a:lstStyle/>
+          <a:p>
+            <a:pPr algn="ctr" indent="0" marL="0">
+              <a:buNone/>
+            </a:pPr>
+            <a:r>
+              <a:rPr lang="en-US" sz="1250" b="1" dirty="0">
+                <a:solidFill>
+                  <a:srgbClr val="2DD4BF"/>
+                </a:solidFill>
+                <a:latin typeface="Calibri" pitchFamily="34" charset="0"/>
+                <a:ea typeface="Calibri" pitchFamily="34" charset="-122"/>
+                <a:cs typeface="Calibri" pitchFamily="34" charset="-120"/>
+              </a:rPr>
+              <a:t>Deep PR Review</a:t>
+            </a:r>
+            <a:endParaRPr lang="en-US" sz="1250" dirty="0"/>
+          </a:p>
+        </p:txBody>
+      </p:sp>
+      <p:sp>
+        <p:nvSpPr>
+          <p:cNvPr id="7" name="Shape 5"/>
+          <p:cNvSpPr/>
+          <p:nvPr/>
+        </p:nvSpPr>
+        <p:spPr>
+          <a:xfrm>
+            <a:off x="4358488" y="4526280"/>
+            <a:ext cx="2468880" cy="457200"/>
+          </a:xfrm>
+          <a:prstGeom prst="roundRect">
+            <a:avLst>
+              <a:gd name="adj" fmla="val 50000"/>
+            </a:avLst>
+          </a:prstGeom>
+          <a:solidFill>
+            <a:srgbClr val="16243F"/>
+          </a:solidFill>
+          <a:ln w="12700">
+            <a:solidFill>
+              <a:srgbClr val="2DD4BF"/>
+            </a:solidFill>
+            <a:prstDash val="solid"/>
+          </a:ln>
+        </p:spPr>
+      </p:sp>
+      <p:sp>
+        <p:nvSpPr>
+          <p:cNvPr id="8" name="Text 6"/>
+          <p:cNvSpPr/>
+          <p:nvPr/>
+        </p:nvSpPr>
+        <p:spPr>
+          <a:xfrm>
+            <a:off x="4358488" y="4526280"/>
+            <a:ext cx="2468880" cy="457200"/>
+          </a:xfrm>
+          <a:prstGeom prst="rect">
+            <a:avLst/>
+          </a:prstGeom>
+          <a:noFill/>
+          <a:ln/>
+        </p:spPr>
+        <p:txBody>
+          <a:bodyPr wrap="square" lIns="0" tIns="0" rIns="0" bIns="0" rtlCol="0" anchor="ctr"/>
+          <a:lstStyle/>
+          <a:p>
+            <a:pPr algn="ctr" indent="0" marL="0">
+              <a:buNone/>
+            </a:pPr>
+            <a:r>
+              <a:rPr lang="en-US" sz="1250" b="1" dirty="0">
+                <a:solidFill>
+                  <a:srgbClr val="2DD4BF"/>
+                </a:solidFill>
+                <a:latin typeface="Calibri" pitchFamily="34" charset="0"/>
+                <a:ea typeface="Calibri" pitchFamily="34" charset="-122"/>
+                <a:cs typeface="Calibri" pitchFamily="34" charset="-120"/>
+              </a:rPr>
+              <a:t>Real Impact Analysis</a:t>
+            </a:r>
+            <a:endParaRPr lang="en-US" sz="1250" dirty="0"/>
+          </a:p>
+        </p:txBody>
+      </p:sp>
+      <p:sp>
+        <p:nvSpPr>
+          <p:cNvPr id="9" name="Shape 7"/>
+          <p:cNvSpPr/>
+          <p:nvPr/>
+        </p:nvSpPr>
+        <p:spPr>
+          <a:xfrm>
+            <a:off x="7055968" y="4526280"/>
+            <a:ext cx="2871216" cy="457200"/>
+          </a:xfrm>
+          <a:prstGeom prst="roundRect">
+            <a:avLst>
+              <a:gd name="adj" fmla="val 50000"/>
+            </a:avLst>
+          </a:prstGeom>
+          <a:solidFill>
+            <a:srgbClr val="16243F"/>
+          </a:solidFill>
+          <a:ln w="12700">
+            <a:solidFill>
+              <a:srgbClr val="2DD4BF"/>
+            </a:solidFill>
+            <a:prstDash val="solid"/>
+          </a:ln>
+        </p:spPr>
+      </p:sp>
+      <p:sp>
+        <p:nvSpPr>
+          <p:cNvPr id="10" name="Text 8"/>
+          <p:cNvSpPr/>
+          <p:nvPr/>
+        </p:nvSpPr>
+        <p:spPr>
+          <a:xfrm>
+            <a:off x="7055968" y="4526280"/>
+            <a:ext cx="2871216" cy="457200"/>
+          </a:xfrm>
+          <a:prstGeom prst="rect">
+            <a:avLst/>
+          </a:prstGeom>
+          <a:noFill/>
+          <a:ln/>
+        </p:spPr>
+        <p:txBody>
+          <a:bodyPr wrap="square" lIns="0" tIns="0" rIns="0" bIns="0" rtlCol="0" anchor="ctr"/>
+          <a:lstStyle/>
+          <a:p>
+            <a:pPr algn="ctr" indent="0" marL="0">
+              <a:buNone/>
+            </a:pPr>
+            <a:r>
+              <a:rPr lang="en-US" sz="1250" b="1" dirty="0">
+                <a:solidFill>
+                  <a:srgbClr val="2DD4BF"/>
+                </a:solidFill>
+                <a:latin typeface="Calibri" pitchFamily="34" charset="0"/>
+                <a:ea typeface="Calibri" pitchFamily="34" charset="-122"/>
+                <a:cs typeface="Calibri" pitchFamily="34" charset="-120"/>
+              </a:rPr>
+              <a:t>Deterministic Governance</a:t>
+            </a:r>
+            <a:endParaRPr lang="en-US" sz="1250" dirty="0"/>
+          </a:p>
+        </p:txBody>
+      </p:sp>
+      <p:sp>
+        <p:nvSpPr>
+          <p:cNvPr id="25" name="Slide Number Placeholder 0"/>
+          <p:cNvSpPr>
+            <a:spLocks noGrp="1"/>
+          </p:cNvSpPr>
+          <p:nvPr>
+            <p:ph type="sldNum" sz="quarter" idx="4294967295"/>
+          </p:nvPr>
+        </p:nvSpPr>
+        <p:spPr>
+          <a:xfrm>
+            <a:off x="11430000" y="6437376"/>
+            <a:ext cx="640080" cy="274320"/>
+          </a:xfrm>
+          <a:prstGeom prst="rect">
+            <a:avLst/>
+          </a:prstGeom>
+          <a:extLst>
+            <a:ext uri="{C572A759-6A51-4108-AA02-DFA0A04FC94B}">
+              <ma14:wrappingTextBoxFlag xmlns:ma14="http://schemas.microsoft.com/office/mac/drawingml/2011/main" val="0"/>
+            </a:ext>
+          </a:extLst>
+        </p:spPr>
+        <p:txBody>
+          <a:bodyPr/>
+          <a:lstStyle>
+            <a:lvl1pPr>
+              <a:defRPr sz="900">
+                <a:solidFill>
+                  <a:srgbClr val="94A3B8"/>
+                </a:solidFill>
+                <a:latin typeface="Calibri"/>
+                <a:ea typeface="Calibri"/>
+                <a:cs typeface="Calibri"/>
+              </a:defRPr>
+            </a:lvl1pPr>
+          </a:lstStyle>
+          <a:p>
+            <a:pPr algn="r"/>
+            <a:fld id="{F7021451-1387-4CA6-816F-3879F97B5CBC}" type="slidenum">
+              <a:rPr b="0" lang="en-US"/>
+              <a:t>20</a:t>
+            </a:fld>
+            <a:endParaRPr lang="en-US"/>
+          </a:p>
+        </p:txBody>
+      </p:sp>
+    </p:spTree>
+  </p:cSld>
+  <p:clrMapOvr>
+    <a:masterClrMapping/>
+  </p:clrMapOvr>
+</p:sld>
+</file>
+
 <file path=ppt/slides/slide3.xml><?xml version="1.0" encoding="utf-8"?>
 <p:sld xmlns:a="http://schemas.openxmlformats.org/drawingml/2006/main" xmlns:r="http://schemas.openxmlformats.org/officeDocument/2006/relationships" xmlns:p="http://schemas.openxmlformats.org/presentationml/2006/main">
   <p:cSld name="Slide 3">
@@ -16579,6 +22188,34 @@
                 <a:ea typeface="Calibri" pitchFamily="34" charset="-122"/>
                 <a:cs typeface="Calibri" pitchFamily="34" charset="-120"/>
               </a:rPr>
+              <a:t>Correlated</a:t>
+            </a:r>
+            <a:pPr algn="ctr" indent="0" marL="0">
+              <a:buNone/>
+            </a:pPr>
+            <a:r>
+              <a:rPr lang="en-US" sz="1200" dirty="0">
+                <a:solidFill>
+                  <a:srgbClr val="64748B"/>
+                </a:solidFill>
+                <a:latin typeface="Calibri" pitchFamily="34" charset="0"/>
+                <a:ea typeface="Calibri" pitchFamily="34" charset="-122"/>
+                <a:cs typeface="Calibri" pitchFamily="34" charset="-120"/>
+              </a:rPr>
+              <a:t> (cross-agent dedupe → ranked Top Issues)     •     </a:t>
+            </a:r>
+            <a:pPr algn="ctr" indent="0" marL="0">
+              <a:buNone/>
+            </a:pPr>
+            <a:r>
+              <a:rPr lang="en-US" sz="1200" b="1" dirty="0">
+                <a:solidFill>
+                  <a:srgbClr val="1E293B"/>
+                </a:solidFill>
+                <a:latin typeface="Calibri" pitchFamily="34" charset="0"/>
+                <a:ea typeface="Calibri" pitchFamily="34" charset="-122"/>
+                <a:cs typeface="Calibri" pitchFamily="34" charset="-120"/>
+              </a:rPr>
               <a:t>Self-improving</a:t>
             </a:r>
             <a:pPr algn="ctr" indent="0" marL="0">
@@ -19387,7 +25024,7 @@
                 <a:ea typeface="Calibri" pitchFamily="34" charset="-122"/>
                 <a:cs typeface="Calibri" pitchFamily="34" charset="-120"/>
               </a:rPr>
-              <a:t>Reads the Abstract Syntax Tree to flag dead code, null-dereference risk, type confusion and complexity — without running the code.</a:t>
+              <a:t>Parses real syntax trees (tree-sitter: Java, Kotlin, C#, JS/TS, Go + Python) to measure exact complexity and flag dead code, null risk and type confusion — without running the code.</a:t>
             </a:r>
             <a:endParaRPr lang="en-US" sz="1030" dirty="0"/>
           </a:p>
@@ -20672,7 +26309,7 @@
                 <a:ea typeface="Calibri" pitchFamily="34" charset="-122"/>
                 <a:cs typeface="Calibri" pitchFamily="34" charset="-120"/>
               </a:rPr>
-              <a:t>RAG context</a:t>
+              <a:t>Cross-agent correlation</a:t>
             </a:r>
             <a:pPr algn="ctr" indent="0" marL="0">
               <a:buNone/>
@@ -20686,7 +26323,7 @@
                 <a:ea typeface="Calibri" pitchFamily="34" charset="-122"/>
                 <a:cs typeface="Calibri" pitchFamily="34" charset="-120"/>
               </a:rPr>
-              <a:t> (embeddings ground each agent)  ·  </a:t>
+              <a:t> (agreement boosts confidence, dedupes to Top Issues)  ·  </a:t>
             </a:r>
             <a:pPr algn="ctr" indent="0" marL="0">
               <a:buNone/>
@@ -21995,7 +27632,7 @@
                 <a:ea typeface="Calibri" pitchFamily="34" charset="-122"/>
                 <a:cs typeface="Calibri" pitchFamily="34" charset="-120"/>
               </a:rPr>
-              <a:t>The parser turns source into an Abstract Syntax Tree — a structured view of branches, calls and scopes that CIAA walks without executing the code.</a:t>
+              <a:t>Tree-sitter parses source into a real syntax tree (Java, Kotlin, C#, JS/TS, Go — plus Python via stdlib ast), which CIAA walks to measure exact complexity without executing the code.</a:t>
             </a:r>
             <a:endParaRPr lang="en-US" sz="1250" dirty="0"/>
           </a:p>
